--- a/presentations/output/P6_Тестирование.pptx
+++ b/presentations/output/P6_Тестирование.pptx
@@ -19,9 +19,10 @@
     <p:sldId id="267" r:id="rId13"/>
     <p:sldId id="268" r:id="rId14"/>
     <p:sldId id="269" r:id="rId15"/>
+    <p:sldId id="270" r:id="rId16"/>
   </p:sldIdLst>
   <p:notesMasterIdLst>
-    <p:notesMasterId r:id="rId16"/>
+    <p:notesMasterId r:id="rId17"/>
   </p:notesMasterIdLst>
   <p:sldSz cx="9144000" cy="5143500"/>
   <p:notesSz cx="5143500" cy="9144000"/>
@@ -979,6 +980,94 @@
             <a:fld id="{F7021451-1387-4CA6-816F-3879F97B5CBC}" type="slidenum">
               <a:rPr lang="en-US"/>
               <a:t>14</a:t>
+            </a:fld>
+            <a:endParaRPr lang="en-US"/>
+          </a:p>
+        </p:txBody>
+      </p:sp>
+    </p:spTree>
+    <p:extLst>
+      <p:ext uri="{BB962C8B-B14F-4D97-AF65-F5344CB8AC3E}">
+        <p14:creationId xmlns:p14="http://schemas.microsoft.com/office/powerpoint/2010/main" val="1024086991"/>
+      </p:ext>
+    </p:extLst>
+  </p:cSld>
+  <p:clrMapOvr>
+    <a:masterClrMapping/>
+  </p:clrMapOvr>
+</p:notes>
+</file>
+
+<file path=ppt/notesSlides/notesSlide15.xml><?xml version="1.0" encoding="utf-8"?>
+<p:notes xmlns:a="http://schemas.openxmlformats.org/drawingml/2006/main" xmlns:r="http://schemas.openxmlformats.org/officeDocument/2006/relationships" xmlns:p="http://schemas.openxmlformats.org/presentationml/2006/main">
+  <p:cSld>
+    <p:spTree>
+      <p:nvGrpSpPr>
+        <p:cNvPr id="1" name=""/>
+        <p:cNvGrpSpPr/>
+        <p:nvPr/>
+      </p:nvGrpSpPr>
+      <p:grpSpPr>
+        <a:xfrm>
+          <a:off x="0" y="0"/>
+          <a:ext cx="0" cy="0"/>
+          <a:chOff x="0" y="0"/>
+          <a:chExt cx="0" cy="0"/>
+        </a:xfrm>
+      </p:grpSpPr>
+      <p:sp>
+        <p:nvSpPr>
+          <p:cNvPr id="2" name="Slide Image Placeholder 1"/>
+          <p:cNvSpPr>
+            <a:spLocks noGrp="1" noRot="1" noChangeAspect="1"/>
+          </p:cNvSpPr>
+          <p:nvPr>
+            <p:ph type="sldImg"/>
+          </p:nvPr>
+        </p:nvSpPr>
+        <p:spPr/>
+      </p:sp>
+      <p:sp>
+        <p:nvSpPr>
+          <p:cNvPr id="3" name="Notes Placeholder 2"/>
+          <p:cNvSpPr>
+            <a:spLocks noGrp="1"/>
+          </p:cNvSpPr>
+          <p:nvPr>
+            <p:ph type="body" idx="1"/>
+          </p:nvPr>
+        </p:nvSpPr>
+        <p:spPr/>
+        <p:txBody>
+          <a:bodyPr/>
+          <a:lstStyle/>
+          <a:p>
+            <a:r>
+              <a:rPr lang="en-US" dirty="0"/>
+              <a:t/>
+            </a:r>
+            <a:endParaRPr lang="en-US" dirty="0"/>
+          </a:p>
+        </p:txBody>
+      </p:sp>
+      <p:sp>
+        <p:nvSpPr>
+          <p:cNvPr id="4" name="Slide Number Placeholder 3"/>
+          <p:cNvSpPr>
+            <a:spLocks noGrp="1"/>
+          </p:cNvSpPr>
+          <p:nvPr>
+            <p:ph type="sldNum" sz="quarter" idx="10"/>
+          </p:nvPr>
+        </p:nvSpPr>
+        <p:spPr/>
+        <p:txBody>
+          <a:bodyPr/>
+          <a:lstStyle/>
+          <a:p>
+            <a:fld id="{F7021451-1387-4CA6-816F-3879F97B5CBC}" type="slidenum">
+              <a:rPr lang="en-US"/>
+              <a:t>15</a:t>
             </a:fld>
             <a:endParaRPr lang="en-US"/>
           </a:p>
@@ -2014,7 +2103,7 @@
     <p:bg>
       <p:bgPr>
         <a:solidFill>
-          <a:srgbClr val="0F1E36"/>
+          <a:srgbClr val="000000"/>
         </a:solidFill>
       </p:bgPr>
     </p:bg>
@@ -2040,21 +2129,21 @@
         </p:nvSpPr>
         <p:spPr>
           <a:xfrm>
-            <a:off x="6675120" y="-822960"/>
-            <a:ext cx="3200400" cy="3200400"/>
+            <a:off x="6217920" y="-914400"/>
+            <a:ext cx="3657600" cy="3657600"/>
           </a:xfrm>
           <a:prstGeom prst="ellipse">
             <a:avLst/>
           </a:prstGeom>
           <a:solidFill>
-            <a:srgbClr val="EA580C">
-              <a:alpha val="20000"/>
+            <a:srgbClr val="F5A623">
+              <a:alpha val="30000"/>
             </a:srgbClr>
           </a:solidFill>
           <a:ln w="12700">
             <a:solidFill>
-              <a:srgbClr val="EA580C">
-                <a:alpha val="20000"/>
+              <a:srgbClr val="F5A623">
+                <a:alpha val="30000"/>
               </a:srgbClr>
             </a:solidFill>
             <a:prstDash val="solid"/>
@@ -2069,21 +2158,21 @@
         </p:nvSpPr>
         <p:spPr>
           <a:xfrm>
-            <a:off x="-457200" y="3566160"/>
-            <a:ext cx="2377440" cy="2377440"/>
+            <a:off x="-548640" y="3474720"/>
+            <a:ext cx="2011680" cy="2011680"/>
           </a:xfrm>
           <a:prstGeom prst="ellipse">
             <a:avLst/>
           </a:prstGeom>
           <a:solidFill>
-            <a:srgbClr val="FFEDD5">
-              <a:alpha val="13000"/>
+            <a:srgbClr val="E94560">
+              <a:alpha val="40000"/>
             </a:srgbClr>
           </a:solidFill>
           <a:ln w="12700">
             <a:solidFill>
-              <a:srgbClr val="FFEDD5">
-                <a:alpha val="13000"/>
+              <a:srgbClr val="E94560">
+                <a:alpha val="40000"/>
               </a:srgbClr>
             </a:solidFill>
             <a:prstDash val="solid"/>
@@ -2107,11 +2196,11 @@
             </a:avLst>
           </a:prstGeom>
           <a:solidFill>
-            <a:srgbClr val="EA580C"/>
+            <a:srgbClr val="E94560"/>
           </a:solidFill>
           <a:ln w="12700">
             <a:solidFill>
-              <a:srgbClr val="EA580C"/>
+              <a:srgbClr val="E94560"/>
             </a:solidFill>
             <a:prstDash val="solid"/>
           </a:ln>
@@ -2146,9 +2235,9 @@
                 <a:solidFill>
                   <a:srgbClr val="FFFFFF"/>
                 </a:solidFill>
-                <a:latin typeface="Calibri" pitchFamily="34" charset="0"/>
-                <a:ea typeface="Calibri" pitchFamily="34" charset="-122"/>
-                <a:cs typeface="Calibri" pitchFamily="34" charset="-120"/>
+                <a:latin typeface="Times New Roman" pitchFamily="34" charset="0"/>
+                <a:ea typeface="Times New Roman" pitchFamily="34" charset="-122"/>
+                <a:cs typeface="Times New Roman" pitchFamily="34" charset="-120"/>
               </a:rPr>
               <a:t>Тема 6</a:t>
             </a:r>
@@ -2181,34 +2270,34 @@
               <a:buNone/>
             </a:pPr>
             <a:r>
-              <a:rPr lang="en-US" sz="2500" b="1" dirty="0">
+              <a:rPr lang="en-US" sz="2600" b="1" dirty="0">
                 <a:solidFill>
                   <a:srgbClr val="FFFFFF"/>
                 </a:solidFill>
-                <a:latin typeface="Cambria" pitchFamily="34" charset="0"/>
-                <a:ea typeface="Cambria" pitchFamily="34" charset="-122"/>
-                <a:cs typeface="Cambria" pitchFamily="34" charset="-120"/>
+                <a:latin typeface="Georgia" pitchFamily="34" charset="0"/>
+                <a:ea typeface="Georgia" pitchFamily="34" charset="-122"/>
+                <a:cs typeface="Georgia" pitchFamily="34" charset="-120"/>
               </a:rPr>
               <a:t>Тестирование ПО</a:t>
             </a:r>
-            <a:endParaRPr lang="en-US" sz="2500" dirty="0"/>
-          </a:p>
-          <a:p>
-            <a:pPr algn="l" indent="0" marL="0">
-              <a:buNone/>
-            </a:pPr>
-            <a:r>
-              <a:rPr lang="en-US" sz="2500" b="1" dirty="0">
+            <a:endParaRPr lang="en-US" sz="2600" dirty="0"/>
+          </a:p>
+          <a:p>
+            <a:pPr algn="l" indent="0" marL="0">
+              <a:buNone/>
+            </a:pPr>
+            <a:r>
+              <a:rPr lang="en-US" sz="2600" b="1" dirty="0">
                 <a:solidFill>
                   <a:srgbClr val="FFFFFF"/>
                 </a:solidFill>
-                <a:latin typeface="Cambria" pitchFamily="34" charset="0"/>
-                <a:ea typeface="Cambria" pitchFamily="34" charset="-122"/>
-                <a:cs typeface="Cambria" pitchFamily="34" charset="-120"/>
+                <a:latin typeface="Georgia" pitchFamily="34" charset="0"/>
+                <a:ea typeface="Georgia" pitchFamily="34" charset="-122"/>
+                <a:cs typeface="Georgia" pitchFamily="34" charset="-120"/>
               </a:rPr>
               <a:t>Software Testing and QA</a:t>
             </a:r>
-            <a:endParaRPr lang="en-US" sz="2500" dirty="0"/>
+            <a:endParaRPr lang="en-US" sz="2600" dirty="0"/>
           </a:p>
         </p:txBody>
       </p:sp>
@@ -2237,17 +2326,17 @@
               <a:buNone/>
             </a:pPr>
             <a:r>
-              <a:rPr lang="en-US" sz="1300" dirty="0">
-                <a:solidFill>
-                  <a:srgbClr val="FFF7ED"/>
-                </a:solidFill>
-                <a:latin typeface="Calibri" pitchFamily="34" charset="0"/>
-                <a:ea typeface="Calibri" pitchFamily="34" charset="-122"/>
-                <a:cs typeface="Calibri" pitchFamily="34" charset="-120"/>
+              <a:rPr lang="en-US" sz="1200" dirty="0">
+                <a:solidFill>
+                  <a:srgbClr val="F8F4F0"/>
+                </a:solidFill>
+                <a:latin typeface="Times New Roman" pitchFamily="34" charset="0"/>
+                <a:ea typeface="Times New Roman" pitchFamily="34" charset="-122"/>
+                <a:cs typeface="Times New Roman" pitchFamily="34" charset="-120"/>
               </a:rPr>
               <a:t>Проект ТППО: «Личный кабинет для клиентов компании»</a:t>
             </a:r>
-            <a:endParaRPr lang="en-US" sz="1300" dirty="0"/>
+            <a:endParaRPr lang="en-US" sz="1200" dirty="0"/>
           </a:p>
         </p:txBody>
       </p:sp>
@@ -2266,11 +2355,11 @@
             <a:avLst/>
           </a:prstGeom>
           <a:solidFill>
-            <a:srgbClr val="0A1424"/>
+            <a:srgbClr val="0D0D1A"/>
           </a:solidFill>
           <a:ln w="12700">
             <a:solidFill>
-              <a:srgbClr val="0A1424"/>
+              <a:srgbClr val="0D0D1A"/>
             </a:solidFill>
             <a:prstDash val="solid"/>
           </a:ln>
@@ -2303,13 +2392,13 @@
             <a:r>
               <a:rPr lang="en-US" sz="1100" dirty="0">
                 <a:solidFill>
-                  <a:srgbClr val="7B9BC0"/>
-                </a:solidFill>
-                <a:latin typeface="Calibri" pitchFamily="34" charset="0"/>
-                <a:ea typeface="Calibri" pitchFamily="34" charset="-122"/>
-                <a:cs typeface="Calibri" pitchFamily="34" charset="-120"/>
-              </a:rPr>
-              <a:t>Выполнила: Ломазина А., гр.22307   |   Руководитель: Корзун Д.Ж.   |   ИМИТ ПетрГУ, 2024/25</a:t>
+                  <a:srgbClr val="B8B0C0"/>
+                </a:solidFill>
+                <a:latin typeface="Times New Roman" pitchFamily="34" charset="0"/>
+                <a:ea typeface="Times New Roman" pitchFamily="34" charset="-122"/>
+                <a:cs typeface="Times New Roman" pitchFamily="34" charset="-120"/>
+              </a:rPr>
+              <a:t>Выполнила: Ломазина Александра, гр 22307   |   Руководитель: Корзун Дмитрий Жоржевич   |   ИМИТ ПетрГУ, 2026</a:t>
             </a:r>
             <a:endParaRPr lang="en-US" sz="1100" dirty="0"/>
           </a:p>
@@ -2372,17 +2461,17 @@
               <a:buNone/>
             </a:pPr>
             <a:r>
-              <a:rPr lang="en-US" sz="2000" b="1" dirty="0">
-                <a:solidFill>
-                  <a:srgbClr val="0F1E36"/>
-                </a:solidFill>
-                <a:latin typeface="Cambria" pitchFamily="34" charset="0"/>
-                <a:ea typeface="Cambria" pitchFamily="34" charset="-122"/>
-                <a:cs typeface="Cambria" pitchFamily="34" charset="-120"/>
-              </a:rPr>
-              <a:t>Мокирование внешних систем в тестах</a:t>
-            </a:r>
-            <a:endParaRPr lang="en-US" sz="2000" dirty="0"/>
+              <a:rPr lang="en-US" sz="1600" b="1" dirty="0">
+                <a:solidFill>
+                  <a:srgbClr val="1A1A2E"/>
+                </a:solidFill>
+                <a:latin typeface="Georgia" pitchFamily="34" charset="0"/>
+                <a:ea typeface="Georgia" pitchFamily="34" charset="-122"/>
+                <a:cs typeface="Georgia" pitchFamily="34" charset="-120"/>
+              </a:rPr>
+              <a:t>Отказоустойчивость: тестирование синка 1С</a:t>
+            </a:r>
+            <a:endParaRPr lang="en-US" sz="1600" dirty="0"/>
           </a:p>
         </p:txBody>
       </p:sp>
@@ -2395,26 +2484,26 @@
         <p:spPr>
           <a:xfrm>
             <a:off x="384048" y="822960"/>
-            <a:ext cx="4023360" cy="4119372"/>
+            <a:ext cx="8375904" cy="4119372"/>
           </a:xfrm>
           <a:prstGeom prst="roundRect">
             <a:avLst>
-              <a:gd name="adj" fmla="val 2273"/>
+              <a:gd name="adj" fmla="val 2220"/>
             </a:avLst>
           </a:prstGeom>
           <a:solidFill>
-            <a:srgbClr val="FFF7ED"/>
+            <a:srgbClr val="F8F4F0"/>
           </a:solidFill>
           <a:ln w="12700">
             <a:solidFill>
-              <a:srgbClr val="FFF7ED"/>
+              <a:srgbClr val="EFEAE3"/>
             </a:solidFill>
             <a:prstDash val="solid"/>
           </a:ln>
           <a:effectLst>
-            <a:outerShdw sx="100000" sy="100000" kx="0" ky="0" algn="bl" rotWithShape="0" blurRad="88900" dist="25400" dir="2700000">
+            <a:outerShdw sx="100000" sy="100000" kx="0" ky="0" algn="bl" rotWithShape="0" blurRad="152400" dist="38100" dir="2700000">
               <a:srgbClr val="000000">
-                <a:alpha val="9000"/>
+                <a:alpha val="12000"/>
               </a:srgbClr>
             </a:outerShdw>
           </a:effectLst>
@@ -2429,7 +2518,7 @@
         <p:spPr>
           <a:xfrm>
             <a:off x="548640" y="932688"/>
-            <a:ext cx="3694176" cy="365760"/>
+            <a:ext cx="8046720" cy="411480"/>
           </a:xfrm>
           <a:prstGeom prst="rect">
             <a:avLst/>
@@ -2445,17 +2534,17 @@
               <a:buNone/>
             </a:pPr>
             <a:r>
-              <a:rPr lang="en-US" sz="1300" b="1" dirty="0">
-                <a:solidFill>
-                  <a:srgbClr val="0F1E36"/>
+              <a:rPr lang="en-US" sz="1200" b="1" dirty="0">
+                <a:solidFill>
+                  <a:srgbClr val="1A1A2E"/>
                 </a:solidFill>
                 <a:latin typeface="Cambria" pitchFamily="34" charset="0"/>
                 <a:ea typeface="Cambria" pitchFamily="34" charset="-122"/>
                 <a:cs typeface="Cambria" pitchFamily="34" charset="-120"/>
               </a:rPr>
-              <a:t>Мок-клиент для MinIO S3</a:t>
-            </a:r>
-            <a:endParaRPr lang="en-US" sz="1300" dirty="0"/>
+              <a:t>Проверка сценариев разрыва сети и целостности очереди</a:t>
+            </a:r>
+            <a:endParaRPr lang="en-US" sz="1200" dirty="0"/>
           </a:p>
         </p:txBody>
       </p:sp>
@@ -2467,8 +2556,8 @@
         </p:nvSpPr>
         <p:spPr>
           <a:xfrm>
-            <a:off x="548640" y="1389888"/>
-            <a:ext cx="3694176" cy="2926080"/>
+            <a:off x="548640" y="1417320"/>
+            <a:ext cx="8046720" cy="3296412"/>
           </a:xfrm>
           <a:prstGeom prst="rect">
             <a:avLst/>
@@ -2477,153 +2566,81 @@
           <a:ln/>
         </p:spPr>
         <p:txBody>
-          <a:bodyPr wrap="square" rtlCol="0" anchor="ctr"/>
-          <a:lstStyle/>
-          <a:p>
-            <a:pPr indent="0" marL="0">
-              <a:buNone/>
-            </a:pPr>
-            <a:r>
-              <a:rPr lang="en-US" sz="1150" dirty="0">
-                <a:solidFill>
-                  <a:srgbClr val="1E293B"/>
-                </a:solidFill>
-                <a:latin typeface="Calibri" pitchFamily="34" charset="0"/>
-                <a:ea typeface="Calibri" pitchFamily="34" charset="-122"/>
-                <a:cs typeface="Calibri" pitchFamily="34" charset="-120"/>
-              </a:rPr>
-              <a:t>Тесты запускаются в среде, где реальное облачное хранилище недоступно. Мы используем библиотеку `mock-aws-s3`. Все методы `putObject` и `getSignedUrl` перехватываются, сохраняя файлы во временной оперативной памяти NodeJS, что ускоряет тесты и экономит трафик.</a:t>
-            </a:r>
-            <a:endParaRPr lang="en-US" sz="1150" dirty="0"/>
-          </a:p>
-        </p:txBody>
-      </p:sp>
-      <p:sp>
-        <p:nvSpPr>
-          <p:cNvPr id="6" name="Shape 4"/>
-          <p:cNvSpPr/>
-          <p:nvPr/>
-        </p:nvSpPr>
-        <p:spPr>
-          <a:xfrm>
-            <a:off x="4681728" y="822960"/>
-            <a:ext cx="4078224" cy="4119372"/>
-          </a:xfrm>
-          <a:prstGeom prst="roundRect">
-            <a:avLst>
-              <a:gd name="adj" fmla="val 2242"/>
-            </a:avLst>
-          </a:prstGeom>
-          <a:solidFill>
-            <a:srgbClr val="D1FAE5"/>
-          </a:solidFill>
-          <a:ln w="12700">
-            <a:solidFill>
-              <a:srgbClr val="D1FAE5"/>
-            </a:solidFill>
-            <a:prstDash val="solid"/>
-          </a:ln>
-          <a:effectLst>
-            <a:outerShdw sx="100000" sy="100000" kx="0" ky="0" algn="bl" rotWithShape="0" blurRad="88900" dist="25400" dir="2700000">
-              <a:srgbClr val="000000">
-                <a:alpha val="9000"/>
-              </a:srgbClr>
-            </a:outerShdw>
-          </a:effectLst>
-        </p:spPr>
-      </p:sp>
-      <p:sp>
-        <p:nvSpPr>
-          <p:cNvPr id="7" name="Text 5"/>
-          <p:cNvSpPr/>
-          <p:nvPr/>
-        </p:nvSpPr>
-        <p:spPr>
-          <a:xfrm>
-            <a:off x="4846320" y="932688"/>
-            <a:ext cx="3749040" cy="365760"/>
-          </a:xfrm>
-          <a:prstGeom prst="rect">
-            <a:avLst/>
-          </a:prstGeom>
-          <a:noFill/>
-          <a:ln/>
-        </p:spPr>
-        <p:txBody>
-          <a:bodyPr wrap="square" rtlCol="0" anchor="ctr"/>
-          <a:lstStyle/>
-          <a:p>
-            <a:pPr indent="0" marL="0">
-              <a:buNone/>
-            </a:pPr>
-            <a:r>
-              <a:rPr lang="en-US" sz="1300" b="1" dirty="0">
-                <a:solidFill>
-                  <a:srgbClr val="0F1E36"/>
-                </a:solidFill>
-                <a:latin typeface="Cambria" pitchFamily="34" charset="0"/>
-                <a:ea typeface="Cambria" pitchFamily="34" charset="-122"/>
-                <a:cs typeface="Cambria" pitchFamily="34" charset="-120"/>
-              </a:rPr>
-              <a:t>Мок симулятора 1С</a:t>
-            </a:r>
-            <a:endParaRPr lang="en-US" sz="1300" dirty="0"/>
-          </a:p>
-        </p:txBody>
-      </p:sp>
-      <p:sp>
-        <p:nvSpPr>
-          <p:cNvPr id="8" name="Text 6"/>
-          <p:cNvSpPr/>
-          <p:nvPr/>
-        </p:nvSpPr>
-        <p:spPr>
-          <a:xfrm>
-            <a:off x="4846320" y="1389888"/>
-            <a:ext cx="3749040" cy="2926080"/>
-          </a:xfrm>
-          <a:prstGeom prst="rect">
-            <a:avLst/>
-          </a:prstGeom>
-          <a:noFill/>
-          <a:ln/>
-        </p:spPr>
-        <p:txBody>
-          <a:bodyPr wrap="square" rtlCol="0" anchor="ctr"/>
-          <a:lstStyle/>
-          <a:p>
-            <a:pPr indent="0" marL="0">
-              <a:buNone/>
-            </a:pPr>
-            <a:r>
-              <a:rPr lang="en-US" sz="1100" dirty="0">
-                <a:solidFill>
-                  <a:srgbClr val="1E293B"/>
-                </a:solidFill>
-                <a:latin typeface="Calibri" pitchFamily="34" charset="0"/>
-                <a:ea typeface="Calibri" pitchFamily="34" charset="-122"/>
-                <a:cs typeface="Calibri" pitchFamily="34" charset="-120"/>
-              </a:rPr>
-              <a:t>• Вместо запуска тяжелой базы 1С в Docker, тесты шлют запросы на легковесную Express-заглушку (mock-server).</a:t>
-            </a:r>
-            <a:endParaRPr lang="en-US" sz="1100" dirty="0"/>
-          </a:p>
-          <a:p>
-            <a:pPr indent="0" marL="0">
-              <a:buNone/>
-            </a:pPr>
-            <a:r>
-              <a:rPr lang="en-US" sz="1100" dirty="0">
-                <a:solidFill>
-                  <a:srgbClr val="1E293B"/>
-                </a:solidFill>
-                <a:latin typeface="Calibri" pitchFamily="34" charset="0"/>
-                <a:ea typeface="Calibri" pitchFamily="34" charset="-122"/>
-                <a:cs typeface="Calibri" pitchFamily="34" charset="-120"/>
-              </a:rPr>
-              <a:t>• Заглушка настроена на генерацию детерминированных ответов: успех (200 OK), задержка (504 Timeout) или сбой данных (400 Bad Request) по требованию тест-кейса.</a:t>
-            </a:r>
-            <a:endParaRPr lang="en-US" sz="1100" dirty="0"/>
+          <a:bodyPr wrap="square" rtlCol="0" anchor="t"/>
+          <a:lstStyle/>
+          <a:p>
+            <a:pPr algn="l" indent="0" marL="0">
+              <a:buNone/>
+            </a:pPr>
+            <a:r>
+              <a:rPr lang="en-US" sz="1600" dirty="0">
+                <a:solidFill>
+                  <a:srgbClr val="2D2D3A"/>
+                </a:solidFill>
+                <a:latin typeface="Times New Roman" pitchFamily="34" charset="0"/>
+                <a:ea typeface="Times New Roman" pitchFamily="34" charset="-122"/>
+                <a:cs typeface="Times New Roman" pitchFamily="34" charset="-120"/>
+              </a:rPr>
+              <a:t>Специальный интеграционный тест эмулирует временное отключение симулятора 1С (имитация сбоя связи в ООО 'Неосистемы'). Воркер outbox должен зафиксировать сбой связи, перевести событие в статус `failed` и запустить таймер повторных отложенных попыток.</a:t>
+            </a:r>
+            <a:endParaRPr lang="en-US" sz="1600" dirty="0"/>
+          </a:p>
+          <a:p>
+            <a:pPr algn="l" indent="0" marL="0">
+              <a:buNone/>
+            </a:pPr>
+            <a:endParaRPr lang="en-US" sz="1600" dirty="0"/>
+          </a:p>
+          <a:p>
+            <a:pPr algn="l" indent="0" marL="0">
+              <a:buNone/>
+            </a:pPr>
+            <a:r>
+              <a:rPr lang="en-US" sz="1600" dirty="0">
+                <a:solidFill>
+                  <a:srgbClr val="2D2D3A"/>
+                </a:solidFill>
+                <a:latin typeface="Times New Roman" pitchFamily="34" charset="0"/>
+                <a:ea typeface="Times New Roman" pitchFamily="34" charset="-122"/>
+                <a:cs typeface="Times New Roman" pitchFamily="34" charset="-120"/>
+              </a:rPr>
+              <a:t>Проверка целостности очереди:</a:t>
+            </a:r>
+            <a:endParaRPr lang="en-US" sz="1600" dirty="0"/>
+          </a:p>
+          <a:p>
+            <a:pPr algn="l" indent="0" marL="0">
+              <a:buNone/>
+            </a:pPr>
+            <a:r>
+              <a:rPr lang="en-US" sz="1600" dirty="0">
+                <a:solidFill>
+                  <a:srgbClr val="2D2D3A"/>
+                </a:solidFill>
+                <a:latin typeface="Times New Roman" pitchFamily="34" charset="0"/>
+                <a:ea typeface="Times New Roman" pitchFamily="34" charset="-122"/>
+                <a:cs typeface="Times New Roman" pitchFamily="34" charset="-120"/>
+              </a:rPr>
+              <a:t>• Тест гарантирует, что ни один тикет не продублируется в 1С дважды при повторных синк-попытках (проверка идемпотентности).</a:t>
+            </a:r>
+            <a:endParaRPr lang="en-US" sz="1600" dirty="0"/>
+          </a:p>
+          <a:p>
+            <a:pPr algn="l" indent="0" marL="0">
+              <a:buNone/>
+            </a:pPr>
+            <a:r>
+              <a:rPr lang="en-US" sz="1600" dirty="0">
+                <a:solidFill>
+                  <a:srgbClr val="2D2D3A"/>
+                </a:solidFill>
+                <a:latin typeface="Times New Roman" pitchFamily="34" charset="0"/>
+                <a:ea typeface="Times New Roman" pitchFamily="34" charset="-122"/>
+                <a:cs typeface="Times New Roman" pitchFamily="34" charset="-120"/>
+              </a:rPr>
+              <a:t>• Контроль порядка: тесты проверяют, что сообщения чата приходят в 1С в хронологическом порядке, даже если отправка зависала из-за разрывов связи.</a:t>
+            </a:r>
+            <a:endParaRPr lang="en-US" sz="1600" dirty="0"/>
           </a:p>
         </p:txBody>
       </p:sp>
@@ -2684,17 +2701,17 @@
               <a:buNone/>
             </a:pPr>
             <a:r>
-              <a:rPr lang="en-US" sz="2000" b="1" dirty="0">
-                <a:solidFill>
-                  <a:srgbClr val="0F1E36"/>
-                </a:solidFill>
-                <a:latin typeface="Cambria" pitchFamily="34" charset="0"/>
-                <a:ea typeface="Cambria" pitchFamily="34" charset="-122"/>
-                <a:cs typeface="Cambria" pitchFamily="34" charset="-120"/>
-              </a:rPr>
-              <a:t>Метрики качества: Анализ покрытия (Coverage)</a:t>
-            </a:r>
-            <a:endParaRPr lang="en-US" sz="2000" dirty="0"/>
+              <a:rPr lang="en-US" sz="1600" b="1" dirty="0">
+                <a:solidFill>
+                  <a:srgbClr val="1A1A2E"/>
+                </a:solidFill>
+                <a:latin typeface="Georgia" pitchFamily="34" charset="0"/>
+                <a:ea typeface="Georgia" pitchFamily="34" charset="-122"/>
+                <a:cs typeface="Georgia" pitchFamily="34" charset="-120"/>
+              </a:rPr>
+              <a:t>Мокирование внешних систем в тестах</a:t>
+            </a:r>
+            <a:endParaRPr lang="en-US" sz="1600" dirty="0"/>
           </a:p>
         </p:txBody>
       </p:sp>
@@ -2707,26 +2724,26 @@
         <p:spPr>
           <a:xfrm>
             <a:off x="384048" y="822960"/>
-            <a:ext cx="4023360" cy="4119372"/>
+            <a:ext cx="8375904" cy="4119372"/>
           </a:xfrm>
           <a:prstGeom prst="roundRect">
             <a:avLst>
-              <a:gd name="adj" fmla="val 2273"/>
+              <a:gd name="adj" fmla="val 2220"/>
             </a:avLst>
           </a:prstGeom>
           <a:solidFill>
-            <a:srgbClr val="FFF7ED"/>
+            <a:srgbClr val="F8F4F0"/>
           </a:solidFill>
           <a:ln w="12700">
             <a:solidFill>
-              <a:srgbClr val="FFF7ED"/>
+              <a:srgbClr val="EFEAE3"/>
             </a:solidFill>
             <a:prstDash val="solid"/>
           </a:ln>
           <a:effectLst>
-            <a:outerShdw sx="100000" sy="100000" kx="0" ky="0" algn="bl" rotWithShape="0" blurRad="88900" dist="25400" dir="2700000">
+            <a:outerShdw sx="100000" sy="100000" kx="0" ky="0" algn="bl" rotWithShape="0" blurRad="152400" dist="38100" dir="2700000">
               <a:srgbClr val="000000">
-                <a:alpha val="9000"/>
+                <a:alpha val="12000"/>
               </a:srgbClr>
             </a:outerShdw>
           </a:effectLst>
@@ -2741,7 +2758,7 @@
         <p:spPr>
           <a:xfrm>
             <a:off x="548640" y="932688"/>
-            <a:ext cx="3694176" cy="365760"/>
+            <a:ext cx="8046720" cy="411480"/>
           </a:xfrm>
           <a:prstGeom prst="rect">
             <a:avLst/>
@@ -2757,17 +2774,17 @@
               <a:buNone/>
             </a:pPr>
             <a:r>
-              <a:rPr lang="en-US" sz="1300" b="1" dirty="0">
-                <a:solidFill>
-                  <a:srgbClr val="0F1E36"/>
+              <a:rPr lang="en-US" sz="1200" b="1" dirty="0">
+                <a:solidFill>
+                  <a:srgbClr val="1A1A2E"/>
                 </a:solidFill>
                 <a:latin typeface="Cambria" pitchFamily="34" charset="0"/>
                 <a:ea typeface="Cambria" pitchFamily="34" charset="-122"/>
                 <a:cs typeface="Cambria" pitchFamily="34" charset="-120"/>
               </a:rPr>
-              <a:t>Что измеряет утилита Jest Coverage?</a:t>
-            </a:r>
-            <a:endParaRPr lang="en-US" sz="1300" dirty="0"/>
+              <a:t>Мок-клиент для MinIO S3 и мок симулятора 1С</a:t>
+            </a:r>
+            <a:endParaRPr lang="en-US" sz="1200" dirty="0"/>
           </a:p>
         </p:txBody>
       </p:sp>
@@ -2779,8 +2796,8 @@
         </p:nvSpPr>
         <p:spPr>
           <a:xfrm>
-            <a:off x="548640" y="1389888"/>
-            <a:ext cx="3694176" cy="2926080"/>
+            <a:off x="548640" y="1417320"/>
+            <a:ext cx="8046720" cy="3296412"/>
           </a:xfrm>
           <a:prstGeom prst="rect">
             <a:avLst/>
@@ -2789,221 +2806,98 @@
           <a:ln/>
         </p:spPr>
         <p:txBody>
-          <a:bodyPr wrap="square" rtlCol="0" anchor="ctr"/>
-          <a:lstStyle/>
-          <a:p>
-            <a:pPr indent="0" marL="0">
-              <a:buNone/>
-            </a:pPr>
-            <a:r>
-              <a:rPr lang="en-US" sz="1100" dirty="0">
-                <a:solidFill>
-                  <a:srgbClr val="1E293B"/>
-                </a:solidFill>
-                <a:latin typeface="Calibri" pitchFamily="34" charset="0"/>
-                <a:ea typeface="Calibri" pitchFamily="34" charset="-122"/>
-                <a:cs typeface="Calibri" pitchFamily="34" charset="-120"/>
-              </a:rPr>
-              <a:t>• Statement Coverage — какой процент строк кода был исполнен.</a:t>
-            </a:r>
-            <a:endParaRPr lang="en-US" sz="1100" dirty="0"/>
-          </a:p>
-          <a:p>
-            <a:pPr indent="0" marL="0">
-              <a:buNone/>
-            </a:pPr>
-            <a:r>
-              <a:rPr lang="en-US" sz="1100" dirty="0">
-                <a:solidFill>
-                  <a:srgbClr val="1E293B"/>
-                </a:solidFill>
-                <a:latin typeface="Calibri" pitchFamily="34" charset="0"/>
-                <a:ea typeface="Calibri" pitchFamily="34" charset="-122"/>
-                <a:cs typeface="Calibri" pitchFamily="34" charset="-120"/>
-              </a:rPr>
-              <a:t>• Branch Coverage — пройдены ли все условия ветвления (`if-else` блоки).</a:t>
-            </a:r>
-            <a:endParaRPr lang="en-US" sz="1100" dirty="0"/>
-          </a:p>
-          <a:p>
-            <a:pPr indent="0" marL="0">
-              <a:buNone/>
-            </a:pPr>
-            <a:r>
-              <a:rPr lang="en-US" sz="1100" dirty="0">
-                <a:solidFill>
-                  <a:srgbClr val="1E293B"/>
-                </a:solidFill>
-                <a:latin typeface="Calibri" pitchFamily="34" charset="0"/>
-                <a:ea typeface="Calibri" pitchFamily="34" charset="-122"/>
-                <a:cs typeface="Calibri" pitchFamily="34" charset="-120"/>
-              </a:rPr>
-              <a:t>• Function Coverage — вызваны ли все объявленные функции.</a:t>
-            </a:r>
-            <a:endParaRPr lang="en-US" sz="1100" dirty="0"/>
-          </a:p>
-          <a:p>
-            <a:pPr indent="0" marL="0">
-              <a:buNone/>
-            </a:pPr>
-            <a:r>
-              <a:rPr lang="en-US" sz="1100" dirty="0">
-                <a:solidFill>
-                  <a:srgbClr val="1E293B"/>
-                </a:solidFill>
-                <a:latin typeface="Calibri" pitchFamily="34" charset="0"/>
-                <a:ea typeface="Calibri" pitchFamily="34" charset="-122"/>
-                <a:cs typeface="Calibri" pitchFamily="34" charset="-120"/>
-              </a:rPr>
-              <a:t>• Line Coverage — количество выполненных физических строк кода.</a:t>
-            </a:r>
-            <a:endParaRPr lang="en-US" sz="1100" dirty="0"/>
-          </a:p>
-        </p:txBody>
-      </p:sp>
-      <p:sp>
-        <p:nvSpPr>
-          <p:cNvPr id="6" name="Shape 4"/>
-          <p:cNvSpPr/>
-          <p:nvPr/>
-        </p:nvSpPr>
-        <p:spPr>
-          <a:xfrm>
-            <a:off x="4681728" y="822960"/>
-            <a:ext cx="4078224" cy="4119372"/>
-          </a:xfrm>
-          <a:prstGeom prst="roundRect">
-            <a:avLst>
-              <a:gd name="adj" fmla="val 2242"/>
-            </a:avLst>
-          </a:prstGeom>
-          <a:solidFill>
-            <a:srgbClr val="D1FAE5"/>
-          </a:solidFill>
-          <a:ln w="12700">
-            <a:solidFill>
-              <a:srgbClr val="D1FAE5"/>
-            </a:solidFill>
-            <a:prstDash val="solid"/>
-          </a:ln>
-          <a:effectLst>
-            <a:outerShdw sx="100000" sy="100000" kx="0" ky="0" algn="bl" rotWithShape="0" blurRad="88900" dist="25400" dir="2700000">
-              <a:srgbClr val="000000">
-                <a:alpha val="9000"/>
-              </a:srgbClr>
-            </a:outerShdw>
-          </a:effectLst>
-        </p:spPr>
-      </p:sp>
-      <p:sp>
-        <p:nvSpPr>
-          <p:cNvPr id="7" name="Text 5"/>
-          <p:cNvSpPr/>
-          <p:nvPr/>
-        </p:nvSpPr>
-        <p:spPr>
-          <a:xfrm>
-            <a:off x="4846320" y="932688"/>
-            <a:ext cx="3749040" cy="365760"/>
-          </a:xfrm>
-          <a:prstGeom prst="rect">
-            <a:avLst/>
-          </a:prstGeom>
-          <a:noFill/>
-          <a:ln/>
-        </p:spPr>
-        <p:txBody>
-          <a:bodyPr wrap="square" rtlCol="0" anchor="ctr"/>
-          <a:lstStyle/>
-          <a:p>
-            <a:pPr indent="0" marL="0">
-              <a:buNone/>
-            </a:pPr>
-            <a:r>
-              <a:rPr lang="en-US" sz="1300" b="1" dirty="0">
-                <a:solidFill>
-                  <a:srgbClr val="0F1E36"/>
-                </a:solidFill>
-                <a:latin typeface="Cambria" pitchFamily="34" charset="0"/>
-                <a:ea typeface="Cambria" pitchFamily="34" charset="-122"/>
-                <a:cs typeface="Cambria" pitchFamily="34" charset="-120"/>
-              </a:rPr>
-              <a:t>Целевые показатели качества</a:t>
-            </a:r>
-            <a:endParaRPr lang="en-US" sz="1300" dirty="0"/>
-          </a:p>
-        </p:txBody>
-      </p:sp>
-      <p:sp>
-        <p:nvSpPr>
-          <p:cNvPr id="8" name="Text 6"/>
-          <p:cNvSpPr/>
-          <p:nvPr/>
-        </p:nvSpPr>
-        <p:spPr>
-          <a:xfrm>
-            <a:off x="4846320" y="1389888"/>
-            <a:ext cx="3749040" cy="2926080"/>
-          </a:xfrm>
-          <a:prstGeom prst="rect">
-            <a:avLst/>
-          </a:prstGeom>
-          <a:noFill/>
-          <a:ln/>
-        </p:spPr>
-        <p:txBody>
-          <a:bodyPr wrap="square" rtlCol="0" anchor="ctr"/>
-          <a:lstStyle/>
-          <a:p>
-            <a:pPr indent="0" marL="0">
-              <a:buNone/>
-            </a:pPr>
-            <a:r>
-              <a:rPr lang="en-US" sz="1100" dirty="0">
-                <a:solidFill>
-                  <a:srgbClr val="1E293B"/>
-                </a:solidFill>
-                <a:latin typeface="Calibri" pitchFamily="34" charset="0"/>
-                <a:ea typeface="Calibri" pitchFamily="34" charset="-122"/>
-                <a:cs typeface="Calibri" pitchFamily="34" charset="-120"/>
-              </a:rPr>
-              <a:t>• Общее покрытие операторов (statements) во всём проекте установлено на уровне не менее 80%.</a:t>
-            </a:r>
-            <a:endParaRPr lang="en-US" sz="1100" dirty="0"/>
-          </a:p>
-          <a:p>
-            <a:pPr indent="0" marL="0">
-              <a:buNone/>
-            </a:pPr>
-            <a:r>
-              <a:rPr lang="en-US" sz="1100" dirty="0">
-                <a:solidFill>
-                  <a:srgbClr val="1E293B"/>
-                </a:solidFill>
-                <a:latin typeface="Calibri" pitchFamily="34" charset="0"/>
-                <a:ea typeface="Calibri" pitchFamily="34" charset="-122"/>
-                <a:cs typeface="Calibri" pitchFamily="34" charset="-120"/>
-              </a:rPr>
-              <a:t>• Покрытие критических модулей бизнес-логики (TicketService, MessageService) — не менее 90%.</a:t>
-            </a:r>
-            <a:endParaRPr lang="en-US" sz="1100" dirty="0"/>
-          </a:p>
-          <a:p>
-            <a:pPr indent="0" marL="0">
-              <a:buNone/>
-            </a:pPr>
-            <a:r>
-              <a:rPr lang="en-US" sz="1100" dirty="0">
-                <a:solidFill>
-                  <a:srgbClr val="1E293B"/>
-                </a:solidFill>
-                <a:latin typeface="Calibri" pitchFamily="34" charset="0"/>
-                <a:ea typeface="Calibri" pitchFamily="34" charset="-122"/>
-                <a:cs typeface="Calibri" pitchFamily="34" charset="-120"/>
-              </a:rPr>
-              <a:t>• При падении суммарного покрытия ниже 80% сборка проекта в CI/CD автоматически ломается, предотвращая выкат непроверенного кода в прод.</a:t>
-            </a:r>
-            <a:endParaRPr lang="en-US" sz="1100" dirty="0"/>
+          <a:bodyPr wrap="square" rtlCol="0" anchor="t"/>
+          <a:lstStyle/>
+          <a:p>
+            <a:pPr algn="l" indent="0" marL="0">
+              <a:buNone/>
+            </a:pPr>
+            <a:r>
+              <a:rPr lang="en-US" sz="1600" dirty="0">
+                <a:solidFill>
+                  <a:srgbClr val="2D2D3A"/>
+                </a:solidFill>
+                <a:latin typeface="Times New Roman" pitchFamily="34" charset="0"/>
+                <a:ea typeface="Times New Roman" pitchFamily="34" charset="-122"/>
+                <a:cs typeface="Times New Roman" pitchFamily="34" charset="-120"/>
+              </a:rPr>
+              <a:t>Мок-клиент для MinIO S3:</a:t>
+            </a:r>
+            <a:endParaRPr lang="en-US" sz="1600" dirty="0"/>
+          </a:p>
+          <a:p>
+            <a:pPr algn="l" indent="0" marL="0">
+              <a:buNone/>
+            </a:pPr>
+            <a:r>
+              <a:rPr lang="en-US" sz="1600" dirty="0">
+                <a:solidFill>
+                  <a:srgbClr val="2D2D3A"/>
+                </a:solidFill>
+                <a:latin typeface="Times New Roman" pitchFamily="34" charset="0"/>
+                <a:ea typeface="Times New Roman" pitchFamily="34" charset="-122"/>
+                <a:cs typeface="Times New Roman" pitchFamily="34" charset="-120"/>
+              </a:rPr>
+              <a:t>Тесты запускаются в среде, где реальное облачное хранилище недоступно. Мы используем библиотеку `mock-aws-s3`. Все методы `putObject` и `getSignedUrl` перехватываются, сохраняя файлы во временной оперативной памяти NodeJS, что ускоряет тесты и экономит трафик.</a:t>
+            </a:r>
+            <a:endParaRPr lang="en-US" sz="1600" dirty="0"/>
+          </a:p>
+          <a:p>
+            <a:pPr algn="l" indent="0" marL="0">
+              <a:buNone/>
+            </a:pPr>
+            <a:endParaRPr lang="en-US" sz="1600" dirty="0"/>
+          </a:p>
+          <a:p>
+            <a:pPr algn="l" indent="0" marL="0">
+              <a:buNone/>
+            </a:pPr>
+            <a:r>
+              <a:rPr lang="en-US" sz="1600" dirty="0">
+                <a:solidFill>
+                  <a:srgbClr val="2D2D3A"/>
+                </a:solidFill>
+                <a:latin typeface="Times New Roman" pitchFamily="34" charset="0"/>
+                <a:ea typeface="Times New Roman" pitchFamily="34" charset="-122"/>
+                <a:cs typeface="Times New Roman" pitchFamily="34" charset="-120"/>
+              </a:rPr>
+              <a:t>Мок симулятора 1С:</a:t>
+            </a:r>
+            <a:endParaRPr lang="en-US" sz="1600" dirty="0"/>
+          </a:p>
+          <a:p>
+            <a:pPr algn="l" indent="0" marL="0">
+              <a:buNone/>
+            </a:pPr>
+            <a:r>
+              <a:rPr lang="en-US" sz="1600" dirty="0">
+                <a:solidFill>
+                  <a:srgbClr val="2D2D3A"/>
+                </a:solidFill>
+                <a:latin typeface="Times New Roman" pitchFamily="34" charset="0"/>
+                <a:ea typeface="Times New Roman" pitchFamily="34" charset="-122"/>
+                <a:cs typeface="Times New Roman" pitchFamily="34" charset="-120"/>
+              </a:rPr>
+              <a:t>• Вместо запуска тяжелой базы 1С в Docker, тесты шлют запросы на легковесную Express-заглушку (mock-server).</a:t>
+            </a:r>
+            <a:endParaRPr lang="en-US" sz="1600" dirty="0"/>
+          </a:p>
+          <a:p>
+            <a:pPr algn="l" indent="0" marL="0">
+              <a:buNone/>
+            </a:pPr>
+            <a:r>
+              <a:rPr lang="en-US" sz="1600" dirty="0">
+                <a:solidFill>
+                  <a:srgbClr val="2D2D3A"/>
+                </a:solidFill>
+                <a:latin typeface="Times New Roman" pitchFamily="34" charset="0"/>
+                <a:ea typeface="Times New Roman" pitchFamily="34" charset="-122"/>
+                <a:cs typeface="Times New Roman" pitchFamily="34" charset="-120"/>
+              </a:rPr>
+              <a:t>• Заглушка настроена на генерацию детерминированных ответов: успех (200 OK), задержка (504 Timeout) или сбой данных (400 Bad Request) по требованию тест-кейса.</a:t>
+            </a:r>
+            <a:endParaRPr lang="en-US" sz="1600" dirty="0"/>
           </a:p>
         </p:txBody>
       </p:sp>
@@ -3064,17 +2958,17 @@
               <a:buNone/>
             </a:pPr>
             <a:r>
-              <a:rPr lang="en-US" sz="2000" b="1" dirty="0">
-                <a:solidFill>
-                  <a:srgbClr val="0F1E36"/>
-                </a:solidFill>
-                <a:latin typeface="Cambria" pitchFamily="34" charset="0"/>
-                <a:ea typeface="Cambria" pitchFamily="34" charset="-122"/>
-                <a:cs typeface="Cambria" pitchFamily="34" charset="-120"/>
-              </a:rPr>
-              <a:t>Автоматизация: CI/CD пайплайн в GitHub Actions</a:t>
-            </a:r>
-            <a:endParaRPr lang="en-US" sz="2000" dirty="0"/>
+              <a:rPr lang="en-US" sz="1600" b="1" dirty="0">
+                <a:solidFill>
+                  <a:srgbClr val="1A1A2E"/>
+                </a:solidFill>
+                <a:latin typeface="Georgia" pitchFamily="34" charset="0"/>
+                <a:ea typeface="Georgia" pitchFamily="34" charset="-122"/>
+                <a:cs typeface="Georgia" pitchFamily="34" charset="-120"/>
+              </a:rPr>
+              <a:t>Метрики качества: Анализ покрытия (Coverage)</a:t>
+            </a:r>
+            <a:endParaRPr lang="en-US" sz="1600" dirty="0"/>
           </a:p>
         </p:txBody>
       </p:sp>
@@ -3087,26 +2981,26 @@
         <p:spPr>
           <a:xfrm>
             <a:off x="384048" y="822960"/>
-            <a:ext cx="3474720" cy="4119372"/>
+            <a:ext cx="8375904" cy="4119372"/>
           </a:xfrm>
           <a:prstGeom prst="roundRect">
             <a:avLst>
-              <a:gd name="adj" fmla="val 2632"/>
+              <a:gd name="adj" fmla="val 2220"/>
             </a:avLst>
           </a:prstGeom>
           <a:solidFill>
-            <a:srgbClr val="FFF7ED"/>
+            <a:srgbClr val="F8F4F0"/>
           </a:solidFill>
           <a:ln w="12700">
             <a:solidFill>
-              <a:srgbClr val="FFF7ED"/>
+              <a:srgbClr val="EFEAE3"/>
             </a:solidFill>
             <a:prstDash val="solid"/>
           </a:ln>
           <a:effectLst>
-            <a:outerShdw sx="100000" sy="100000" kx="0" ky="0" algn="bl" rotWithShape="0" blurRad="88900" dist="25400" dir="2700000">
+            <a:outerShdw sx="100000" sy="100000" kx="0" ky="0" algn="bl" rotWithShape="0" blurRad="152400" dist="38100" dir="2700000">
               <a:srgbClr val="000000">
-                <a:alpha val="9000"/>
+                <a:alpha val="12000"/>
               </a:srgbClr>
             </a:outerShdw>
           </a:effectLst>
@@ -3120,8 +3014,8 @@
         </p:nvSpPr>
         <p:spPr>
           <a:xfrm>
-            <a:off x="521208" y="932688"/>
-            <a:ext cx="3200400" cy="320040"/>
+            <a:off x="548640" y="932688"/>
+            <a:ext cx="8046720" cy="411480"/>
           </a:xfrm>
           <a:prstGeom prst="rect">
             <a:avLst/>
@@ -3137,17 +3031,17 @@
               <a:buNone/>
             </a:pPr>
             <a:r>
-              <a:rPr lang="en-US" sz="1300" b="1" dirty="0">
-                <a:solidFill>
-                  <a:srgbClr val="0F1E36"/>
+              <a:rPr lang="en-US" sz="1200" b="1" dirty="0">
+                <a:solidFill>
+                  <a:srgbClr val="1A1A2E"/>
                 </a:solidFill>
                 <a:latin typeface="Cambria" pitchFamily="34" charset="0"/>
                 <a:ea typeface="Cambria" pitchFamily="34" charset="-122"/>
                 <a:cs typeface="Cambria" pitchFamily="34" charset="-120"/>
               </a:rPr>
-              <a:t>Непрерывная интеграция (CI)</a:t>
-            </a:r>
-            <a:endParaRPr lang="en-US" sz="1300" dirty="0"/>
+              <a:t>Что измеряет Jest Coverage и целевые показатели</a:t>
+            </a:r>
+            <a:endParaRPr lang="en-US" sz="1200" dirty="0"/>
           </a:p>
         </p:txBody>
       </p:sp>
@@ -3159,8 +3053,8 @@
         </p:nvSpPr>
         <p:spPr>
           <a:xfrm>
-            <a:off x="521208" y="1325880"/>
-            <a:ext cx="3200400" cy="3387852"/>
+            <a:off x="548640" y="1417320"/>
+            <a:ext cx="8046720" cy="3296412"/>
           </a:xfrm>
           <a:prstGeom prst="rect">
             <a:avLst/>
@@ -3169,123 +3063,6 @@
           <a:ln/>
         </p:spPr>
         <p:txBody>
-          <a:bodyPr wrap="square" rtlCol="0" anchor="ctr"/>
-          <a:lstStyle/>
-          <a:p>
-            <a:pPr indent="0" marL="0">
-              <a:buNone/>
-            </a:pPr>
-            <a:r>
-              <a:rPr lang="en-US" sz="1100" dirty="0">
-                <a:solidFill>
-                  <a:srgbClr val="1E293B"/>
-                </a:solidFill>
-                <a:latin typeface="Calibri" pitchFamily="34" charset="0"/>
-                <a:ea typeface="Calibri" pitchFamily="34" charset="-122"/>
-                <a:cs typeface="Calibri" pitchFamily="34" charset="-120"/>
-              </a:rPr>
-              <a:t>• Разработчики не могут залить код в ветку `main` без прохождения тестов.</a:t>
-            </a:r>
-            <a:endParaRPr lang="en-US" sz="1100" dirty="0"/>
-          </a:p>
-          <a:p>
-            <a:pPr indent="0" marL="0">
-              <a:buNone/>
-            </a:pPr>
-            <a:r>
-              <a:rPr lang="en-US" sz="1100" dirty="0">
-                <a:solidFill>
-                  <a:srgbClr val="1E293B"/>
-                </a:solidFill>
-                <a:latin typeface="Calibri" pitchFamily="34" charset="0"/>
-                <a:ea typeface="Calibri" pitchFamily="34" charset="-122"/>
-                <a:cs typeface="Calibri" pitchFamily="34" charset="-120"/>
-              </a:rPr>
-              <a:t>• GitHub Actions автоматически разворачивает чистую среду Node.js.</a:t>
-            </a:r>
-            <a:endParaRPr lang="en-US" sz="1100" dirty="0"/>
-          </a:p>
-          <a:p>
-            <a:pPr indent="0" marL="0">
-              <a:buNone/>
-            </a:pPr>
-            <a:r>
-              <a:rPr lang="en-US" sz="1100" dirty="0">
-                <a:solidFill>
-                  <a:srgbClr val="1E293B"/>
-                </a:solidFill>
-                <a:latin typeface="Calibri" pitchFamily="34" charset="0"/>
-                <a:ea typeface="Calibri" pitchFamily="34" charset="-122"/>
-                <a:cs typeface="Calibri" pitchFamily="34" charset="-120"/>
-              </a:rPr>
-              <a:t>• Устанавливает зависимости из lock-файла.</a:t>
-            </a:r>
-            <a:endParaRPr lang="en-US" sz="1100" dirty="0"/>
-          </a:p>
-          <a:p>
-            <a:pPr indent="0" marL="0">
-              <a:buNone/>
-            </a:pPr>
-            <a:r>
-              <a:rPr lang="en-US" sz="1100" dirty="0">
-                <a:solidFill>
-                  <a:srgbClr val="1E293B"/>
-                </a:solidFill>
-                <a:latin typeface="Calibri" pitchFamily="34" charset="0"/>
-                <a:ea typeface="Calibri" pitchFamily="34" charset="-122"/>
-                <a:cs typeface="Calibri" pitchFamily="34" charset="-120"/>
-              </a:rPr>
-              <a:t>• Запускает линтер ESLint, сборщик и прогоняет модульные и интеграционные тесты Jest.</a:t>
-            </a:r>
-            <a:endParaRPr lang="en-US" sz="1100" dirty="0"/>
-          </a:p>
-        </p:txBody>
-      </p:sp>
-      <p:sp>
-        <p:nvSpPr>
-          <p:cNvPr id="6" name="Shape 4"/>
-          <p:cNvSpPr/>
-          <p:nvPr/>
-        </p:nvSpPr>
-        <p:spPr>
-          <a:xfrm>
-            <a:off x="4133088" y="822960"/>
-            <a:ext cx="4626864" cy="4119372"/>
-          </a:xfrm>
-          <a:prstGeom prst="roundRect">
-            <a:avLst>
-              <a:gd name="adj" fmla="val 1776"/>
-            </a:avLst>
-          </a:prstGeom>
-          <a:solidFill>
-            <a:srgbClr val="0B132B"/>
-          </a:solidFill>
-          <a:ln w="12700">
-            <a:solidFill>
-              <a:srgbClr val="1E4070"/>
-            </a:solidFill>
-            <a:prstDash val="solid"/>
-          </a:ln>
-        </p:spPr>
-      </p:sp>
-      <p:sp>
-        <p:nvSpPr>
-          <p:cNvPr id="7" name="Text 5"/>
-          <p:cNvSpPr/>
-          <p:nvPr/>
-        </p:nvSpPr>
-        <p:spPr>
-          <a:xfrm>
-            <a:off x="4270248" y="905256"/>
-            <a:ext cx="4352544" cy="3954780"/>
-          </a:xfrm>
-          <a:prstGeom prst="rect">
-            <a:avLst/>
-          </a:prstGeom>
-          <a:noFill/>
-          <a:ln/>
-        </p:spPr>
-        <p:txBody>
           <a:bodyPr wrap="square" rtlCol="0" anchor="t"/>
           <a:lstStyle/>
           <a:p>
@@ -3293,238 +3070,159 @@
               <a:buNone/>
             </a:pPr>
             <a:r>
-              <a:rPr lang="en-US" sz="1050" dirty="0">
-                <a:solidFill>
-                  <a:srgbClr val="FFEDD5"/>
-                </a:solidFill>
-                <a:latin typeface="Courier New" pitchFamily="34" charset="0"/>
-                <a:ea typeface="Courier New" pitchFamily="34" charset="-122"/>
-                <a:cs typeface="Courier New" pitchFamily="34" charset="-120"/>
-              </a:rPr>
-              <a:t>name: Continuous Integration</a:t>
-            </a:r>
-            <a:endParaRPr lang="en-US" sz="1050" dirty="0"/>
-          </a:p>
-          <a:p>
-            <a:pPr algn="l" indent="0" marL="0">
-              <a:buNone/>
-            </a:pPr>
-            <a:r>
-              <a:rPr lang="en-US" sz="1050" dirty="0">
-                <a:solidFill>
-                  <a:srgbClr val="FFEDD5"/>
-                </a:solidFill>
-                <a:latin typeface="Courier New" pitchFamily="34" charset="0"/>
-                <a:ea typeface="Courier New" pitchFamily="34" charset="-122"/>
-                <a:cs typeface="Courier New" pitchFamily="34" charset="-120"/>
-              </a:rPr>
-              <a:t>on:</a:t>
-            </a:r>
-            <a:endParaRPr lang="en-US" sz="1050" dirty="0"/>
-          </a:p>
-          <a:p>
-            <a:pPr algn="l" indent="0" marL="0">
-              <a:buNone/>
-            </a:pPr>
-            <a:r>
-              <a:rPr lang="en-US" sz="1050" dirty="0">
-                <a:solidFill>
-                  <a:srgbClr val="FFEDD5"/>
-                </a:solidFill>
-                <a:latin typeface="Courier New" pitchFamily="34" charset="0"/>
-                <a:ea typeface="Courier New" pitchFamily="34" charset="-122"/>
-                <a:cs typeface="Courier New" pitchFamily="34" charset="-120"/>
-              </a:rPr>
-              <a:t>  pull_request:</a:t>
-            </a:r>
-            <a:endParaRPr lang="en-US" sz="1050" dirty="0"/>
-          </a:p>
-          <a:p>
-            <a:pPr algn="l" indent="0" marL="0">
-              <a:buNone/>
-            </a:pPr>
-            <a:r>
-              <a:rPr lang="en-US" sz="1050" dirty="0">
-                <a:solidFill>
-                  <a:srgbClr val="FFEDD5"/>
-                </a:solidFill>
-                <a:latin typeface="Courier New" pitchFamily="34" charset="0"/>
-                <a:ea typeface="Courier New" pitchFamily="34" charset="-122"/>
-                <a:cs typeface="Courier New" pitchFamily="34" charset="-120"/>
-              </a:rPr>
-              <a:t>    branches: [ main ]</a:t>
-            </a:r>
-            <a:endParaRPr lang="en-US" sz="1050" dirty="0"/>
-          </a:p>
-          <a:p>
-            <a:pPr algn="l" indent="0" marL="0">
-              <a:buNone/>
-            </a:pPr>
-            <a:r>
-              <a:rPr lang="en-US" sz="1050" dirty="0">
-                <a:solidFill>
-                  <a:srgbClr val="FFEDD5"/>
-                </a:solidFill>
-                <a:latin typeface="Courier New" pitchFamily="34" charset="0"/>
-                <a:ea typeface="Courier New" pitchFamily="34" charset="-122"/>
-                <a:cs typeface="Courier New" pitchFamily="34" charset="-120"/>
-              </a:rPr>
-              <a:t>jobs:</a:t>
-            </a:r>
-            <a:endParaRPr lang="en-US" sz="1050" dirty="0"/>
-          </a:p>
-          <a:p>
-            <a:pPr algn="l" indent="0" marL="0">
-              <a:buNone/>
-            </a:pPr>
-            <a:r>
-              <a:rPr lang="en-US" sz="1050" dirty="0">
-                <a:solidFill>
-                  <a:srgbClr val="FFEDD5"/>
-                </a:solidFill>
-                <a:latin typeface="Courier New" pitchFamily="34" charset="0"/>
-                <a:ea typeface="Courier New" pitchFamily="34" charset="-122"/>
-                <a:cs typeface="Courier New" pitchFamily="34" charset="-120"/>
-              </a:rPr>
-              <a:t>  test:</a:t>
-            </a:r>
-            <a:endParaRPr lang="en-US" sz="1050" dirty="0"/>
-          </a:p>
-          <a:p>
-            <a:pPr algn="l" indent="0" marL="0">
-              <a:buNone/>
-            </a:pPr>
-            <a:r>
-              <a:rPr lang="en-US" sz="1050" dirty="0">
-                <a:solidFill>
-                  <a:srgbClr val="FFEDD5"/>
-                </a:solidFill>
-                <a:latin typeface="Courier New" pitchFamily="34" charset="0"/>
-                <a:ea typeface="Courier New" pitchFamily="34" charset="-122"/>
-                <a:cs typeface="Courier New" pitchFamily="34" charset="-120"/>
-              </a:rPr>
-              <a:t>    runs-on: ubuntu-latest</a:t>
-            </a:r>
-            <a:endParaRPr lang="en-US" sz="1050" dirty="0"/>
-          </a:p>
-          <a:p>
-            <a:pPr algn="l" indent="0" marL="0">
-              <a:buNone/>
-            </a:pPr>
-            <a:r>
-              <a:rPr lang="en-US" sz="1050" dirty="0">
-                <a:solidFill>
-                  <a:srgbClr val="FFEDD5"/>
-                </a:solidFill>
-                <a:latin typeface="Courier New" pitchFamily="34" charset="0"/>
-                <a:ea typeface="Courier New" pitchFamily="34" charset="-122"/>
-                <a:cs typeface="Courier New" pitchFamily="34" charset="-120"/>
-              </a:rPr>
-              <a:t>    steps:</a:t>
-            </a:r>
-            <a:endParaRPr lang="en-US" sz="1050" dirty="0"/>
-          </a:p>
-          <a:p>
-            <a:pPr algn="l" indent="0" marL="0">
-              <a:buNone/>
-            </a:pPr>
-            <a:r>
-              <a:rPr lang="en-US" sz="1050" dirty="0">
-                <a:solidFill>
-                  <a:srgbClr val="FFEDD5"/>
-                </a:solidFill>
-                <a:latin typeface="Courier New" pitchFamily="34" charset="0"/>
-                <a:ea typeface="Courier New" pitchFamily="34" charset="-122"/>
-                <a:cs typeface="Courier New" pitchFamily="34" charset="-120"/>
-              </a:rPr>
-              <a:t>      - uses: actions/checkout@v3</a:t>
-            </a:r>
-            <a:endParaRPr lang="en-US" sz="1050" dirty="0"/>
-          </a:p>
-          <a:p>
-            <a:pPr algn="l" indent="0" marL="0">
-              <a:buNone/>
-            </a:pPr>
-            <a:r>
-              <a:rPr lang="en-US" sz="1050" dirty="0">
-                <a:solidFill>
-                  <a:srgbClr val="FFEDD5"/>
-                </a:solidFill>
-                <a:latin typeface="Courier New" pitchFamily="34" charset="0"/>
-                <a:ea typeface="Courier New" pitchFamily="34" charset="-122"/>
-                <a:cs typeface="Courier New" pitchFamily="34" charset="-120"/>
-              </a:rPr>
-              <a:t>      - uses: actions/setup-node@v3</a:t>
-            </a:r>
-            <a:endParaRPr lang="en-US" sz="1050" dirty="0"/>
-          </a:p>
-          <a:p>
-            <a:pPr algn="l" indent="0" marL="0">
-              <a:buNone/>
-            </a:pPr>
-            <a:r>
-              <a:rPr lang="en-US" sz="1050" dirty="0">
-                <a:solidFill>
-                  <a:srgbClr val="FFEDD5"/>
-                </a:solidFill>
-                <a:latin typeface="Courier New" pitchFamily="34" charset="0"/>
-                <a:ea typeface="Courier New" pitchFamily="34" charset="-122"/>
-                <a:cs typeface="Courier New" pitchFamily="34" charset="-120"/>
-              </a:rPr>
-              <a:t>      - run: npm ci</a:t>
-            </a:r>
-            <a:endParaRPr lang="en-US" sz="1050" dirty="0"/>
-          </a:p>
-          <a:p>
-            <a:pPr algn="l" indent="0" marL="0">
-              <a:buNone/>
-            </a:pPr>
-            <a:r>
-              <a:rPr lang="en-US" sz="1050" dirty="0">
-                <a:solidFill>
-                  <a:srgbClr val="FFEDD5"/>
-                </a:solidFill>
-                <a:latin typeface="Courier New" pitchFamily="34" charset="0"/>
-                <a:ea typeface="Courier New" pitchFamily="34" charset="-122"/>
-                <a:cs typeface="Courier New" pitchFamily="34" charset="-120"/>
-              </a:rPr>
-              <a:t>      - run: npm run lint</a:t>
-            </a:r>
-            <a:endParaRPr lang="en-US" sz="1050" dirty="0"/>
-          </a:p>
-          <a:p>
-            <a:pPr algn="l" indent="0" marL="0">
-              <a:buNone/>
-            </a:pPr>
-            <a:r>
-              <a:rPr lang="en-US" sz="1050" dirty="0">
-                <a:solidFill>
-                  <a:srgbClr val="FFEDD5"/>
-                </a:solidFill>
-                <a:latin typeface="Courier New" pitchFamily="34" charset="0"/>
-                <a:ea typeface="Courier New" pitchFamily="34" charset="-122"/>
-                <a:cs typeface="Courier New" pitchFamily="34" charset="-120"/>
-              </a:rPr>
-              <a:t>      - run: npm run test:coverage</a:t>
-            </a:r>
-            <a:endParaRPr lang="en-US" sz="1050" dirty="0"/>
-          </a:p>
-          <a:p>
-            <a:pPr algn="l" indent="0" marL="0">
-              <a:buNone/>
-            </a:pPr>
-            <a:r>
-              <a:rPr lang="en-US" sz="1050" dirty="0">
-                <a:solidFill>
-                  <a:srgbClr val="FFEDD5"/>
-                </a:solidFill>
-                <a:latin typeface="Courier New" pitchFamily="34" charset="0"/>
-                <a:ea typeface="Courier New" pitchFamily="34" charset="-122"/>
-                <a:cs typeface="Courier New" pitchFamily="34" charset="-120"/>
-              </a:rPr>
-              <a:t>      - run: npm run build</a:t>
-            </a:r>
-            <a:endParaRPr lang="en-US" sz="1050" dirty="0"/>
+              <a:rPr lang="en-US" sz="1600" dirty="0">
+                <a:solidFill>
+                  <a:srgbClr val="2D2D3A"/>
+                </a:solidFill>
+                <a:latin typeface="Times New Roman" pitchFamily="34" charset="0"/>
+                <a:ea typeface="Times New Roman" pitchFamily="34" charset="-122"/>
+                <a:cs typeface="Times New Roman" pitchFamily="34" charset="-120"/>
+              </a:rPr>
+              <a:t>Что измеряет утилита Jest Coverage?</a:t>
+            </a:r>
+            <a:endParaRPr lang="en-US" sz="1600" dirty="0"/>
+          </a:p>
+          <a:p>
+            <a:pPr algn="l" indent="0" marL="0">
+              <a:buNone/>
+            </a:pPr>
+            <a:r>
+              <a:rPr lang="en-US" sz="1600" dirty="0">
+                <a:solidFill>
+                  <a:srgbClr val="2D2D3A"/>
+                </a:solidFill>
+                <a:latin typeface="Times New Roman" pitchFamily="34" charset="0"/>
+                <a:ea typeface="Times New Roman" pitchFamily="34" charset="-122"/>
+                <a:cs typeface="Times New Roman" pitchFamily="34" charset="-120"/>
+              </a:rPr>
+              <a:t>• Statement Coverage — какой процент строк кода был исполнен.</a:t>
+            </a:r>
+            <a:endParaRPr lang="en-US" sz="1600" dirty="0"/>
+          </a:p>
+          <a:p>
+            <a:pPr algn="l" indent="0" marL="0">
+              <a:buNone/>
+            </a:pPr>
+            <a:r>
+              <a:rPr lang="en-US" sz="1600" dirty="0">
+                <a:solidFill>
+                  <a:srgbClr val="2D2D3A"/>
+                </a:solidFill>
+                <a:latin typeface="Times New Roman" pitchFamily="34" charset="0"/>
+                <a:ea typeface="Times New Roman" pitchFamily="34" charset="-122"/>
+                <a:cs typeface="Times New Roman" pitchFamily="34" charset="-120"/>
+              </a:rPr>
+              <a:t>• Branch Coverage — пройдены ли все условия ветвления (`if-else` блоки).</a:t>
+            </a:r>
+            <a:endParaRPr lang="en-US" sz="1600" dirty="0"/>
+          </a:p>
+          <a:p>
+            <a:pPr algn="l" indent="0" marL="0">
+              <a:buNone/>
+            </a:pPr>
+            <a:r>
+              <a:rPr lang="en-US" sz="1600" dirty="0">
+                <a:solidFill>
+                  <a:srgbClr val="2D2D3A"/>
+                </a:solidFill>
+                <a:latin typeface="Times New Roman" pitchFamily="34" charset="0"/>
+                <a:ea typeface="Times New Roman" pitchFamily="34" charset="-122"/>
+                <a:cs typeface="Times New Roman" pitchFamily="34" charset="-120"/>
+              </a:rPr>
+              <a:t>• Function Coverage — вызваны ли все объявленные функции.</a:t>
+            </a:r>
+            <a:endParaRPr lang="en-US" sz="1600" dirty="0"/>
+          </a:p>
+          <a:p>
+            <a:pPr algn="l" indent="0" marL="0">
+              <a:buNone/>
+            </a:pPr>
+            <a:r>
+              <a:rPr lang="en-US" sz="1600" dirty="0">
+                <a:solidFill>
+                  <a:srgbClr val="2D2D3A"/>
+                </a:solidFill>
+                <a:latin typeface="Times New Roman" pitchFamily="34" charset="0"/>
+                <a:ea typeface="Times New Roman" pitchFamily="34" charset="-122"/>
+                <a:cs typeface="Times New Roman" pitchFamily="34" charset="-120"/>
+              </a:rPr>
+              <a:t>• Line Coverage — количество выполненных физических строк кода.</a:t>
+            </a:r>
+            <a:endParaRPr lang="en-US" sz="1600" dirty="0"/>
+          </a:p>
+          <a:p>
+            <a:pPr algn="l" indent="0" marL="0">
+              <a:buNone/>
+            </a:pPr>
+            <a:endParaRPr lang="en-US" sz="1600" dirty="0"/>
+          </a:p>
+          <a:p>
+            <a:pPr algn="l" indent="0" marL="0">
+              <a:buNone/>
+            </a:pPr>
+            <a:r>
+              <a:rPr lang="en-US" sz="1600" dirty="0">
+                <a:solidFill>
+                  <a:srgbClr val="2D2D3A"/>
+                </a:solidFill>
+                <a:latin typeface="Times New Roman" pitchFamily="34" charset="0"/>
+                <a:ea typeface="Times New Roman" pitchFamily="34" charset="-122"/>
+                <a:cs typeface="Times New Roman" pitchFamily="34" charset="-120"/>
+              </a:rPr>
+              <a:t>Целевые показатели качества:</a:t>
+            </a:r>
+            <a:endParaRPr lang="en-US" sz="1600" dirty="0"/>
+          </a:p>
+          <a:p>
+            <a:pPr algn="l" indent="0" marL="0">
+              <a:buNone/>
+            </a:pPr>
+            <a:r>
+              <a:rPr lang="en-US" sz="1600" dirty="0">
+                <a:solidFill>
+                  <a:srgbClr val="2D2D3A"/>
+                </a:solidFill>
+                <a:latin typeface="Times New Roman" pitchFamily="34" charset="0"/>
+                <a:ea typeface="Times New Roman" pitchFamily="34" charset="-122"/>
+                <a:cs typeface="Times New Roman" pitchFamily="34" charset="-120"/>
+              </a:rPr>
+              <a:t>• Общее покрытие операторов (statements) во всём проекте установлено на уровне не менее 80%.</a:t>
+            </a:r>
+            <a:endParaRPr lang="en-US" sz="1600" dirty="0"/>
+          </a:p>
+          <a:p>
+            <a:pPr algn="l" indent="0" marL="0">
+              <a:buNone/>
+            </a:pPr>
+            <a:r>
+              <a:rPr lang="en-US" sz="1600" dirty="0">
+                <a:solidFill>
+                  <a:srgbClr val="2D2D3A"/>
+                </a:solidFill>
+                <a:latin typeface="Times New Roman" pitchFamily="34" charset="0"/>
+                <a:ea typeface="Times New Roman" pitchFamily="34" charset="-122"/>
+                <a:cs typeface="Times New Roman" pitchFamily="34" charset="-120"/>
+              </a:rPr>
+              <a:t>• Покрытие критических модулей бизнес-логики (TicketService, MessageService) — не менее 90%.</a:t>
+            </a:r>
+            <a:endParaRPr lang="en-US" sz="1600" dirty="0"/>
+          </a:p>
+          <a:p>
+            <a:pPr algn="l" indent="0" marL="0">
+              <a:buNone/>
+            </a:pPr>
+            <a:r>
+              <a:rPr lang="en-US" sz="1600" dirty="0">
+                <a:solidFill>
+                  <a:srgbClr val="2D2D3A"/>
+                </a:solidFill>
+                <a:latin typeface="Times New Roman" pitchFamily="34" charset="0"/>
+                <a:ea typeface="Times New Roman" pitchFamily="34" charset="-122"/>
+                <a:cs typeface="Times New Roman" pitchFamily="34" charset="-120"/>
+              </a:rPr>
+              <a:t>• При падении суммарного покрытия ниже 80% сборка проекта в CI/CD автоматически ломается, предотвращая выкат непроверенного кода в прод.</a:t>
+            </a:r>
+            <a:endParaRPr lang="en-US" sz="1600" dirty="0"/>
           </a:p>
         </p:txBody>
       </p:sp>
@@ -3585,17 +3283,17 @@
               <a:buNone/>
             </a:pPr>
             <a:r>
-              <a:rPr lang="en-US" sz="2000" b="1" dirty="0">
-                <a:solidFill>
-                  <a:srgbClr val="0F1E36"/>
-                </a:solidFill>
-                <a:latin typeface="Cambria" pitchFamily="34" charset="0"/>
-                <a:ea typeface="Cambria" pitchFamily="34" charset="-122"/>
-                <a:cs typeface="Cambria" pitchFamily="34" charset="-120"/>
-              </a:rPr>
-              <a:t>Локальная тестовая песочница Docker Compose</a:t>
-            </a:r>
-            <a:endParaRPr lang="en-US" sz="2000" dirty="0"/>
+              <a:rPr lang="en-US" sz="1600" b="1" dirty="0">
+                <a:solidFill>
+                  <a:srgbClr val="1A1A2E"/>
+                </a:solidFill>
+                <a:latin typeface="Georgia" pitchFamily="34" charset="0"/>
+                <a:ea typeface="Georgia" pitchFamily="34" charset="-122"/>
+                <a:cs typeface="Georgia" pitchFamily="34" charset="-120"/>
+              </a:rPr>
+              <a:t>Автоматизация: CI/CD пайплайн в GitHub Actions</a:t>
+            </a:r>
+            <a:endParaRPr lang="en-US" sz="1600" dirty="0"/>
           </a:p>
         </p:txBody>
       </p:sp>
@@ -3608,26 +3306,26 @@
         <p:spPr>
           <a:xfrm>
             <a:off x="384048" y="822960"/>
-            <a:ext cx="4023360" cy="4119372"/>
+            <a:ext cx="3474720" cy="4119372"/>
           </a:xfrm>
           <a:prstGeom prst="roundRect">
             <a:avLst>
-              <a:gd name="adj" fmla="val 2273"/>
+              <a:gd name="adj" fmla="val 2632"/>
             </a:avLst>
           </a:prstGeom>
           <a:solidFill>
-            <a:srgbClr val="FFF7ED"/>
+            <a:srgbClr val="F8F4F0"/>
           </a:solidFill>
           <a:ln w="12700">
             <a:solidFill>
-              <a:srgbClr val="FFF7ED"/>
+              <a:srgbClr val="EFEAE3"/>
             </a:solidFill>
             <a:prstDash val="solid"/>
           </a:ln>
           <a:effectLst>
-            <a:outerShdw sx="100000" sy="100000" kx="0" ky="0" algn="bl" rotWithShape="0" blurRad="88900" dist="25400" dir="2700000">
+            <a:outerShdw sx="100000" sy="100000" kx="0" ky="0" algn="bl" rotWithShape="0" blurRad="152400" dist="38100" dir="2700000">
               <a:srgbClr val="000000">
-                <a:alpha val="9000"/>
+                <a:alpha val="12000"/>
               </a:srgbClr>
             </a:outerShdw>
           </a:effectLst>
@@ -3641,8 +3339,8 @@
         </p:nvSpPr>
         <p:spPr>
           <a:xfrm>
-            <a:off x="548640" y="932688"/>
-            <a:ext cx="3694176" cy="365760"/>
+            <a:off x="521208" y="932688"/>
+            <a:ext cx="3200400" cy="320040"/>
           </a:xfrm>
           <a:prstGeom prst="rect">
             <a:avLst/>
@@ -3658,17 +3356,17 @@
               <a:buNone/>
             </a:pPr>
             <a:r>
-              <a:rPr lang="en-US" sz="1300" b="1" dirty="0">
-                <a:solidFill>
-                  <a:srgbClr val="0F1E36"/>
+              <a:rPr lang="en-US" sz="1200" b="1" dirty="0">
+                <a:solidFill>
+                  <a:srgbClr val="1A1A2E"/>
                 </a:solidFill>
                 <a:latin typeface="Cambria" pitchFamily="34" charset="0"/>
                 <a:ea typeface="Cambria" pitchFamily="34" charset="-122"/>
                 <a:cs typeface="Cambria" pitchFamily="34" charset="-120"/>
               </a:rPr>
-              <a:t>Оркестрация тестовой среды</a:t>
-            </a:r>
-            <a:endParaRPr lang="en-US" sz="1300" dirty="0"/>
+              <a:t>Непрерывная интеграция (CI)</a:t>
+            </a:r>
+            <a:endParaRPr lang="en-US" sz="1200" dirty="0"/>
           </a:p>
         </p:txBody>
       </p:sp>
@@ -3680,8 +3378,8 @@
         </p:nvSpPr>
         <p:spPr>
           <a:xfrm>
-            <a:off x="548640" y="1389888"/>
-            <a:ext cx="3694176" cy="2926080"/>
+            <a:off x="521208" y="1325880"/>
+            <a:ext cx="3200400" cy="3387852"/>
           </a:xfrm>
           <a:prstGeom prst="rect">
             <a:avLst/>
@@ -3697,17 +3395,68 @@
               <a:buNone/>
             </a:pPr>
             <a:r>
-              <a:rPr lang="en-US" sz="1150" dirty="0">
-                <a:solidFill>
-                  <a:srgbClr val="1E293B"/>
-                </a:solidFill>
-                <a:latin typeface="Calibri" pitchFamily="34" charset="0"/>
-                <a:ea typeface="Calibri" pitchFamily="34" charset="-122"/>
-                <a:cs typeface="Calibri" pitchFamily="34" charset="-120"/>
-              </a:rPr>
-              <a:t>Для запуска полноценных интеграционных и E2E тестов разработчику не нужно вручную настраивать базы данных на компьютере. Вся инфраструктура разворачивается одной командой `docker-compose -f docker-compose.test.yml up -d`.</a:t>
-            </a:r>
-            <a:endParaRPr lang="en-US" sz="1150" dirty="0"/>
+              <a:rPr lang="en-US" sz="1100" dirty="0">
+                <a:solidFill>
+                  <a:srgbClr val="2D2D3A"/>
+                </a:solidFill>
+                <a:latin typeface="Times New Roman" pitchFamily="34" charset="0"/>
+                <a:ea typeface="Times New Roman" pitchFamily="34" charset="-122"/>
+                <a:cs typeface="Times New Roman" pitchFamily="34" charset="-120"/>
+              </a:rPr>
+              <a:t>• Разработчики не могут залить код в ветку `main` без прохождения тестов.</a:t>
+            </a:r>
+            <a:endParaRPr lang="en-US" sz="1100" dirty="0"/>
+          </a:p>
+          <a:p>
+            <a:pPr indent="0" marL="0">
+              <a:buNone/>
+            </a:pPr>
+            <a:r>
+              <a:rPr lang="en-US" sz="1100" dirty="0">
+                <a:solidFill>
+                  <a:srgbClr val="2D2D3A"/>
+                </a:solidFill>
+                <a:latin typeface="Times New Roman" pitchFamily="34" charset="0"/>
+                <a:ea typeface="Times New Roman" pitchFamily="34" charset="-122"/>
+                <a:cs typeface="Times New Roman" pitchFamily="34" charset="-120"/>
+              </a:rPr>
+              <a:t>• GitHub Actions автоматически разворачивает чистую среду Node.js.</a:t>
+            </a:r>
+            <a:endParaRPr lang="en-US" sz="1100" dirty="0"/>
+          </a:p>
+          <a:p>
+            <a:pPr indent="0" marL="0">
+              <a:buNone/>
+            </a:pPr>
+            <a:r>
+              <a:rPr lang="en-US" sz="1100" dirty="0">
+                <a:solidFill>
+                  <a:srgbClr val="2D2D3A"/>
+                </a:solidFill>
+                <a:latin typeface="Times New Roman" pitchFamily="34" charset="0"/>
+                <a:ea typeface="Times New Roman" pitchFamily="34" charset="-122"/>
+                <a:cs typeface="Times New Roman" pitchFamily="34" charset="-120"/>
+              </a:rPr>
+              <a:t>• Устанавливает зависимости из lock-файла.</a:t>
+            </a:r>
+            <a:endParaRPr lang="en-US" sz="1100" dirty="0"/>
+          </a:p>
+          <a:p>
+            <a:pPr indent="0" marL="0">
+              <a:buNone/>
+            </a:pPr>
+            <a:r>
+              <a:rPr lang="en-US" sz="1100" dirty="0">
+                <a:solidFill>
+                  <a:srgbClr val="2D2D3A"/>
+                </a:solidFill>
+                <a:latin typeface="Times New Roman" pitchFamily="34" charset="0"/>
+                <a:ea typeface="Times New Roman" pitchFamily="34" charset="-122"/>
+                <a:cs typeface="Times New Roman" pitchFamily="34" charset="-120"/>
+              </a:rPr>
+              <a:t>• Запускает линтер ESLint, сборщик и прогоняет модульные и интеграционные тесты Jest.</a:t>
+            </a:r>
+            <a:endParaRPr lang="en-US" sz="1100" dirty="0"/>
           </a:p>
         </p:txBody>
       </p:sp>
@@ -3719,30 +3468,23 @@
         </p:nvSpPr>
         <p:spPr>
           <a:xfrm>
-            <a:off x="4681728" y="822960"/>
-            <a:ext cx="4078224" cy="4119372"/>
+            <a:off x="4133088" y="822960"/>
+            <a:ext cx="4626864" cy="4119372"/>
           </a:xfrm>
           <a:prstGeom prst="roundRect">
             <a:avLst>
-              <a:gd name="adj" fmla="val 2242"/>
+              <a:gd name="adj" fmla="val 1776"/>
             </a:avLst>
           </a:prstGeom>
           <a:solidFill>
-            <a:srgbClr val="D1FAE5"/>
+            <a:srgbClr val="1A1A2E"/>
           </a:solidFill>
           <a:ln w="12700">
             <a:solidFill>
-              <a:srgbClr val="D1FAE5"/>
+              <a:srgbClr val="2A2A4A"/>
             </a:solidFill>
             <a:prstDash val="solid"/>
           </a:ln>
-          <a:effectLst>
-            <a:outerShdw sx="100000" sy="100000" kx="0" ky="0" algn="bl" rotWithShape="0" blurRad="88900" dist="25400" dir="2700000">
-              <a:srgbClr val="000000">
-                <a:alpha val="9000"/>
-              </a:srgbClr>
-            </a:outerShdw>
-          </a:effectLst>
         </p:spPr>
       </p:sp>
       <p:sp>
@@ -3753,8 +3495,8 @@
         </p:nvSpPr>
         <p:spPr>
           <a:xfrm>
-            <a:off x="4846320" y="932688"/>
-            <a:ext cx="3749040" cy="365760"/>
+            <a:off x="4270248" y="905256"/>
+            <a:ext cx="4352544" cy="3954780"/>
           </a:xfrm>
           <a:prstGeom prst="rect">
             <a:avLst/>
@@ -3763,114 +3505,245 @@
           <a:ln/>
         </p:spPr>
         <p:txBody>
-          <a:bodyPr wrap="square" rtlCol="0" anchor="ctr"/>
-          <a:lstStyle/>
-          <a:p>
-            <a:pPr indent="0" marL="0">
-              <a:buNone/>
-            </a:pPr>
-            <a:r>
-              <a:rPr lang="en-US" sz="1300" b="1" dirty="0">
-                <a:solidFill>
-                  <a:srgbClr val="0F1E36"/>
-                </a:solidFill>
-                <a:latin typeface="Cambria" pitchFamily="34" charset="0"/>
-                <a:ea typeface="Cambria" pitchFamily="34" charset="-122"/>
-                <a:cs typeface="Cambria" pitchFamily="34" charset="-120"/>
-              </a:rPr>
-              <a:t>Тестовые контейнеры</a:t>
-            </a:r>
-            <a:endParaRPr lang="en-US" sz="1300" dirty="0"/>
-          </a:p>
-        </p:txBody>
-      </p:sp>
-      <p:sp>
-        <p:nvSpPr>
-          <p:cNvPr id="8" name="Text 6"/>
-          <p:cNvSpPr/>
-          <p:nvPr/>
-        </p:nvSpPr>
-        <p:spPr>
-          <a:xfrm>
-            <a:off x="4846320" y="1389888"/>
-            <a:ext cx="3749040" cy="2926080"/>
-          </a:xfrm>
-          <a:prstGeom prst="rect">
-            <a:avLst/>
-          </a:prstGeom>
-          <a:noFill/>
-          <a:ln/>
-        </p:spPr>
-        <p:txBody>
-          <a:bodyPr wrap="square" rtlCol="0" anchor="ctr"/>
-          <a:lstStyle/>
-          <a:p>
-            <a:pPr indent="0" marL="0">
-              <a:buNone/>
-            </a:pPr>
-            <a:r>
-              <a:rPr lang="en-US" sz="1100" dirty="0">
-                <a:solidFill>
-                  <a:srgbClr val="1E293B"/>
-                </a:solidFill>
-                <a:latin typeface="Calibri" pitchFamily="34" charset="0"/>
-                <a:ea typeface="Calibri" pitchFamily="34" charset="-122"/>
-                <a:cs typeface="Calibri" pitchFamily="34" charset="-120"/>
-              </a:rPr>
-              <a:t>• `test-db` — СУБД PostgreSQL с автоматически накатаными тестовыми схемами.</a:t>
-            </a:r>
-            <a:endParaRPr lang="en-US" sz="1100" dirty="0"/>
-          </a:p>
-          <a:p>
-            <a:pPr indent="0" marL="0">
-              <a:buNone/>
-            </a:pPr>
-            <a:r>
-              <a:rPr lang="en-US" sz="1100" dirty="0">
-                <a:solidFill>
-                  <a:srgbClr val="1E293B"/>
-                </a:solidFill>
-                <a:latin typeface="Calibri" pitchFamily="34" charset="0"/>
-                <a:ea typeface="Calibri" pitchFamily="34" charset="-122"/>
-                <a:cs typeface="Calibri" pitchFamily="34" charset="-120"/>
-              </a:rPr>
-              <a:t>• `test-s3` — легковесный MinIO для бинарных файлов.</a:t>
-            </a:r>
-            <a:endParaRPr lang="en-US" sz="1100" dirty="0"/>
-          </a:p>
-          <a:p>
-            <a:pPr indent="0" marL="0">
-              <a:buNone/>
-            </a:pPr>
-            <a:r>
-              <a:rPr lang="en-US" sz="1100" dirty="0">
-                <a:solidFill>
-                  <a:srgbClr val="1E293B"/>
-                </a:solidFill>
-                <a:latin typeface="Calibri" pitchFamily="34" charset="0"/>
-                <a:ea typeface="Calibri" pitchFamily="34" charset="-122"/>
-                <a:cs typeface="Calibri" pitchFamily="34" charset="-120"/>
-              </a:rPr>
-              <a:t>• `mock-1c` — симулятор учетной системы компании.</a:t>
-            </a:r>
-            <a:endParaRPr lang="en-US" sz="1100" dirty="0"/>
-          </a:p>
-          <a:p>
-            <a:pPr indent="0" marL="0">
-              <a:buNone/>
-            </a:pPr>
-            <a:r>
-              <a:rPr lang="en-US" sz="1100" dirty="0">
-                <a:solidFill>
-                  <a:srgbClr val="1E293B"/>
-                </a:solidFill>
-                <a:latin typeface="Calibri" pitchFamily="34" charset="0"/>
-                <a:ea typeface="Calibri" pitchFamily="34" charset="-122"/>
-                <a:cs typeface="Calibri" pitchFamily="34" charset="-120"/>
-              </a:rPr>
-              <a:t>• Контейнеры полностью изолированы от боевой среды и автоматически очищаются после прогона тестов.</a:t>
-            </a:r>
-            <a:endParaRPr lang="en-US" sz="1100" dirty="0"/>
+          <a:bodyPr wrap="square" rtlCol="0" anchor="t"/>
+          <a:lstStyle/>
+          <a:p>
+            <a:pPr algn="l" indent="0" marL="0">
+              <a:buNone/>
+            </a:pPr>
+            <a:r>
+              <a:rPr lang="en-US" sz="1050" dirty="0">
+                <a:solidFill>
+                  <a:srgbClr val="F8F4F0"/>
+                </a:solidFill>
+                <a:latin typeface="Courier New" pitchFamily="34" charset="0"/>
+                <a:ea typeface="Courier New" pitchFamily="34" charset="-122"/>
+                <a:cs typeface="Courier New" pitchFamily="34" charset="-120"/>
+              </a:rPr>
+              <a:t>name: Continuous Integration</a:t>
+            </a:r>
+            <a:endParaRPr lang="en-US" sz="1050" dirty="0"/>
+          </a:p>
+          <a:p>
+            <a:pPr algn="l" indent="0" marL="0">
+              <a:buNone/>
+            </a:pPr>
+            <a:r>
+              <a:rPr lang="en-US" sz="1050" dirty="0">
+                <a:solidFill>
+                  <a:srgbClr val="F8F4F0"/>
+                </a:solidFill>
+                <a:latin typeface="Courier New" pitchFamily="34" charset="0"/>
+                <a:ea typeface="Courier New" pitchFamily="34" charset="-122"/>
+                <a:cs typeface="Courier New" pitchFamily="34" charset="-120"/>
+              </a:rPr>
+              <a:t>on:</a:t>
+            </a:r>
+            <a:endParaRPr lang="en-US" sz="1050" dirty="0"/>
+          </a:p>
+          <a:p>
+            <a:pPr algn="l" indent="0" marL="0">
+              <a:buNone/>
+            </a:pPr>
+            <a:r>
+              <a:rPr lang="en-US" sz="1050" dirty="0">
+                <a:solidFill>
+                  <a:srgbClr val="F8F4F0"/>
+                </a:solidFill>
+                <a:latin typeface="Courier New" pitchFamily="34" charset="0"/>
+                <a:ea typeface="Courier New" pitchFamily="34" charset="-122"/>
+                <a:cs typeface="Courier New" pitchFamily="34" charset="-120"/>
+              </a:rPr>
+              <a:t>  pull_request:</a:t>
+            </a:r>
+            <a:endParaRPr lang="en-US" sz="1050" dirty="0"/>
+          </a:p>
+          <a:p>
+            <a:pPr algn="l" indent="0" marL="0">
+              <a:buNone/>
+            </a:pPr>
+            <a:r>
+              <a:rPr lang="en-US" sz="1050" dirty="0">
+                <a:solidFill>
+                  <a:srgbClr val="F8F4F0"/>
+                </a:solidFill>
+                <a:latin typeface="Courier New" pitchFamily="34" charset="0"/>
+                <a:ea typeface="Courier New" pitchFamily="34" charset="-122"/>
+                <a:cs typeface="Courier New" pitchFamily="34" charset="-120"/>
+              </a:rPr>
+              <a:t>    branches: [ main ]</a:t>
+            </a:r>
+            <a:endParaRPr lang="en-US" sz="1050" dirty="0"/>
+          </a:p>
+          <a:p>
+            <a:pPr algn="l" indent="0" marL="0">
+              <a:buNone/>
+            </a:pPr>
+            <a:r>
+              <a:rPr lang="en-US" sz="1050" dirty="0">
+                <a:solidFill>
+                  <a:srgbClr val="F8F4F0"/>
+                </a:solidFill>
+                <a:latin typeface="Courier New" pitchFamily="34" charset="0"/>
+                <a:ea typeface="Courier New" pitchFamily="34" charset="-122"/>
+                <a:cs typeface="Courier New" pitchFamily="34" charset="-120"/>
+              </a:rPr>
+              <a:t>jobs:</a:t>
+            </a:r>
+            <a:endParaRPr lang="en-US" sz="1050" dirty="0"/>
+          </a:p>
+          <a:p>
+            <a:pPr algn="l" indent="0" marL="0">
+              <a:buNone/>
+            </a:pPr>
+            <a:r>
+              <a:rPr lang="en-US" sz="1050" dirty="0">
+                <a:solidFill>
+                  <a:srgbClr val="F8F4F0"/>
+                </a:solidFill>
+                <a:latin typeface="Courier New" pitchFamily="34" charset="0"/>
+                <a:ea typeface="Courier New" pitchFamily="34" charset="-122"/>
+                <a:cs typeface="Courier New" pitchFamily="34" charset="-120"/>
+              </a:rPr>
+              <a:t>  test:</a:t>
+            </a:r>
+            <a:endParaRPr lang="en-US" sz="1050" dirty="0"/>
+          </a:p>
+          <a:p>
+            <a:pPr algn="l" indent="0" marL="0">
+              <a:buNone/>
+            </a:pPr>
+            <a:r>
+              <a:rPr lang="en-US" sz="1050" dirty="0">
+                <a:solidFill>
+                  <a:srgbClr val="F8F4F0"/>
+                </a:solidFill>
+                <a:latin typeface="Courier New" pitchFamily="34" charset="0"/>
+                <a:ea typeface="Courier New" pitchFamily="34" charset="-122"/>
+                <a:cs typeface="Courier New" pitchFamily="34" charset="-120"/>
+              </a:rPr>
+              <a:t>    runs-on: ubuntu-latest</a:t>
+            </a:r>
+            <a:endParaRPr lang="en-US" sz="1050" dirty="0"/>
+          </a:p>
+          <a:p>
+            <a:pPr algn="l" indent="0" marL="0">
+              <a:buNone/>
+            </a:pPr>
+            <a:r>
+              <a:rPr lang="en-US" sz="1050" dirty="0">
+                <a:solidFill>
+                  <a:srgbClr val="F8F4F0"/>
+                </a:solidFill>
+                <a:latin typeface="Courier New" pitchFamily="34" charset="0"/>
+                <a:ea typeface="Courier New" pitchFamily="34" charset="-122"/>
+                <a:cs typeface="Courier New" pitchFamily="34" charset="-120"/>
+              </a:rPr>
+              <a:t>    steps:</a:t>
+            </a:r>
+            <a:endParaRPr lang="en-US" sz="1050" dirty="0"/>
+          </a:p>
+          <a:p>
+            <a:pPr algn="l" indent="0" marL="0">
+              <a:buNone/>
+            </a:pPr>
+            <a:r>
+              <a:rPr lang="en-US" sz="1050" dirty="0">
+                <a:solidFill>
+                  <a:srgbClr val="F8F4F0"/>
+                </a:solidFill>
+                <a:latin typeface="Courier New" pitchFamily="34" charset="0"/>
+                <a:ea typeface="Courier New" pitchFamily="34" charset="-122"/>
+                <a:cs typeface="Courier New" pitchFamily="34" charset="-120"/>
+              </a:rPr>
+              <a:t>      - uses: actions/checkout@v3</a:t>
+            </a:r>
+            <a:endParaRPr lang="en-US" sz="1050" dirty="0"/>
+          </a:p>
+          <a:p>
+            <a:pPr algn="l" indent="0" marL="0">
+              <a:buNone/>
+            </a:pPr>
+            <a:r>
+              <a:rPr lang="en-US" sz="1050" dirty="0">
+                <a:solidFill>
+                  <a:srgbClr val="F8F4F0"/>
+                </a:solidFill>
+                <a:latin typeface="Courier New" pitchFamily="34" charset="0"/>
+                <a:ea typeface="Courier New" pitchFamily="34" charset="-122"/>
+                <a:cs typeface="Courier New" pitchFamily="34" charset="-120"/>
+              </a:rPr>
+              <a:t>      - uses: actions/setup-node@v3</a:t>
+            </a:r>
+            <a:endParaRPr lang="en-US" sz="1050" dirty="0"/>
+          </a:p>
+          <a:p>
+            <a:pPr algn="l" indent="0" marL="0">
+              <a:buNone/>
+            </a:pPr>
+            <a:r>
+              <a:rPr lang="en-US" sz="1050" dirty="0">
+                <a:solidFill>
+                  <a:srgbClr val="F8F4F0"/>
+                </a:solidFill>
+                <a:latin typeface="Courier New" pitchFamily="34" charset="0"/>
+                <a:ea typeface="Courier New" pitchFamily="34" charset="-122"/>
+                <a:cs typeface="Courier New" pitchFamily="34" charset="-120"/>
+              </a:rPr>
+              <a:t>      - run: npm ci</a:t>
+            </a:r>
+            <a:endParaRPr lang="en-US" sz="1050" dirty="0"/>
+          </a:p>
+          <a:p>
+            <a:pPr algn="l" indent="0" marL="0">
+              <a:buNone/>
+            </a:pPr>
+            <a:r>
+              <a:rPr lang="en-US" sz="1050" dirty="0">
+                <a:solidFill>
+                  <a:srgbClr val="F8F4F0"/>
+                </a:solidFill>
+                <a:latin typeface="Courier New" pitchFamily="34" charset="0"/>
+                <a:ea typeface="Courier New" pitchFamily="34" charset="-122"/>
+                <a:cs typeface="Courier New" pitchFamily="34" charset="-120"/>
+              </a:rPr>
+              <a:t>      - run: npm run lint</a:t>
+            </a:r>
+            <a:endParaRPr lang="en-US" sz="1050" dirty="0"/>
+          </a:p>
+          <a:p>
+            <a:pPr algn="l" indent="0" marL="0">
+              <a:buNone/>
+            </a:pPr>
+            <a:r>
+              <a:rPr lang="en-US" sz="1050" dirty="0">
+                <a:solidFill>
+                  <a:srgbClr val="F8F4F0"/>
+                </a:solidFill>
+                <a:latin typeface="Courier New" pitchFamily="34" charset="0"/>
+                <a:ea typeface="Courier New" pitchFamily="34" charset="-122"/>
+                <a:cs typeface="Courier New" pitchFamily="34" charset="-120"/>
+              </a:rPr>
+              <a:t>      - run: npm run test:coverage</a:t>
+            </a:r>
+            <a:endParaRPr lang="en-US" sz="1050" dirty="0"/>
+          </a:p>
+          <a:p>
+            <a:pPr algn="l" indent="0" marL="0">
+              <a:buNone/>
+            </a:pPr>
+            <a:r>
+              <a:rPr lang="en-US" sz="1050" dirty="0">
+                <a:solidFill>
+                  <a:srgbClr val="F8F4F0"/>
+                </a:solidFill>
+                <a:latin typeface="Courier New" pitchFamily="34" charset="0"/>
+                <a:ea typeface="Courier New" pitchFamily="34" charset="-122"/>
+                <a:cs typeface="Courier New" pitchFamily="34" charset="-120"/>
+              </a:rPr>
+              <a:t>      - run: npm run build</a:t>
+            </a:r>
+            <a:endParaRPr lang="en-US" sz="1050" dirty="0"/>
           </a:p>
         </p:txBody>
       </p:sp>
@@ -3931,57 +3804,103 @@
               <a:buNone/>
             </a:pPr>
             <a:r>
-              <a:rPr lang="en-US" sz="2000" b="1" dirty="0">
-                <a:solidFill>
-                  <a:srgbClr val="0F1E36"/>
+              <a:rPr lang="en-US" sz="1600" b="1" dirty="0">
+                <a:solidFill>
+                  <a:srgbClr val="1A1A2E"/>
+                </a:solidFill>
+                <a:latin typeface="Georgia" pitchFamily="34" charset="0"/>
+                <a:ea typeface="Georgia" pitchFamily="34" charset="-122"/>
+                <a:cs typeface="Georgia" pitchFamily="34" charset="-120"/>
+              </a:rPr>
+              <a:t>Локальная тестовая песочница Docker Compose</a:t>
+            </a:r>
+            <a:endParaRPr lang="en-US" sz="1600" dirty="0"/>
+          </a:p>
+        </p:txBody>
+      </p:sp>
+      <p:sp>
+        <p:nvSpPr>
+          <p:cNvPr id="3" name="Shape 1"/>
+          <p:cNvSpPr/>
+          <p:nvPr/>
+        </p:nvSpPr>
+        <p:spPr>
+          <a:xfrm>
+            <a:off x="384048" y="822960"/>
+            <a:ext cx="8375904" cy="4119372"/>
+          </a:xfrm>
+          <a:prstGeom prst="roundRect">
+            <a:avLst>
+              <a:gd name="adj" fmla="val 2220"/>
+            </a:avLst>
+          </a:prstGeom>
+          <a:solidFill>
+            <a:srgbClr val="F8F4F0"/>
+          </a:solidFill>
+          <a:ln w="12700">
+            <a:solidFill>
+              <a:srgbClr val="EFEAE3"/>
+            </a:solidFill>
+            <a:prstDash val="solid"/>
+          </a:ln>
+          <a:effectLst>
+            <a:outerShdw sx="100000" sy="100000" kx="0" ky="0" algn="bl" rotWithShape="0" blurRad="152400" dist="38100" dir="2700000">
+              <a:srgbClr val="000000">
+                <a:alpha val="12000"/>
+              </a:srgbClr>
+            </a:outerShdw>
+          </a:effectLst>
+        </p:spPr>
+      </p:sp>
+      <p:sp>
+        <p:nvSpPr>
+          <p:cNvPr id="4" name="Text 2"/>
+          <p:cNvSpPr/>
+          <p:nvPr/>
+        </p:nvSpPr>
+        <p:spPr>
+          <a:xfrm>
+            <a:off x="548640" y="932688"/>
+            <a:ext cx="8046720" cy="411480"/>
+          </a:xfrm>
+          <a:prstGeom prst="rect">
+            <a:avLst/>
+          </a:prstGeom>
+          <a:noFill/>
+          <a:ln/>
+        </p:spPr>
+        <p:txBody>
+          <a:bodyPr wrap="square" rtlCol="0" anchor="ctr"/>
+          <a:lstStyle/>
+          <a:p>
+            <a:pPr indent="0" marL="0">
+              <a:buNone/>
+            </a:pPr>
+            <a:r>
+              <a:rPr lang="en-US" sz="1200" b="1" dirty="0">
+                <a:solidFill>
+                  <a:srgbClr val="1A1A2E"/>
                 </a:solidFill>
                 <a:latin typeface="Cambria" pitchFamily="34" charset="0"/>
                 <a:ea typeface="Cambria" pitchFamily="34" charset="-122"/>
                 <a:cs typeface="Cambria" pitchFamily="34" charset="-120"/>
               </a:rPr>
-              <a:t>Выводы по теме</a:t>
-            </a:r>
-            <a:endParaRPr lang="en-US" sz="2000" dirty="0"/>
-          </a:p>
-        </p:txBody>
-      </p:sp>
-      <p:sp>
-        <p:nvSpPr>
-          <p:cNvPr id="3" name="Shape 1"/>
-          <p:cNvSpPr/>
-          <p:nvPr/>
-        </p:nvSpPr>
-        <p:spPr>
-          <a:xfrm>
-            <a:off x="384048" y="3918204"/>
-            <a:ext cx="8375904" cy="960120"/>
-          </a:xfrm>
-          <a:prstGeom prst="roundRect">
-            <a:avLst>
-              <a:gd name="adj" fmla="val 9524"/>
-            </a:avLst>
-          </a:prstGeom>
-          <a:solidFill>
-            <a:srgbClr val="0F1E36"/>
-          </a:solidFill>
-          <a:ln w="12700">
-            <a:solidFill>
-              <a:srgbClr val="0F1E36"/>
-            </a:solidFill>
-            <a:prstDash val="solid"/>
-          </a:ln>
-        </p:spPr>
-      </p:sp>
-      <p:sp>
-        <p:nvSpPr>
-          <p:cNvPr id="4" name="Text 2"/>
-          <p:cNvSpPr/>
-          <p:nvPr/>
-        </p:nvSpPr>
-        <p:spPr>
-          <a:xfrm>
-            <a:off x="548640" y="3918204"/>
-            <a:ext cx="8046720" cy="960120"/>
+              <a:t>Оркестрация тестовой среды и тестовые контейнеры</a:t>
+            </a:r>
+            <a:endParaRPr lang="en-US" sz="1200" dirty="0"/>
+          </a:p>
+        </p:txBody>
+      </p:sp>
+      <p:sp>
+        <p:nvSpPr>
+          <p:cNvPr id="5" name="Text 3"/>
+          <p:cNvSpPr/>
+          <p:nvPr/>
+        </p:nvSpPr>
+        <p:spPr>
+          <a:xfrm>
+            <a:off x="548640" y="1417320"/>
+            <a:ext cx="8046720" cy="3296412"/>
           </a:xfrm>
           <a:prstGeom prst="rect">
             <a:avLst/>
@@ -3990,24 +3909,228 @@
           <a:ln/>
         </p:spPr>
         <p:txBody>
-          <a:bodyPr wrap="square" rtlCol="0" anchor="ctr"/>
-          <a:lstStyle/>
-          <a:p>
-            <a:pPr algn="l" indent="0" marL="0">
-              <a:buNone/>
-            </a:pPr>
-            <a:r>
-              <a:rPr lang="en-US" sz="1200" dirty="0">
-                <a:solidFill>
-                  <a:srgbClr val="FFFFFF"/>
-                </a:solidFill>
-                <a:latin typeface="Calibri" pitchFamily="34" charset="0"/>
-                <a:ea typeface="Calibri" pitchFamily="34" charset="-122"/>
-                <a:cs typeface="Calibri" pitchFamily="34" charset="-120"/>
+          <a:bodyPr wrap="square" rtlCol="0" anchor="t"/>
+          <a:lstStyle/>
+          <a:p>
+            <a:pPr algn="l" indent="0" marL="0">
+              <a:buNone/>
+            </a:pPr>
+            <a:r>
+              <a:rPr lang="en-US" sz="1600" dirty="0">
+                <a:solidFill>
+                  <a:srgbClr val="2D2D3A"/>
+                </a:solidFill>
+                <a:latin typeface="Times New Roman" pitchFamily="34" charset="0"/>
+                <a:ea typeface="Times New Roman" pitchFamily="34" charset="-122"/>
+                <a:cs typeface="Times New Roman" pitchFamily="34" charset="-120"/>
+              </a:rPr>
+              <a:t>Для запуска полноценных интеграционных и E2E тестов разработчику не нужно вручную настраивать базы данных на компьютере. Вся инфраструктура разворачивается одной командой `docker-compose -f docker-compose.test.yml up -d`.</a:t>
+            </a:r>
+            <a:endParaRPr lang="en-US" sz="1600" dirty="0"/>
+          </a:p>
+          <a:p>
+            <a:pPr algn="l" indent="0" marL="0">
+              <a:buNone/>
+            </a:pPr>
+            <a:endParaRPr lang="en-US" sz="1600" dirty="0"/>
+          </a:p>
+          <a:p>
+            <a:pPr algn="l" indent="0" marL="0">
+              <a:buNone/>
+            </a:pPr>
+            <a:r>
+              <a:rPr lang="en-US" sz="1600" dirty="0">
+                <a:solidFill>
+                  <a:srgbClr val="2D2D3A"/>
+                </a:solidFill>
+                <a:latin typeface="Times New Roman" pitchFamily="34" charset="0"/>
+                <a:ea typeface="Times New Roman" pitchFamily="34" charset="-122"/>
+                <a:cs typeface="Times New Roman" pitchFamily="34" charset="-120"/>
+              </a:rPr>
+              <a:t>Тестовые контейнеры:</a:t>
+            </a:r>
+            <a:endParaRPr lang="en-US" sz="1600" dirty="0"/>
+          </a:p>
+          <a:p>
+            <a:pPr algn="l" indent="0" marL="0">
+              <a:buNone/>
+            </a:pPr>
+            <a:r>
+              <a:rPr lang="en-US" sz="1600" dirty="0">
+                <a:solidFill>
+                  <a:srgbClr val="2D2D3A"/>
+                </a:solidFill>
+                <a:latin typeface="Times New Roman" pitchFamily="34" charset="0"/>
+                <a:ea typeface="Times New Roman" pitchFamily="34" charset="-122"/>
+                <a:cs typeface="Times New Roman" pitchFamily="34" charset="-120"/>
+              </a:rPr>
+              <a:t>• `test-db` — СУБД PostgreSQL с автоматически накатаными тестовыми схемами.</a:t>
+            </a:r>
+            <a:endParaRPr lang="en-US" sz="1600" dirty="0"/>
+          </a:p>
+          <a:p>
+            <a:pPr algn="l" indent="0" marL="0">
+              <a:buNone/>
+            </a:pPr>
+            <a:r>
+              <a:rPr lang="en-US" sz="1600" dirty="0">
+                <a:solidFill>
+                  <a:srgbClr val="2D2D3A"/>
+                </a:solidFill>
+                <a:latin typeface="Times New Roman" pitchFamily="34" charset="0"/>
+                <a:ea typeface="Times New Roman" pitchFamily="34" charset="-122"/>
+                <a:cs typeface="Times New Roman" pitchFamily="34" charset="-120"/>
+              </a:rPr>
+              <a:t>• `test-s3` — легковесный MinIO для бинарных файлов.</a:t>
+            </a:r>
+            <a:endParaRPr lang="en-US" sz="1600" dirty="0"/>
+          </a:p>
+          <a:p>
+            <a:pPr algn="l" indent="0" marL="0">
+              <a:buNone/>
+            </a:pPr>
+            <a:r>
+              <a:rPr lang="en-US" sz="1600" dirty="0">
+                <a:solidFill>
+                  <a:srgbClr val="2D2D3A"/>
+                </a:solidFill>
+                <a:latin typeface="Times New Roman" pitchFamily="34" charset="0"/>
+                <a:ea typeface="Times New Roman" pitchFamily="34" charset="-122"/>
+                <a:cs typeface="Times New Roman" pitchFamily="34" charset="-120"/>
+              </a:rPr>
+              <a:t>• `mock-1c` — симулятор учетной системы компании.</a:t>
+            </a:r>
+            <a:endParaRPr lang="en-US" sz="1600" dirty="0"/>
+          </a:p>
+          <a:p>
+            <a:pPr algn="l" indent="0" marL="0">
+              <a:buNone/>
+            </a:pPr>
+            <a:r>
+              <a:rPr lang="en-US" sz="1600" dirty="0">
+                <a:solidFill>
+                  <a:srgbClr val="2D2D3A"/>
+                </a:solidFill>
+                <a:latin typeface="Times New Roman" pitchFamily="34" charset="0"/>
+                <a:ea typeface="Times New Roman" pitchFamily="34" charset="-122"/>
+                <a:cs typeface="Times New Roman" pitchFamily="34" charset="-120"/>
+              </a:rPr>
+              <a:t>• Контейнеры полностью изолированы от боевой среды и автоматически очищаются после прогона тестов.</a:t>
+            </a:r>
+            <a:endParaRPr lang="en-US" sz="1600" dirty="0"/>
+          </a:p>
+        </p:txBody>
+      </p:sp>
+    </p:spTree>
+  </p:cSld>
+  <p:clrMapOvr>
+    <a:masterClrMapping/>
+  </p:clrMapOvr>
+</p:sld>
+</file>
+
+<file path=ppt/slides/slide15.xml><?xml version="1.0" encoding="utf-8"?>
+<p:sld xmlns:a="http://schemas.openxmlformats.org/drawingml/2006/main" xmlns:r="http://schemas.openxmlformats.org/officeDocument/2006/relationships" xmlns:p="http://schemas.openxmlformats.org/presentationml/2006/main">
+  <p:cSld name="Slide 15">
+    <p:bg>
+      <p:bgPr>
+        <a:solidFill>
+          <a:srgbClr val="FFFFFF"/>
+        </a:solidFill>
+      </p:bgPr>
+    </p:bg>
+    <p:spTree>
+      <p:nvGrpSpPr>
+        <p:cNvPr id="1" name=""/>
+        <p:cNvGrpSpPr/>
+        <p:nvPr/>
+      </p:nvGrpSpPr>
+      <p:grpSpPr>
+        <a:xfrm>
+          <a:off x="0" y="0"/>
+          <a:ext cx="0" cy="0"/>
+          <a:chOff x="0" y="0"/>
+          <a:chExt cx="0" cy="0"/>
+        </a:xfrm>
+      </p:grpSpPr>
+      <p:sp>
+        <p:nvSpPr>
+          <p:cNvPr id="2" name="Text 0"/>
+          <p:cNvSpPr/>
+          <p:nvPr/>
+        </p:nvSpPr>
+        <p:spPr>
+          <a:xfrm>
+            <a:off x="384048" y="164592"/>
+            <a:ext cx="8375904" cy="548640"/>
+          </a:xfrm>
+          <a:prstGeom prst="rect">
+            <a:avLst/>
+          </a:prstGeom>
+          <a:noFill/>
+          <a:ln/>
+        </p:spPr>
+        <p:txBody>
+          <a:bodyPr wrap="square" rtlCol="0" anchor="b"/>
+          <a:lstStyle/>
+          <a:p>
+            <a:pPr algn="l" indent="0" marL="0">
+              <a:buNone/>
+            </a:pPr>
+            <a:r>
+              <a:rPr lang="en-US" sz="1600" b="1" dirty="0">
+                <a:solidFill>
+                  <a:srgbClr val="1A1A2E"/>
+                </a:solidFill>
+                <a:latin typeface="Georgia" pitchFamily="34" charset="0"/>
+                <a:ea typeface="Georgia" pitchFamily="34" charset="-122"/>
+                <a:cs typeface="Georgia" pitchFamily="34" charset="-120"/>
+              </a:rPr>
+              <a:t>Выводы по теме</a:t>
+            </a:r>
+            <a:endParaRPr lang="en-US" sz="1600" dirty="0"/>
+          </a:p>
+        </p:txBody>
+      </p:sp>
+      <p:sp>
+        <p:nvSpPr>
+          <p:cNvPr id="3" name="Text 1"/>
+          <p:cNvSpPr/>
+          <p:nvPr/>
+        </p:nvSpPr>
+        <p:spPr>
+          <a:xfrm>
+            <a:off x="475488" y="868680"/>
+            <a:ext cx="8193024" cy="4027932"/>
+          </a:xfrm>
+          <a:prstGeom prst="rect">
+            <a:avLst/>
+          </a:prstGeom>
+          <a:noFill/>
+          <a:ln/>
+        </p:spPr>
+        <p:txBody>
+          <a:bodyPr wrap="square" rtlCol="0" anchor="t"/>
+          <a:lstStyle/>
+          <a:p>
+            <a:pPr algn="l" indent="0" marL="0">
+              <a:lnSpc>
+                <a:spcPts val="3200"/>
+              </a:lnSpc>
+              <a:buNone/>
+            </a:pPr>
+            <a:r>
+              <a:rPr lang="en-US" sz="1800" dirty="0">
+                <a:solidFill>
+                  <a:srgbClr val="2D2D3A"/>
+                </a:solidFill>
+                <a:latin typeface="Times New Roman" pitchFamily="34" charset="0"/>
+                <a:ea typeface="Times New Roman" pitchFamily="34" charset="-122"/>
+                <a:cs typeface="Times New Roman" pitchFamily="34" charset="-120"/>
               </a:rPr>
               <a:t>Автоматизированное тестирование в проекте «Личный кабинет» — это не просто поиск багов, а ключевое условие стабильности бизнес-процессов компании ООО «Неосистемы Северо-Запад». Внедрение пирамиды тестов (юнит, интеграция, сквозной Playwright, нагрузочный Artillery) и строгого контроля покрытия в CI/CD гарантирует бесперебойную работу личного кабинета, безопасность персональных данных клиентов и надежность синхронизации с базой 1С.</a:t>
             </a:r>
-            <a:endParaRPr lang="en-US" sz="1200" dirty="0"/>
+            <a:endParaRPr lang="en-US" sz="1800" dirty="0"/>
           </a:p>
         </p:txBody>
       </p:sp>
@@ -4068,17 +4191,17 @@
               <a:buNone/>
             </a:pPr>
             <a:r>
-              <a:rPr lang="en-US" sz="2000" b="1" dirty="0">
-                <a:solidFill>
-                  <a:srgbClr val="0F1E36"/>
-                </a:solidFill>
-                <a:latin typeface="Cambria" pitchFamily="34" charset="0"/>
-                <a:ea typeface="Cambria" pitchFamily="34" charset="-122"/>
-                <a:cs typeface="Cambria" pitchFamily="34" charset="-120"/>
-              </a:rPr>
-              <a:t>Роль обеспечения качества (QA)</a:t>
-            </a:r>
-            <a:endParaRPr lang="en-US" sz="2000" dirty="0"/>
+              <a:rPr lang="en-US" sz="1600" b="1" dirty="0">
+                <a:solidFill>
+                  <a:srgbClr val="1A1A2E"/>
+                </a:solidFill>
+                <a:latin typeface="Georgia" pitchFamily="34" charset="0"/>
+                <a:ea typeface="Georgia" pitchFamily="34" charset="-122"/>
+                <a:cs typeface="Georgia" pitchFamily="34" charset="-120"/>
+              </a:rPr>
+              <a:t>Постановка задачи моделирования</a:t>
+            </a:r>
+            <a:endParaRPr lang="en-US" sz="1600" dirty="0"/>
           </a:p>
         </p:txBody>
       </p:sp>
@@ -4091,26 +4214,26 @@
         <p:spPr>
           <a:xfrm>
             <a:off x="384048" y="822960"/>
-            <a:ext cx="4023360" cy="4119372"/>
+            <a:ext cx="8375904" cy="4119372"/>
           </a:xfrm>
           <a:prstGeom prst="roundRect">
             <a:avLst>
-              <a:gd name="adj" fmla="val 2273"/>
+              <a:gd name="adj" fmla="val 2220"/>
             </a:avLst>
           </a:prstGeom>
           <a:solidFill>
-            <a:srgbClr val="FFF7ED"/>
+            <a:srgbClr val="F8F4F0"/>
           </a:solidFill>
           <a:ln w="12700">
             <a:solidFill>
-              <a:srgbClr val="FFF7ED"/>
+              <a:srgbClr val="EFEAE3"/>
             </a:solidFill>
             <a:prstDash val="solid"/>
           </a:ln>
           <a:effectLst>
-            <a:outerShdw sx="100000" sy="100000" kx="0" ky="0" algn="bl" rotWithShape="0" blurRad="88900" dist="25400" dir="2700000">
+            <a:outerShdw sx="100000" sy="100000" kx="0" ky="0" algn="bl" rotWithShape="0" blurRad="152400" dist="38100" dir="2700000">
               <a:srgbClr val="000000">
-                <a:alpha val="9000"/>
+                <a:alpha val="12000"/>
               </a:srgbClr>
             </a:outerShdw>
           </a:effectLst>
@@ -4125,7 +4248,7 @@
         <p:spPr>
           <a:xfrm>
             <a:off x="548640" y="932688"/>
-            <a:ext cx="3694176" cy="365760"/>
+            <a:ext cx="8046720" cy="411480"/>
           </a:xfrm>
           <a:prstGeom prst="rect">
             <a:avLst/>
@@ -4141,17 +4264,17 @@
               <a:buNone/>
             </a:pPr>
             <a:r>
-              <a:rPr lang="en-US" sz="1300" b="1" dirty="0">
-                <a:solidFill>
-                  <a:srgbClr val="0F1E36"/>
+              <a:rPr lang="en-US" sz="1200" b="1" dirty="0">
+                <a:solidFill>
+                  <a:srgbClr val="1A1A2E"/>
                 </a:solidFill>
                 <a:latin typeface="Cambria" pitchFamily="34" charset="0"/>
                 <a:ea typeface="Cambria" pitchFamily="34" charset="-122"/>
                 <a:cs typeface="Cambria" pitchFamily="34" charset="-120"/>
               </a:rPr>
-              <a:t>Верификация vs Валидация</a:t>
-            </a:r>
-            <a:endParaRPr lang="en-US" sz="1300" dirty="0"/>
+              <a:t>Постановка практической задачи</a:t>
+            </a:r>
+            <a:endParaRPr lang="en-US" sz="1200" dirty="0"/>
           </a:p>
         </p:txBody>
       </p:sp>
@@ -4163,8 +4286,8 @@
         </p:nvSpPr>
         <p:spPr>
           <a:xfrm>
-            <a:off x="548640" y="1389888"/>
-            <a:ext cx="3694176" cy="2926080"/>
+            <a:off x="548640" y="1417320"/>
+            <a:ext cx="8046720" cy="3296412"/>
           </a:xfrm>
           <a:prstGeom prst="rect">
             <a:avLst/>
@@ -4173,192 +4296,64 @@
           <a:ln/>
         </p:spPr>
         <p:txBody>
-          <a:bodyPr wrap="square" rtlCol="0" anchor="ctr"/>
-          <a:lstStyle/>
-          <a:p>
-            <a:pPr marL="342900" indent="-342900">
-              <a:buSzPct val="100000"/>
-              <a:buChar char="•"/>
-            </a:pPr>
-            <a:r>
-              <a:rPr lang="en-US" sz="1150" dirty="0">
-                <a:solidFill>
-                  <a:srgbClr val="1E293B"/>
-                </a:solidFill>
-                <a:latin typeface="Calibri" pitchFamily="34" charset="0"/>
-                <a:ea typeface="Calibri" pitchFamily="34" charset="-122"/>
-                <a:cs typeface="Calibri" pitchFamily="34" charset="-120"/>
-              </a:rPr>
-              <a:t>Verification (Верификация): 'Создаем ли мы продукт правильно?' Сверка со спецификацией, стандартами и ТЗ.</a:t>
-            </a:r>
-            <a:endParaRPr lang="en-US" sz="1150" dirty="0"/>
-          </a:p>
-          <a:p>
-            <a:pPr marL="342900" indent="-342900">
-              <a:buSzPct val="100000"/>
-              <a:buChar char="•"/>
-            </a:pPr>
-            <a:r>
-              <a:rPr lang="en-US" sz="1150" dirty="0">
-                <a:solidFill>
-                  <a:srgbClr val="1E293B"/>
-                </a:solidFill>
-                <a:latin typeface="Calibri" pitchFamily="34" charset="0"/>
-                <a:ea typeface="Calibri" pitchFamily="34" charset="-122"/>
-                <a:cs typeface="Calibri" pitchFamily="34" charset="-120"/>
-              </a:rPr>
-              <a:t>Validation (Валидация): 'Создаем ли мы ПРАВИЛЬНЫЙ продукт?' Соответствует ли система потребностям реального пользователя.</a:t>
-            </a:r>
-            <a:endParaRPr lang="en-US" sz="1150" dirty="0"/>
-          </a:p>
-        </p:txBody>
-      </p:sp>
-      <p:sp>
-        <p:nvSpPr>
-          <p:cNvPr id="6" name="Shape 4"/>
-          <p:cNvSpPr/>
-          <p:nvPr/>
-        </p:nvSpPr>
-        <p:spPr>
-          <a:xfrm>
-            <a:off x="4681728" y="822960"/>
-            <a:ext cx="4078224" cy="4119372"/>
-          </a:xfrm>
-          <a:prstGeom prst="roundRect">
-            <a:avLst>
-              <a:gd name="adj" fmla="val 2242"/>
-            </a:avLst>
-          </a:prstGeom>
-          <a:solidFill>
-            <a:srgbClr val="D1FAE5"/>
-          </a:solidFill>
-          <a:ln w="12700">
-            <a:solidFill>
-              <a:srgbClr val="D1FAE5"/>
-            </a:solidFill>
-            <a:prstDash val="solid"/>
-          </a:ln>
-          <a:effectLst>
-            <a:outerShdw sx="100000" sy="100000" kx="0" ky="0" algn="bl" rotWithShape="0" blurRad="88900" dist="25400" dir="2700000">
-              <a:srgbClr val="000000">
-                <a:alpha val="9000"/>
-              </a:srgbClr>
-            </a:outerShdw>
-          </a:effectLst>
-        </p:spPr>
-      </p:sp>
-      <p:sp>
-        <p:nvSpPr>
-          <p:cNvPr id="7" name="Text 5"/>
-          <p:cNvSpPr/>
-          <p:nvPr/>
-        </p:nvSpPr>
-        <p:spPr>
-          <a:xfrm>
-            <a:off x="4846320" y="932688"/>
-            <a:ext cx="3749040" cy="365760"/>
-          </a:xfrm>
-          <a:prstGeom prst="rect">
-            <a:avLst/>
-          </a:prstGeom>
-          <a:noFill/>
-          <a:ln/>
-        </p:spPr>
-        <p:txBody>
-          <a:bodyPr wrap="square" rtlCol="0" anchor="ctr"/>
-          <a:lstStyle/>
-          <a:p>
-            <a:pPr indent="0" marL="0">
-              <a:buNone/>
-            </a:pPr>
-            <a:r>
-              <a:rPr lang="en-US" sz="1300" b="1" dirty="0">
-                <a:solidFill>
-                  <a:srgbClr val="0F1E36"/>
-                </a:solidFill>
-                <a:latin typeface="Cambria" pitchFamily="34" charset="0"/>
-                <a:ea typeface="Cambria" pitchFamily="34" charset="-122"/>
-                <a:cs typeface="Cambria" pitchFamily="34" charset="-120"/>
-              </a:rPr>
-              <a:t>Преимущества автоматизации</a:t>
-            </a:r>
-            <a:endParaRPr lang="en-US" sz="1300" dirty="0"/>
-          </a:p>
-        </p:txBody>
-      </p:sp>
-      <p:sp>
-        <p:nvSpPr>
-          <p:cNvPr id="8" name="Text 6"/>
-          <p:cNvSpPr/>
-          <p:nvPr/>
-        </p:nvSpPr>
-        <p:spPr>
-          <a:xfrm>
-            <a:off x="4846320" y="1389888"/>
-            <a:ext cx="3749040" cy="2926080"/>
-          </a:xfrm>
-          <a:prstGeom prst="rect">
-            <a:avLst/>
-          </a:prstGeom>
-          <a:noFill/>
-          <a:ln/>
-        </p:spPr>
-        <p:txBody>
-          <a:bodyPr wrap="square" rtlCol="0" anchor="ctr"/>
-          <a:lstStyle/>
-          <a:p>
-            <a:pPr marL="342900" indent="-342900">
-              <a:buSzPct val="100000"/>
-              <a:buChar char="•"/>
-            </a:pPr>
-            <a:r>
-              <a:rPr lang="en-US" sz="1150" dirty="0">
-                <a:solidFill>
-                  <a:srgbClr val="1E293B"/>
-                </a:solidFill>
-                <a:latin typeface="Calibri" pitchFamily="34" charset="0"/>
-                <a:ea typeface="Calibri" pitchFamily="34" charset="-122"/>
-                <a:cs typeface="Calibri" pitchFamily="34" charset="-120"/>
-              </a:rPr>
-              <a:t>Быстрый регресс: тесты запускаются за секунды на каждый коммит.</a:t>
-            </a:r>
-            <a:endParaRPr lang="en-US" sz="1150" dirty="0"/>
-          </a:p>
-          <a:p>
-            <a:pPr marL="342900" indent="-342900">
-              <a:buSzPct val="100000"/>
-              <a:buChar char="•"/>
-            </a:pPr>
-            <a:r>
-              <a:rPr lang="en-US" sz="1150" dirty="0">
-                <a:solidFill>
-                  <a:srgbClr val="1E293B"/>
-                </a:solidFill>
-                <a:latin typeface="Calibri" pitchFamily="34" charset="0"/>
-                <a:ea typeface="Calibri" pitchFamily="34" charset="-122"/>
-                <a:cs typeface="Calibri" pitchFamily="34" charset="-120"/>
-              </a:rPr>
-              <a:t>Стабильность: предотвращение старых багов при добавлении фич.</a:t>
-            </a:r>
-            <a:endParaRPr lang="en-US" sz="1150" dirty="0"/>
-          </a:p>
-          <a:p>
-            <a:pPr marL="342900" indent="-342900">
-              <a:buSzPct val="100000"/>
-              <a:buChar char="•"/>
-            </a:pPr>
-            <a:r>
-              <a:rPr lang="en-US" sz="1150" dirty="0">
-                <a:solidFill>
-                  <a:srgbClr val="1E293B"/>
-                </a:solidFill>
-                <a:latin typeface="Calibri" pitchFamily="34" charset="0"/>
-                <a:ea typeface="Calibri" pitchFamily="34" charset="-122"/>
-                <a:cs typeface="Calibri" pitchFamily="34" charset="-120"/>
-              </a:rPr>
-              <a:t>Живая документация: тесты описывают реальное поведение API.</a:t>
-            </a:r>
-            <a:endParaRPr lang="en-US" sz="1150" dirty="0"/>
+          <a:bodyPr wrap="square" rtlCol="0" anchor="t"/>
+          <a:lstStyle/>
+          <a:p>
+            <a:pPr algn="l" indent="0" marL="0">
+              <a:buNone/>
+            </a:pPr>
+            <a:r>
+              <a:rPr lang="en-US" sz="1600" dirty="0">
+                <a:solidFill>
+                  <a:srgbClr val="2D2D3A"/>
+                </a:solidFill>
+                <a:latin typeface="Times New Roman" pitchFamily="34" charset="0"/>
+                <a:ea typeface="Times New Roman" pitchFamily="34" charset="-122"/>
+                <a:cs typeface="Times New Roman" pitchFamily="34" charset="-120"/>
+              </a:rPr>
+              <a:t>• Обеспечить высокое качество и стабильность работы портала перед вводом в эксплуатацию.</a:t>
+            </a:r>
+            <a:endParaRPr lang="en-US" sz="1600" dirty="0"/>
+          </a:p>
+          <a:p>
+            <a:pPr algn="l" indent="0" marL="0">
+              <a:buNone/>
+            </a:pPr>
+            <a:endParaRPr lang="en-US" sz="1600" dirty="0"/>
+          </a:p>
+          <a:p>
+            <a:pPr algn="l" indent="0" marL="0">
+              <a:buNone/>
+            </a:pPr>
+            <a:r>
+              <a:rPr lang="en-US" sz="1600" dirty="0">
+                <a:solidFill>
+                  <a:srgbClr val="2D2D3A"/>
+                </a:solidFill>
+                <a:latin typeface="Times New Roman" pitchFamily="34" charset="0"/>
+                <a:ea typeface="Times New Roman" pitchFamily="34" charset="-122"/>
+                <a:cs typeface="Times New Roman" pitchFamily="34" charset="-120"/>
+              </a:rPr>
+              <a:t>Конкретная задача моделирования:</a:t>
+            </a:r>
+            <a:endParaRPr lang="en-US" sz="1600" dirty="0"/>
+          </a:p>
+          <a:p>
+            <a:pPr algn="l" indent="0" marL="0">
+              <a:buNone/>
+            </a:pPr>
+            <a:r>
+              <a:rPr lang="en-US" sz="1600" dirty="0">
+                <a:solidFill>
+                  <a:srgbClr val="2D2D3A"/>
+                </a:solidFill>
+                <a:latin typeface="Times New Roman" pitchFamily="34" charset="0"/>
+                <a:ea typeface="Times New Roman" pitchFamily="34" charset="-122"/>
+                <a:cs typeface="Times New Roman" pitchFamily="34" charset="-120"/>
+              </a:rPr>
+              <a:t>• Построить систему тестирования (пирамиду тестов), охватывающую все уровни — от юнит-тестов до сквозных E2E-сценариев.</a:t>
+            </a:r>
+            <a:endParaRPr lang="en-US" sz="1600" dirty="0"/>
           </a:p>
         </p:txBody>
       </p:sp>
@@ -4419,17 +4414,17 @@
               <a:buNone/>
             </a:pPr>
             <a:r>
-              <a:rPr lang="en-US" sz="2000" b="1" dirty="0">
-                <a:solidFill>
-                  <a:srgbClr val="0F1E36"/>
-                </a:solidFill>
-                <a:latin typeface="Cambria" pitchFamily="34" charset="0"/>
-                <a:ea typeface="Cambria" pitchFamily="34" charset="-122"/>
-                <a:cs typeface="Cambria" pitchFamily="34" charset="-120"/>
-              </a:rPr>
-              <a:t>Пирамида тестирования в client-portal</a:t>
-            </a:r>
-            <a:endParaRPr lang="en-US" sz="2000" dirty="0"/>
+              <a:rPr lang="en-US" sz="1600" b="1" dirty="0">
+                <a:solidFill>
+                  <a:srgbClr val="1A1A2E"/>
+                </a:solidFill>
+                <a:latin typeface="Georgia" pitchFamily="34" charset="0"/>
+                <a:ea typeface="Georgia" pitchFamily="34" charset="-122"/>
+                <a:cs typeface="Georgia" pitchFamily="34" charset="-120"/>
+              </a:rPr>
+              <a:t>Роль обеспечения качества (QA)</a:t>
+            </a:r>
+            <a:endParaRPr lang="en-US" sz="1600" dirty="0"/>
           </a:p>
         </p:txBody>
       </p:sp>
@@ -4442,26 +4437,26 @@
         <p:spPr>
           <a:xfrm>
             <a:off x="384048" y="822960"/>
-            <a:ext cx="2731008" cy="4119372"/>
+            <a:ext cx="8375904" cy="4119372"/>
           </a:xfrm>
           <a:prstGeom prst="roundRect">
             <a:avLst>
-              <a:gd name="adj" fmla="val 3348"/>
+              <a:gd name="adj" fmla="val 2220"/>
             </a:avLst>
           </a:prstGeom>
           <a:solidFill>
-            <a:srgbClr val="FFF7ED"/>
+            <a:srgbClr val="F8F4F0"/>
           </a:solidFill>
           <a:ln w="12700">
             <a:solidFill>
-              <a:srgbClr val="FFF7ED"/>
+              <a:srgbClr val="EFEAE3"/>
             </a:solidFill>
             <a:prstDash val="solid"/>
           </a:ln>
           <a:effectLst>
-            <a:outerShdw sx="100000" sy="100000" kx="0" ky="0" algn="bl" rotWithShape="0" blurRad="88900" dist="25400" dir="2700000">
+            <a:outerShdw sx="100000" sy="100000" kx="0" ky="0" algn="bl" rotWithShape="0" blurRad="152400" dist="38100" dir="2700000">
               <a:srgbClr val="000000">
-                <a:alpha val="9000"/>
+                <a:alpha val="12000"/>
               </a:srgbClr>
             </a:outerShdw>
           </a:effectLst>
@@ -4475,8 +4470,8 @@
         </p:nvSpPr>
         <p:spPr>
           <a:xfrm>
-            <a:off x="521208" y="932688"/>
-            <a:ext cx="2456688" cy="320040"/>
+            <a:off x="548640" y="932688"/>
+            <a:ext cx="8046720" cy="411480"/>
           </a:xfrm>
           <a:prstGeom prst="rect">
             <a:avLst/>
@@ -4494,13 +4489,13 @@
             <a:r>
               <a:rPr lang="en-US" sz="1200" b="1" dirty="0">
                 <a:solidFill>
-                  <a:srgbClr val="0F1E36"/>
+                  <a:srgbClr val="1A1A2E"/>
                 </a:solidFill>
                 <a:latin typeface="Cambria" pitchFamily="34" charset="0"/>
                 <a:ea typeface="Cambria" pitchFamily="34" charset="-122"/>
                 <a:cs typeface="Cambria" pitchFamily="34" charset="-120"/>
               </a:rPr>
-              <a:t>1. Unit Tests (Юнит-тесты)</a:t>
+              <a:t>Верификация vs Валидация и преимущества автоматизации</a:t>
             </a:r>
             <a:endParaRPr lang="en-US" sz="1200" dirty="0"/>
           </a:p>
@@ -4514,8 +4509,8 @@
         </p:nvSpPr>
         <p:spPr>
           <a:xfrm>
-            <a:off x="521208" y="1325880"/>
-            <a:ext cx="2456688" cy="3479292"/>
+            <a:off x="548640" y="1417320"/>
+            <a:ext cx="8046720" cy="3296412"/>
           </a:xfrm>
           <a:prstGeom prst="rect">
             <a:avLst/>
@@ -4524,248 +4519,115 @@
           <a:ln/>
         </p:spPr>
         <p:txBody>
-          <a:bodyPr wrap="square" rtlCol="0" anchor="ctr"/>
-          <a:lstStyle/>
-          <a:p>
-            <a:pPr indent="0" marL="0">
-              <a:buNone/>
-            </a:pPr>
-            <a:r>
-              <a:rPr lang="en-US" sz="1050" dirty="0">
-                <a:solidFill>
-                  <a:srgbClr val="1E293B"/>
-                </a:solidFill>
-                <a:latin typeface="Calibri" pitchFamily="34" charset="0"/>
-                <a:ea typeface="Calibri" pitchFamily="34" charset="-122"/>
-                <a:cs typeface="Calibri" pitchFamily="34" charset="-120"/>
-              </a:rPr>
-              <a:t>Нижний уровень пирамиды. Изолированное тестирование чистых функций, валидаторов схем Zod, утилит форматирования данных. Пишутся на Jest. Скорость выполнения — максимальная.</a:t>
-            </a:r>
-            <a:endParaRPr lang="en-US" sz="1050" dirty="0"/>
-          </a:p>
-        </p:txBody>
-      </p:sp>
-      <p:sp>
-        <p:nvSpPr>
-          <p:cNvPr id="6" name="Shape 4"/>
-          <p:cNvSpPr/>
-          <p:nvPr/>
-        </p:nvSpPr>
-        <p:spPr>
-          <a:xfrm>
-            <a:off x="3206496" y="822960"/>
-            <a:ext cx="2731008" cy="4119372"/>
-          </a:xfrm>
-          <a:prstGeom prst="roundRect">
-            <a:avLst>
-              <a:gd name="adj" fmla="val 3348"/>
-            </a:avLst>
-          </a:prstGeom>
-          <a:solidFill>
-            <a:srgbClr val="D1FAE5"/>
-          </a:solidFill>
-          <a:ln w="12700">
-            <a:solidFill>
-              <a:srgbClr val="D1FAE5"/>
-            </a:solidFill>
-            <a:prstDash val="solid"/>
-          </a:ln>
-          <a:effectLst>
-            <a:outerShdw sx="100000" sy="100000" kx="0" ky="0" algn="bl" rotWithShape="0" blurRad="88900" dist="25400" dir="2700000">
-              <a:srgbClr val="000000">
-                <a:alpha val="9000"/>
-              </a:srgbClr>
-            </a:outerShdw>
-          </a:effectLst>
-        </p:spPr>
-      </p:sp>
-      <p:sp>
-        <p:nvSpPr>
-          <p:cNvPr id="7" name="Text 5"/>
-          <p:cNvSpPr/>
-          <p:nvPr/>
-        </p:nvSpPr>
-        <p:spPr>
-          <a:xfrm>
-            <a:off x="3343656" y="932688"/>
-            <a:ext cx="2456688" cy="320040"/>
-          </a:xfrm>
-          <a:prstGeom prst="rect">
-            <a:avLst/>
-          </a:prstGeom>
-          <a:noFill/>
-          <a:ln/>
-        </p:spPr>
-        <p:txBody>
-          <a:bodyPr wrap="square" rtlCol="0" anchor="ctr"/>
-          <a:lstStyle/>
-          <a:p>
-            <a:pPr indent="0" marL="0">
-              <a:buNone/>
-            </a:pPr>
-            <a:r>
-              <a:rPr lang="en-US" sz="1200" b="1" dirty="0">
-                <a:solidFill>
-                  <a:srgbClr val="0F1E36"/>
-                </a:solidFill>
-                <a:latin typeface="Cambria" pitchFamily="34" charset="0"/>
-                <a:ea typeface="Cambria" pitchFamily="34" charset="-122"/>
-                <a:cs typeface="Cambria" pitchFamily="34" charset="-120"/>
-              </a:rPr>
-              <a:t>2. Integration Tests</a:t>
-            </a:r>
-            <a:endParaRPr lang="en-US" sz="1200" dirty="0"/>
-          </a:p>
-        </p:txBody>
-      </p:sp>
-      <p:sp>
-        <p:nvSpPr>
-          <p:cNvPr id="8" name="Text 6"/>
-          <p:cNvSpPr/>
-          <p:nvPr/>
-        </p:nvSpPr>
-        <p:spPr>
-          <a:xfrm>
-            <a:off x="3343656" y="1325880"/>
-            <a:ext cx="2456688" cy="3479292"/>
-          </a:xfrm>
-          <a:prstGeom prst="rect">
-            <a:avLst/>
-          </a:prstGeom>
-          <a:noFill/>
-          <a:ln/>
-        </p:spPr>
-        <p:txBody>
-          <a:bodyPr wrap="square" rtlCol="0" anchor="ctr"/>
-          <a:lstStyle/>
-          <a:p>
-            <a:pPr indent="0" marL="0">
-              <a:buNone/>
-            </a:pPr>
-            <a:r>
-              <a:rPr lang="en-US" sz="1050" dirty="0">
-                <a:solidFill>
-                  <a:srgbClr val="1E293B"/>
-                </a:solidFill>
-                <a:latin typeface="Calibri" pitchFamily="34" charset="0"/>
-                <a:ea typeface="Calibri" pitchFamily="34" charset="-122"/>
-                <a:cs typeface="Calibri" pitchFamily="34" charset="-120"/>
-              </a:rPr>
-              <a:t>Средний уровень. Тестирование взаимодействия Express-контроллеров, репозиториев Drizzle и базы PostgreSQL. Проверяется правильность транзакций, каскадного удаления и триггеров.</a:t>
-            </a:r>
-            <a:endParaRPr lang="en-US" sz="1050" dirty="0"/>
-          </a:p>
-        </p:txBody>
-      </p:sp>
-      <p:sp>
-        <p:nvSpPr>
-          <p:cNvPr id="9" name="Shape 7"/>
-          <p:cNvSpPr/>
-          <p:nvPr/>
-        </p:nvSpPr>
-        <p:spPr>
-          <a:xfrm>
-            <a:off x="6028944" y="822960"/>
-            <a:ext cx="2731008" cy="4119372"/>
-          </a:xfrm>
-          <a:prstGeom prst="roundRect">
-            <a:avLst>
-              <a:gd name="adj" fmla="val 3348"/>
-            </a:avLst>
-          </a:prstGeom>
-          <a:solidFill>
-            <a:srgbClr val="FFF7ED"/>
-          </a:solidFill>
-          <a:ln w="12700">
-            <a:solidFill>
-              <a:srgbClr val="FFF7ED"/>
-            </a:solidFill>
-            <a:prstDash val="solid"/>
-          </a:ln>
-          <a:effectLst>
-            <a:outerShdw sx="100000" sy="100000" kx="0" ky="0" algn="bl" rotWithShape="0" blurRad="88900" dist="25400" dir="2700000">
-              <a:srgbClr val="000000">
-                <a:alpha val="9000"/>
-              </a:srgbClr>
-            </a:outerShdw>
-          </a:effectLst>
-        </p:spPr>
-      </p:sp>
-      <p:sp>
-        <p:nvSpPr>
-          <p:cNvPr id="10" name="Text 8"/>
-          <p:cNvSpPr/>
-          <p:nvPr/>
-        </p:nvSpPr>
-        <p:spPr>
-          <a:xfrm>
-            <a:off x="6166104" y="932688"/>
-            <a:ext cx="2456688" cy="320040"/>
-          </a:xfrm>
-          <a:prstGeom prst="rect">
-            <a:avLst/>
-          </a:prstGeom>
-          <a:noFill/>
-          <a:ln/>
-        </p:spPr>
-        <p:txBody>
-          <a:bodyPr wrap="square" rtlCol="0" anchor="ctr"/>
-          <a:lstStyle/>
-          <a:p>
-            <a:pPr indent="0" marL="0">
-              <a:buNone/>
-            </a:pPr>
-            <a:r>
-              <a:rPr lang="en-US" sz="1200" b="1" dirty="0">
-                <a:solidFill>
-                  <a:srgbClr val="0F1E36"/>
-                </a:solidFill>
-                <a:latin typeface="Cambria" pitchFamily="34" charset="0"/>
-                <a:ea typeface="Cambria" pitchFamily="34" charset="-122"/>
-                <a:cs typeface="Cambria" pitchFamily="34" charset="-120"/>
-              </a:rPr>
-              <a:t>3. E2E / Acceptance Tests</a:t>
-            </a:r>
-            <a:endParaRPr lang="en-US" sz="1200" dirty="0"/>
-          </a:p>
-        </p:txBody>
-      </p:sp>
-      <p:sp>
-        <p:nvSpPr>
-          <p:cNvPr id="11" name="Text 9"/>
-          <p:cNvSpPr/>
-          <p:nvPr/>
-        </p:nvSpPr>
-        <p:spPr>
-          <a:xfrm>
-            <a:off x="6166104" y="1325880"/>
-            <a:ext cx="2456688" cy="3479292"/>
-          </a:xfrm>
-          <a:prstGeom prst="rect">
-            <a:avLst/>
-          </a:prstGeom>
-          <a:noFill/>
-          <a:ln/>
-        </p:spPr>
-        <p:txBody>
-          <a:bodyPr wrap="square" rtlCol="0" anchor="ctr"/>
-          <a:lstStyle/>
-          <a:p>
-            <a:pPr indent="0" marL="0">
-              <a:buNone/>
-            </a:pPr>
-            <a:r>
-              <a:rPr lang="en-US" sz="1050" dirty="0">
-                <a:solidFill>
-                  <a:srgbClr val="1E293B"/>
-                </a:solidFill>
-                <a:latin typeface="Calibri" pitchFamily="34" charset="0"/>
-                <a:ea typeface="Calibri" pitchFamily="34" charset="-122"/>
-                <a:cs typeface="Calibri" pitchFamily="34" charset="-120"/>
-              </a:rPr>
-              <a:t>Верхний уровень. Полная эмуляция реальных действий пользователя в браузере с помощью Playwright. Проверяются сквозные бизнес-цепочки от логина до закрытия заявки.</a:t>
-            </a:r>
-            <a:endParaRPr lang="en-US" sz="1050" dirty="0"/>
+          <a:bodyPr wrap="square" rtlCol="0" anchor="t"/>
+          <a:lstStyle/>
+          <a:p>
+            <a:pPr algn="l" indent="0" marL="0">
+              <a:buNone/>
+            </a:pPr>
+            <a:r>
+              <a:rPr lang="en-US" sz="1600" dirty="0">
+                <a:solidFill>
+                  <a:srgbClr val="2D2D3A"/>
+                </a:solidFill>
+                <a:latin typeface="Times New Roman" pitchFamily="34" charset="0"/>
+                <a:ea typeface="Times New Roman" pitchFamily="34" charset="-122"/>
+                <a:cs typeface="Times New Roman" pitchFamily="34" charset="-120"/>
+              </a:rPr>
+              <a:t>Verification (Верификация): 'Создаем ли мы продукт правильно?' Сверка со спецификацией, стандартами и ТЗ.</a:t>
+            </a:r>
+            <a:endParaRPr lang="en-US" sz="1600" dirty="0"/>
+          </a:p>
+          <a:p>
+            <a:pPr algn="l" indent="0" marL="0">
+              <a:buNone/>
+            </a:pPr>
+            <a:r>
+              <a:rPr lang="en-US" sz="1600" dirty="0">
+                <a:solidFill>
+                  <a:srgbClr val="2D2D3A"/>
+                </a:solidFill>
+                <a:latin typeface="Times New Roman" pitchFamily="34" charset="0"/>
+                <a:ea typeface="Times New Roman" pitchFamily="34" charset="-122"/>
+                <a:cs typeface="Times New Roman" pitchFamily="34" charset="-120"/>
+              </a:rPr>
+              <a:t>Validation (Валидация): 'Создаем ли мы ПРАВИЛЬНЫЙ продукт?' Соответствует ли система потребностям реального пользователя.</a:t>
+            </a:r>
+            <a:endParaRPr lang="en-US" sz="1600" dirty="0"/>
+          </a:p>
+          <a:p>
+            <a:pPr algn="l" indent="0" marL="0">
+              <a:buNone/>
+            </a:pPr>
+            <a:endParaRPr lang="en-US" sz="1600" dirty="0"/>
+          </a:p>
+          <a:p>
+            <a:pPr algn="l" indent="0" marL="0">
+              <a:buNone/>
+            </a:pPr>
+            <a:r>
+              <a:rPr lang="en-US" sz="1600" dirty="0">
+                <a:solidFill>
+                  <a:srgbClr val="2D2D3A"/>
+                </a:solidFill>
+                <a:latin typeface="Times New Roman" pitchFamily="34" charset="0"/>
+                <a:ea typeface="Times New Roman" pitchFamily="34" charset="-122"/>
+                <a:cs typeface="Times New Roman" pitchFamily="34" charset="-120"/>
+              </a:rPr>
+              <a:t>Преимущества автоматизации:</a:t>
+            </a:r>
+            <a:endParaRPr lang="en-US" sz="1600" dirty="0"/>
+          </a:p>
+          <a:p>
+            <a:pPr algn="l" indent="0" marL="0">
+              <a:buNone/>
+            </a:pPr>
+            <a:r>
+              <a:rPr lang="en-US" sz="1600" dirty="0">
+                <a:solidFill>
+                  <a:srgbClr val="2D2D3A"/>
+                </a:solidFill>
+                <a:latin typeface="Times New Roman" pitchFamily="34" charset="0"/>
+                <a:ea typeface="Times New Roman" pitchFamily="34" charset="-122"/>
+                <a:cs typeface="Times New Roman" pitchFamily="34" charset="-120"/>
+              </a:rPr>
+              <a:t>• Быстрый регресс: тесты запускаются за секунды на каждый коммит.</a:t>
+            </a:r>
+            <a:endParaRPr lang="en-US" sz="1600" dirty="0"/>
+          </a:p>
+          <a:p>
+            <a:pPr algn="l" indent="0" marL="0">
+              <a:buNone/>
+            </a:pPr>
+            <a:r>
+              <a:rPr lang="en-US" sz="1600" dirty="0">
+                <a:solidFill>
+                  <a:srgbClr val="2D2D3A"/>
+                </a:solidFill>
+                <a:latin typeface="Times New Roman" pitchFamily="34" charset="0"/>
+                <a:ea typeface="Times New Roman" pitchFamily="34" charset="-122"/>
+                <a:cs typeface="Times New Roman" pitchFamily="34" charset="-120"/>
+              </a:rPr>
+              <a:t>• Стабильность: предотвращение старых багов при добавлении фич.</a:t>
+            </a:r>
+            <a:endParaRPr lang="en-US" sz="1600" dirty="0"/>
+          </a:p>
+          <a:p>
+            <a:pPr algn="l" indent="0" marL="0">
+              <a:buNone/>
+            </a:pPr>
+            <a:r>
+              <a:rPr lang="en-US" sz="1600" dirty="0">
+                <a:solidFill>
+                  <a:srgbClr val="2D2D3A"/>
+                </a:solidFill>
+                <a:latin typeface="Times New Roman" pitchFamily="34" charset="0"/>
+                <a:ea typeface="Times New Roman" pitchFamily="34" charset="-122"/>
+                <a:cs typeface="Times New Roman" pitchFamily="34" charset="-120"/>
+              </a:rPr>
+              <a:t>• Живая документация: тесты описывают реальное поведение API.</a:t>
+            </a:r>
+            <a:endParaRPr lang="en-US" sz="1600" dirty="0"/>
           </a:p>
         </p:txBody>
       </p:sp>
@@ -4826,17 +4688,17 @@
               <a:buNone/>
             </a:pPr>
             <a:r>
-              <a:rPr lang="en-US" sz="2000" b="1" dirty="0">
-                <a:solidFill>
-                  <a:srgbClr val="0F1E36"/>
-                </a:solidFill>
-                <a:latin typeface="Cambria" pitchFamily="34" charset="0"/>
-                <a:ea typeface="Cambria" pitchFamily="34" charset="-122"/>
-                <a:cs typeface="Cambria" pitchFamily="34" charset="-120"/>
-              </a:rPr>
-              <a:t>Unit Testing: Модульные тесты с Jest</a:t>
-            </a:r>
-            <a:endParaRPr lang="en-US" sz="2000" dirty="0"/>
+              <a:rPr lang="en-US" sz="1600" b="1" dirty="0">
+                <a:solidFill>
+                  <a:srgbClr val="1A1A2E"/>
+                </a:solidFill>
+                <a:latin typeface="Georgia" pitchFamily="34" charset="0"/>
+                <a:ea typeface="Georgia" pitchFamily="34" charset="-122"/>
+                <a:cs typeface="Georgia" pitchFamily="34" charset="-120"/>
+              </a:rPr>
+              <a:t>Пирамида тестирования в client-portal</a:t>
+            </a:r>
+            <a:endParaRPr lang="en-US" sz="1600" dirty="0"/>
           </a:p>
         </p:txBody>
       </p:sp>
@@ -4849,26 +4711,26 @@
         <p:spPr>
           <a:xfrm>
             <a:off x="384048" y="822960"/>
-            <a:ext cx="3474720" cy="4119372"/>
+            <a:ext cx="2731008" cy="4119372"/>
           </a:xfrm>
           <a:prstGeom prst="roundRect">
             <a:avLst>
-              <a:gd name="adj" fmla="val 2632"/>
+              <a:gd name="adj" fmla="val 3348"/>
             </a:avLst>
           </a:prstGeom>
           <a:solidFill>
-            <a:srgbClr val="FFF7ED"/>
+            <a:srgbClr val="F8F4F0"/>
           </a:solidFill>
           <a:ln w="12700">
             <a:solidFill>
-              <a:srgbClr val="FFF7ED"/>
+              <a:srgbClr val="EFEAE3"/>
             </a:solidFill>
             <a:prstDash val="solid"/>
           </a:ln>
           <a:effectLst>
-            <a:outerShdw sx="100000" sy="100000" kx="0" ky="0" algn="bl" rotWithShape="0" blurRad="88900" dist="25400" dir="2700000">
+            <a:outerShdw sx="100000" sy="100000" kx="0" ky="0" algn="bl" rotWithShape="0" blurRad="152400" dist="38100" dir="2700000">
               <a:srgbClr val="000000">
-                <a:alpha val="9000"/>
+                <a:alpha val="12000"/>
               </a:srgbClr>
             </a:outerShdw>
           </a:effectLst>
@@ -4883,7 +4745,7 @@
         <p:spPr>
           <a:xfrm>
             <a:off x="521208" y="932688"/>
-            <a:ext cx="3200400" cy="320040"/>
+            <a:ext cx="2456688" cy="320040"/>
           </a:xfrm>
           <a:prstGeom prst="rect">
             <a:avLst/>
@@ -4899,17 +4761,17 @@
               <a:buNone/>
             </a:pPr>
             <a:r>
-              <a:rPr lang="en-US" sz="1300" b="1" dirty="0">
-                <a:solidFill>
-                  <a:srgbClr val="0F1E36"/>
+              <a:rPr lang="en-US" sz="1200" b="1" dirty="0">
+                <a:solidFill>
+                  <a:srgbClr val="1A1A2E"/>
                 </a:solidFill>
                 <a:latin typeface="Cambria" pitchFamily="34" charset="0"/>
                 <a:ea typeface="Cambria" pitchFamily="34" charset="-122"/>
                 <a:cs typeface="Cambria" pitchFamily="34" charset="-120"/>
               </a:rPr>
-              <a:t>Сущность юнит-тестов</a:t>
-            </a:r>
-            <a:endParaRPr lang="en-US" sz="1300" dirty="0"/>
+              <a:t>1. Unit Tests (Юнит-тесты)</a:t>
+            </a:r>
+            <a:endParaRPr lang="en-US" sz="1200" dirty="0"/>
           </a:p>
         </p:txBody>
       </p:sp>
@@ -4922,7 +4784,7 @@
         <p:spPr>
           <a:xfrm>
             <a:off x="521208" y="1325880"/>
-            <a:ext cx="3200400" cy="3387852"/>
+            <a:ext cx="2456688" cy="3479292"/>
           </a:xfrm>
           <a:prstGeom prst="rect">
             <a:avLst/>
@@ -4931,75 +4793,24 @@
           <a:ln/>
         </p:spPr>
         <p:txBody>
-          <a:bodyPr wrap="square" rtlCol="0" anchor="ctr"/>
-          <a:lstStyle/>
-          <a:p>
-            <a:pPr indent="0" marL="0">
-              <a:buNone/>
-            </a:pPr>
-            <a:r>
-              <a:rPr lang="en-US" sz="1100" dirty="0">
-                <a:solidFill>
-                  <a:srgbClr val="1E293B"/>
-                </a:solidFill>
-                <a:latin typeface="Calibri" pitchFamily="34" charset="0"/>
-                <a:ea typeface="Calibri" pitchFamily="34" charset="-122"/>
-                <a:cs typeface="Calibri" pitchFamily="34" charset="-120"/>
-              </a:rPr>
-              <a:t>• Тестируют код без сетевых вызовов и обращений к дискам.</a:t>
-            </a:r>
-            <a:endParaRPr lang="en-US" sz="1100" dirty="0"/>
-          </a:p>
-          <a:p>
-            <a:pPr indent="0" marL="0">
-              <a:buNone/>
-            </a:pPr>
-            <a:r>
-              <a:rPr lang="en-US" sz="1100" dirty="0">
-                <a:solidFill>
-                  <a:srgbClr val="1E293B"/>
-                </a:solidFill>
-                <a:latin typeface="Calibri" pitchFamily="34" charset="0"/>
-                <a:ea typeface="Calibri" pitchFamily="34" charset="-122"/>
-                <a:cs typeface="Calibri" pitchFamily="34" charset="-120"/>
-              </a:rPr>
-              <a:t>• Проверяют граничные условия валидации Zod-схем.</a:t>
-            </a:r>
-            <a:endParaRPr lang="en-US" sz="1100" dirty="0"/>
-          </a:p>
-          <a:p>
-            <a:pPr indent="0" marL="0">
-              <a:buNone/>
-            </a:pPr>
-            <a:r>
-              <a:rPr lang="en-US" sz="1100" dirty="0">
-                <a:solidFill>
-                  <a:srgbClr val="1E293B"/>
-                </a:solidFill>
-                <a:latin typeface="Calibri" pitchFamily="34" charset="0"/>
-                <a:ea typeface="Calibri" pitchFamily="34" charset="-122"/>
-                <a:cs typeface="Calibri" pitchFamily="34" charset="-120"/>
-              </a:rPr>
-              <a:t>• Позволяют моментально проверить регулярные выражения для валидации номеров телефонов.</a:t>
-            </a:r>
-            <a:endParaRPr lang="en-US" sz="1100" dirty="0"/>
-          </a:p>
-          <a:p>
-            <a:pPr indent="0" marL="0">
-              <a:buNone/>
-            </a:pPr>
-            <a:r>
-              <a:rPr lang="en-US" sz="1100" dirty="0">
-                <a:solidFill>
-                  <a:srgbClr val="1E293B"/>
-                </a:solidFill>
-                <a:latin typeface="Calibri" pitchFamily="34" charset="0"/>
-                <a:ea typeface="Calibri" pitchFamily="34" charset="-122"/>
-                <a:cs typeface="Calibri" pitchFamily="34" charset="-120"/>
-              </a:rPr>
-              <a:t>• Базируются на фреймворке Jest и TS-Jest.</a:t>
-            </a:r>
-            <a:endParaRPr lang="en-US" sz="1100" dirty="0"/>
+          <a:bodyPr wrap="square" rtlCol="0" anchor="t"/>
+          <a:lstStyle/>
+          <a:p>
+            <a:pPr algn="l" indent="0" marL="0">
+              <a:buNone/>
+            </a:pPr>
+            <a:r>
+              <a:rPr lang="en-US" sz="1200" dirty="0">
+                <a:solidFill>
+                  <a:srgbClr val="2D2D3A"/>
+                </a:solidFill>
+                <a:latin typeface="Times New Roman" pitchFamily="34" charset="0"/>
+                <a:ea typeface="Times New Roman" pitchFamily="34" charset="-122"/>
+                <a:cs typeface="Times New Roman" pitchFamily="34" charset="-120"/>
+              </a:rPr>
+              <a:t>Нижний уровень пирамиды. Изолированное тестирование чистых функций, валидаторов схем Zod, утилит форматирования данных. Пишутся на Jest. Скорость выполнения — максимальная.</a:t>
+            </a:r>
+            <a:endParaRPr lang="en-US" sz="1200" dirty="0"/>
           </a:p>
         </p:txBody>
       </p:sp>
@@ -5011,23 +4822,30 @@
         </p:nvSpPr>
         <p:spPr>
           <a:xfrm>
-            <a:off x="4133088" y="822960"/>
-            <a:ext cx="4626864" cy="4119372"/>
+            <a:off x="3206496" y="822960"/>
+            <a:ext cx="2731008" cy="4119372"/>
           </a:xfrm>
           <a:prstGeom prst="roundRect">
             <a:avLst>
-              <a:gd name="adj" fmla="val 1776"/>
+              <a:gd name="adj" fmla="val 3348"/>
             </a:avLst>
           </a:prstGeom>
           <a:solidFill>
-            <a:srgbClr val="0B132B"/>
+            <a:srgbClr val="D4EDDA"/>
           </a:solidFill>
           <a:ln w="12700">
             <a:solidFill>
-              <a:srgbClr val="1E4070"/>
+              <a:srgbClr val="EFEAE3"/>
             </a:solidFill>
             <a:prstDash val="solid"/>
           </a:ln>
+          <a:effectLst>
+            <a:outerShdw sx="100000" sy="100000" kx="0" ky="0" algn="bl" rotWithShape="0" blurRad="152400" dist="38100" dir="2700000">
+              <a:srgbClr val="000000">
+                <a:alpha val="12000"/>
+              </a:srgbClr>
+            </a:outerShdw>
+          </a:effectLst>
         </p:spPr>
       </p:sp>
       <p:sp>
@@ -5038,8 +4856,8 @@
         </p:nvSpPr>
         <p:spPr>
           <a:xfrm>
-            <a:off x="4270248" y="905256"/>
-            <a:ext cx="4352544" cy="3954780"/>
+            <a:off x="3343656" y="932688"/>
+            <a:ext cx="2456688" cy="320040"/>
           </a:xfrm>
           <a:prstGeom prst="rect">
             <a:avLst/>
@@ -5048,6 +4866,45 @@
           <a:ln/>
         </p:spPr>
         <p:txBody>
+          <a:bodyPr wrap="square" rtlCol="0" anchor="ctr"/>
+          <a:lstStyle/>
+          <a:p>
+            <a:pPr indent="0" marL="0">
+              <a:buNone/>
+            </a:pPr>
+            <a:r>
+              <a:rPr lang="en-US" sz="1200" b="1" dirty="0">
+                <a:solidFill>
+                  <a:srgbClr val="1A1A2E"/>
+                </a:solidFill>
+                <a:latin typeface="Cambria" pitchFamily="34" charset="0"/>
+                <a:ea typeface="Cambria" pitchFamily="34" charset="-122"/>
+                <a:cs typeface="Cambria" pitchFamily="34" charset="-120"/>
+              </a:rPr>
+              <a:t>2. Integration Tests</a:t>
+            </a:r>
+            <a:endParaRPr lang="en-US" sz="1200" dirty="0"/>
+          </a:p>
+        </p:txBody>
+      </p:sp>
+      <p:sp>
+        <p:nvSpPr>
+          <p:cNvPr id="8" name="Text 6"/>
+          <p:cNvSpPr/>
+          <p:nvPr/>
+        </p:nvSpPr>
+        <p:spPr>
+          <a:xfrm>
+            <a:off x="3343656" y="1325880"/>
+            <a:ext cx="2456688" cy="3479292"/>
+          </a:xfrm>
+          <a:prstGeom prst="rect">
+            <a:avLst/>
+          </a:prstGeom>
+          <a:noFill/>
+          <a:ln/>
+        </p:spPr>
+        <p:txBody>
           <a:bodyPr wrap="square" rtlCol="0" anchor="t"/>
           <a:lstStyle/>
           <a:p>
@@ -5055,199 +4912,129 @@
               <a:buNone/>
             </a:pPr>
             <a:r>
-              <a:rPr lang="en-US" sz="1050" dirty="0">
-                <a:solidFill>
-                  <a:srgbClr val="FFEDD5"/>
-                </a:solidFill>
-                <a:latin typeface="Courier New" pitchFamily="34" charset="0"/>
-                <a:ea typeface="Courier New" pitchFamily="34" charset="-122"/>
-                <a:cs typeface="Courier New" pitchFamily="34" charset="-120"/>
-              </a:rPr>
-              <a:t>import { CreateTicketSchema } from './validation';</a:t>
-            </a:r>
-            <a:endParaRPr lang="en-US" sz="1050" dirty="0"/>
-          </a:p>
-          <a:p>
-            <a:pPr algn="l" indent="0" marL="0">
-              <a:buNone/>
-            </a:pPr>
-            <a:endParaRPr lang="en-US" sz="1050" dirty="0"/>
-          </a:p>
-          <a:p>
-            <a:pPr algn="l" indent="0" marL="0">
-              <a:buNone/>
-            </a:pPr>
-            <a:r>
-              <a:rPr lang="en-US" sz="1050" dirty="0">
-                <a:solidFill>
-                  <a:srgbClr val="FFEDD5"/>
-                </a:solidFill>
-                <a:latin typeface="Courier New" pitchFamily="34" charset="0"/>
-                <a:ea typeface="Courier New" pitchFamily="34" charset="-122"/>
-                <a:cs typeface="Courier New" pitchFamily="34" charset="-120"/>
-              </a:rPr>
-              <a:t>describe('CreateTicketSchema Unit Tests', () =&gt; {</a:t>
-            </a:r>
-            <a:endParaRPr lang="en-US" sz="1050" dirty="0"/>
-          </a:p>
-          <a:p>
-            <a:pPr algn="l" indent="0" marL="0">
-              <a:buNone/>
-            </a:pPr>
-            <a:r>
-              <a:rPr lang="en-US" sz="1050" dirty="0">
-                <a:solidFill>
-                  <a:srgbClr val="FFEDD5"/>
-                </a:solidFill>
-                <a:latin typeface="Courier New" pitchFamily="34" charset="0"/>
-                <a:ea typeface="Courier New" pitchFamily="34" charset="-122"/>
-                <a:cs typeface="Courier New" pitchFamily="34" charset="-120"/>
-              </a:rPr>
-              <a:t>  it('should accept valid ticket details', () =&gt; {</a:t>
-            </a:r>
-            <a:endParaRPr lang="en-US" sz="1050" dirty="0"/>
-          </a:p>
-          <a:p>
-            <a:pPr algn="l" indent="0" marL="0">
-              <a:buNone/>
-            </a:pPr>
-            <a:r>
-              <a:rPr lang="en-US" sz="1050" dirty="0">
-                <a:solidFill>
-                  <a:srgbClr val="FFEDD5"/>
-                </a:solidFill>
-                <a:latin typeface="Courier New" pitchFamily="34" charset="0"/>
-                <a:ea typeface="Courier New" pitchFamily="34" charset="-122"/>
-                <a:cs typeface="Courier New" pitchFamily="34" charset="-120"/>
-              </a:rPr>
-              <a:t>    const data = { title: '1C ERP crash', description: 'DB error 109' };</a:t>
-            </a:r>
-            <a:endParaRPr lang="en-US" sz="1050" dirty="0"/>
-          </a:p>
-          <a:p>
-            <a:pPr algn="l" indent="0" marL="0">
-              <a:buNone/>
-            </a:pPr>
-            <a:r>
-              <a:rPr lang="en-US" sz="1050" dirty="0">
-                <a:solidFill>
-                  <a:srgbClr val="FFEDD5"/>
-                </a:solidFill>
-                <a:latin typeface="Courier New" pitchFamily="34" charset="0"/>
-                <a:ea typeface="Courier New" pitchFamily="34" charset="-122"/>
-                <a:cs typeface="Courier New" pitchFamily="34" charset="-120"/>
-              </a:rPr>
-              <a:t>    expect(CreateTicketSchema.safeParse(data).success).toBe(true);</a:t>
-            </a:r>
-            <a:endParaRPr lang="en-US" sz="1050" dirty="0"/>
-          </a:p>
-          <a:p>
-            <a:pPr algn="l" indent="0" marL="0">
-              <a:buNone/>
-            </a:pPr>
-            <a:r>
-              <a:rPr lang="en-US" sz="1050" dirty="0">
-                <a:solidFill>
-                  <a:srgbClr val="FFEDD5"/>
-                </a:solidFill>
-                <a:latin typeface="Courier New" pitchFamily="34" charset="0"/>
-                <a:ea typeface="Courier New" pitchFamily="34" charset="-122"/>
-                <a:cs typeface="Courier New" pitchFamily="34" charset="-120"/>
-              </a:rPr>
-              <a:t>  });</a:t>
-            </a:r>
-            <a:endParaRPr lang="en-US" sz="1050" dirty="0"/>
-          </a:p>
-          <a:p>
-            <a:pPr algn="l" indent="0" marL="0">
-              <a:buNone/>
-            </a:pPr>
-            <a:endParaRPr lang="en-US" sz="1050" dirty="0"/>
-          </a:p>
-          <a:p>
-            <a:pPr algn="l" indent="0" marL="0">
-              <a:buNone/>
-            </a:pPr>
-            <a:r>
-              <a:rPr lang="en-US" sz="1050" dirty="0">
-                <a:solidFill>
-                  <a:srgbClr val="FFEDD5"/>
-                </a:solidFill>
-                <a:latin typeface="Courier New" pitchFamily="34" charset="0"/>
-                <a:ea typeface="Courier New" pitchFamily="34" charset="-122"/>
-                <a:cs typeface="Courier New" pitchFamily="34" charset="-120"/>
-              </a:rPr>
-              <a:t>  it('should reject short descriptions', () =&gt; {</a:t>
-            </a:r>
-            <a:endParaRPr lang="en-US" sz="1050" dirty="0"/>
-          </a:p>
-          <a:p>
-            <a:pPr algn="l" indent="0" marL="0">
-              <a:buNone/>
-            </a:pPr>
-            <a:r>
-              <a:rPr lang="en-US" sz="1050" dirty="0">
-                <a:solidFill>
-                  <a:srgbClr val="FFEDD5"/>
-                </a:solidFill>
-                <a:latin typeface="Courier New" pitchFamily="34" charset="0"/>
-                <a:ea typeface="Courier New" pitchFamily="34" charset="-122"/>
-                <a:cs typeface="Courier New" pitchFamily="34" charset="-120"/>
-              </a:rPr>
-              <a:t>    const data = { title: '1C ERP crash', description: 'short' };</a:t>
-            </a:r>
-            <a:endParaRPr lang="en-US" sz="1050" dirty="0"/>
-          </a:p>
-          <a:p>
-            <a:pPr algn="l" indent="0" marL="0">
-              <a:buNone/>
-            </a:pPr>
-            <a:r>
-              <a:rPr lang="en-US" sz="1050" dirty="0">
-                <a:solidFill>
-                  <a:srgbClr val="FFEDD5"/>
-                </a:solidFill>
-                <a:latin typeface="Courier New" pitchFamily="34" charset="0"/>
-                <a:ea typeface="Courier New" pitchFamily="34" charset="-122"/>
-                <a:cs typeface="Courier New" pitchFamily="34" charset="-120"/>
-              </a:rPr>
-              <a:t>    expect(CreateTicketSchema.safeParse(data).success).toBe(false);</a:t>
-            </a:r>
-            <a:endParaRPr lang="en-US" sz="1050" dirty="0"/>
-          </a:p>
-          <a:p>
-            <a:pPr algn="l" indent="0" marL="0">
-              <a:buNone/>
-            </a:pPr>
-            <a:r>
-              <a:rPr lang="en-US" sz="1050" dirty="0">
-                <a:solidFill>
-                  <a:srgbClr val="FFEDD5"/>
-                </a:solidFill>
-                <a:latin typeface="Courier New" pitchFamily="34" charset="0"/>
-                <a:ea typeface="Courier New" pitchFamily="34" charset="-122"/>
-                <a:cs typeface="Courier New" pitchFamily="34" charset="-120"/>
-              </a:rPr>
-              <a:t>  });</a:t>
-            </a:r>
-            <a:endParaRPr lang="en-US" sz="1050" dirty="0"/>
-          </a:p>
-          <a:p>
-            <a:pPr algn="l" indent="0" marL="0">
-              <a:buNone/>
-            </a:pPr>
-            <a:r>
-              <a:rPr lang="en-US" sz="1050" dirty="0">
-                <a:solidFill>
-                  <a:srgbClr val="FFEDD5"/>
-                </a:solidFill>
-                <a:latin typeface="Courier New" pitchFamily="34" charset="0"/>
-                <a:ea typeface="Courier New" pitchFamily="34" charset="-122"/>
-                <a:cs typeface="Courier New" pitchFamily="34" charset="-120"/>
-              </a:rPr>
-              <a:t>});</a:t>
-            </a:r>
-            <a:endParaRPr lang="en-US" sz="1050" dirty="0"/>
+              <a:rPr lang="en-US" sz="1200" dirty="0">
+                <a:solidFill>
+                  <a:srgbClr val="2D2D3A"/>
+                </a:solidFill>
+                <a:latin typeface="Times New Roman" pitchFamily="34" charset="0"/>
+                <a:ea typeface="Times New Roman" pitchFamily="34" charset="-122"/>
+                <a:cs typeface="Times New Roman" pitchFamily="34" charset="-120"/>
+              </a:rPr>
+              <a:t>Средний уровень. Тестирование взаимодействия Express-контроллеров, репозиториев Drizzle и базы PostgreSQL. Проверяется правильность транзакций, каскадного удаления и триггеров.</a:t>
+            </a:r>
+            <a:endParaRPr lang="en-US" sz="1200" dirty="0"/>
+          </a:p>
+        </p:txBody>
+      </p:sp>
+      <p:sp>
+        <p:nvSpPr>
+          <p:cNvPr id="9" name="Shape 7"/>
+          <p:cNvSpPr/>
+          <p:nvPr/>
+        </p:nvSpPr>
+        <p:spPr>
+          <a:xfrm>
+            <a:off x="6028944" y="822960"/>
+            <a:ext cx="2731008" cy="4119372"/>
+          </a:xfrm>
+          <a:prstGeom prst="roundRect">
+            <a:avLst>
+              <a:gd name="adj" fmla="val 3348"/>
+            </a:avLst>
+          </a:prstGeom>
+          <a:solidFill>
+            <a:srgbClr val="F8F4F0"/>
+          </a:solidFill>
+          <a:ln w="12700">
+            <a:solidFill>
+              <a:srgbClr val="EFEAE3"/>
+            </a:solidFill>
+            <a:prstDash val="solid"/>
+          </a:ln>
+          <a:effectLst>
+            <a:outerShdw sx="100000" sy="100000" kx="0" ky="0" algn="bl" rotWithShape="0" blurRad="152400" dist="38100" dir="2700000">
+              <a:srgbClr val="000000">
+                <a:alpha val="12000"/>
+              </a:srgbClr>
+            </a:outerShdw>
+          </a:effectLst>
+        </p:spPr>
+      </p:sp>
+      <p:sp>
+        <p:nvSpPr>
+          <p:cNvPr id="10" name="Text 8"/>
+          <p:cNvSpPr/>
+          <p:nvPr/>
+        </p:nvSpPr>
+        <p:spPr>
+          <a:xfrm>
+            <a:off x="6166104" y="932688"/>
+            <a:ext cx="2456688" cy="320040"/>
+          </a:xfrm>
+          <a:prstGeom prst="rect">
+            <a:avLst/>
+          </a:prstGeom>
+          <a:noFill/>
+          <a:ln/>
+        </p:spPr>
+        <p:txBody>
+          <a:bodyPr wrap="square" rtlCol="0" anchor="ctr"/>
+          <a:lstStyle/>
+          <a:p>
+            <a:pPr indent="0" marL="0">
+              <a:buNone/>
+            </a:pPr>
+            <a:r>
+              <a:rPr lang="en-US" sz="1200" b="1" dirty="0">
+                <a:solidFill>
+                  <a:srgbClr val="1A1A2E"/>
+                </a:solidFill>
+                <a:latin typeface="Cambria" pitchFamily="34" charset="0"/>
+                <a:ea typeface="Cambria" pitchFamily="34" charset="-122"/>
+                <a:cs typeface="Cambria" pitchFamily="34" charset="-120"/>
+              </a:rPr>
+              <a:t>3. E2E / Acceptance Tests</a:t>
+            </a:r>
+            <a:endParaRPr lang="en-US" sz="1200" dirty="0"/>
+          </a:p>
+        </p:txBody>
+      </p:sp>
+      <p:sp>
+        <p:nvSpPr>
+          <p:cNvPr id="11" name="Text 9"/>
+          <p:cNvSpPr/>
+          <p:nvPr/>
+        </p:nvSpPr>
+        <p:spPr>
+          <a:xfrm>
+            <a:off x="6166104" y="1325880"/>
+            <a:ext cx="2456688" cy="3479292"/>
+          </a:xfrm>
+          <a:prstGeom prst="rect">
+            <a:avLst/>
+          </a:prstGeom>
+          <a:noFill/>
+          <a:ln/>
+        </p:spPr>
+        <p:txBody>
+          <a:bodyPr wrap="square" rtlCol="0" anchor="t"/>
+          <a:lstStyle/>
+          <a:p>
+            <a:pPr algn="l" indent="0" marL="0">
+              <a:buNone/>
+            </a:pPr>
+            <a:r>
+              <a:rPr lang="en-US" sz="1200" dirty="0">
+                <a:solidFill>
+                  <a:srgbClr val="2D2D3A"/>
+                </a:solidFill>
+                <a:latin typeface="Times New Roman" pitchFamily="34" charset="0"/>
+                <a:ea typeface="Times New Roman" pitchFamily="34" charset="-122"/>
+                <a:cs typeface="Times New Roman" pitchFamily="34" charset="-120"/>
+              </a:rPr>
+              <a:t>Верхний уровень. Полная эмуляция реальных действий пользователя в браузере с помощью Playwright. Проверяются сквозные бизнес-цепочки от логина до закрытия заявки.</a:t>
+            </a:r>
+            <a:endParaRPr lang="en-US" sz="1200" dirty="0"/>
           </a:p>
         </p:txBody>
       </p:sp>
@@ -5308,17 +5095,17 @@
               <a:buNone/>
             </a:pPr>
             <a:r>
-              <a:rPr lang="en-US" sz="2000" b="1" dirty="0">
-                <a:solidFill>
-                  <a:srgbClr val="0F1E36"/>
-                </a:solidFill>
-                <a:latin typeface="Cambria" pitchFamily="34" charset="0"/>
-                <a:ea typeface="Cambria" pitchFamily="34" charset="-122"/>
-                <a:cs typeface="Cambria" pitchFamily="34" charset="-120"/>
-              </a:rPr>
-              <a:t>Integration Testing: Интеграционные тесты</a:t>
-            </a:r>
-            <a:endParaRPr lang="en-US" sz="2000" dirty="0"/>
+              <a:rPr lang="en-US" sz="1600" b="1" dirty="0">
+                <a:solidFill>
+                  <a:srgbClr val="1A1A2E"/>
+                </a:solidFill>
+                <a:latin typeface="Georgia" pitchFamily="34" charset="0"/>
+                <a:ea typeface="Georgia" pitchFamily="34" charset="-122"/>
+                <a:cs typeface="Georgia" pitchFamily="34" charset="-120"/>
+              </a:rPr>
+              <a:t>Unit Testing: Модульные тесты с Jest</a:t>
+            </a:r>
+            <a:endParaRPr lang="en-US" sz="1600" dirty="0"/>
           </a:p>
         </p:txBody>
       </p:sp>
@@ -5339,18 +5126,18 @@
             </a:avLst>
           </a:prstGeom>
           <a:solidFill>
-            <a:srgbClr val="FFF7ED"/>
+            <a:srgbClr val="F8F4F0"/>
           </a:solidFill>
           <a:ln w="12700">
             <a:solidFill>
-              <a:srgbClr val="FFF7ED"/>
+              <a:srgbClr val="EFEAE3"/>
             </a:solidFill>
             <a:prstDash val="solid"/>
           </a:ln>
           <a:effectLst>
-            <a:outerShdw sx="100000" sy="100000" kx="0" ky="0" algn="bl" rotWithShape="0" blurRad="88900" dist="25400" dir="2700000">
+            <a:outerShdw sx="100000" sy="100000" kx="0" ky="0" algn="bl" rotWithShape="0" blurRad="152400" dist="38100" dir="2700000">
               <a:srgbClr val="000000">
-                <a:alpha val="9000"/>
+                <a:alpha val="12000"/>
               </a:srgbClr>
             </a:outerShdw>
           </a:effectLst>
@@ -5381,17 +5168,17 @@
               <a:buNone/>
             </a:pPr>
             <a:r>
-              <a:rPr lang="en-US" sz="1300" b="1" dirty="0">
-                <a:solidFill>
-                  <a:srgbClr val="0F1E36"/>
+              <a:rPr lang="en-US" sz="1200" b="1" dirty="0">
+                <a:solidFill>
+                  <a:srgbClr val="1A1A2E"/>
                 </a:solidFill>
                 <a:latin typeface="Cambria" pitchFamily="34" charset="0"/>
                 <a:ea typeface="Cambria" pitchFamily="34" charset="-122"/>
                 <a:cs typeface="Cambria" pitchFamily="34" charset="-120"/>
               </a:rPr>
-              <a:t>Сущность интеграции</a:t>
-            </a:r>
-            <a:endParaRPr lang="en-US" sz="1300" dirty="0"/>
+              <a:t>Сущность юнит-тестов</a:t>
+            </a:r>
+            <a:endParaRPr lang="en-US" sz="1200" dirty="0"/>
           </a:p>
         </p:txBody>
       </p:sp>
@@ -5413,73 +5200,73 @@
           <a:ln/>
         </p:spPr>
         <p:txBody>
-          <a:bodyPr wrap="square" rtlCol="0" anchor="ctr"/>
-          <a:lstStyle/>
-          <a:p>
-            <a:pPr indent="0" marL="0">
+          <a:bodyPr wrap="square" rtlCol="0" anchor="t"/>
+          <a:lstStyle/>
+          <a:p>
+            <a:pPr algn="l" indent="0" marL="0">
               <a:buNone/>
             </a:pPr>
             <a:r>
               <a:rPr lang="en-US" sz="1100" dirty="0">
                 <a:solidFill>
-                  <a:srgbClr val="1E293B"/>
-                </a:solidFill>
-                <a:latin typeface="Calibri" pitchFamily="34" charset="0"/>
-                <a:ea typeface="Calibri" pitchFamily="34" charset="-122"/>
-                <a:cs typeface="Calibri" pitchFamily="34" charset="-120"/>
-              </a:rPr>
-              <a:t>• Проверяют корректность склейки роутеров, middleware и контроллеров.</a:t>
+                  <a:srgbClr val="2D2D3A"/>
+                </a:solidFill>
+                <a:latin typeface="Times New Roman" pitchFamily="34" charset="0"/>
+                <a:ea typeface="Times New Roman" pitchFamily="34" charset="-122"/>
+                <a:cs typeface="Times New Roman" pitchFamily="34" charset="-120"/>
+              </a:rPr>
+              <a:t>• Тестируют код без сетевых вызовов и обращений к дискам.</a:t>
             </a:r>
             <a:endParaRPr lang="en-US" sz="1100" dirty="0"/>
           </a:p>
           <a:p>
-            <a:pPr indent="0" marL="0">
+            <a:pPr algn="l" indent="0" marL="0">
               <a:buNone/>
             </a:pPr>
             <a:r>
               <a:rPr lang="en-US" sz="1100" dirty="0">
                 <a:solidFill>
-                  <a:srgbClr val="1E293B"/>
-                </a:solidFill>
-                <a:latin typeface="Calibri" pitchFamily="34" charset="0"/>
-                <a:ea typeface="Calibri" pitchFamily="34" charset="-122"/>
-                <a:cs typeface="Calibri" pitchFamily="34" charset="-120"/>
-              </a:rPr>
-              <a:t>• Тестируют реальный обмен данными с тестовой PostgreSQL СУБД.</a:t>
+                  <a:srgbClr val="2D2D3A"/>
+                </a:solidFill>
+                <a:latin typeface="Times New Roman" pitchFamily="34" charset="0"/>
+                <a:ea typeface="Times New Roman" pitchFamily="34" charset="-122"/>
+                <a:cs typeface="Times New Roman" pitchFamily="34" charset="-120"/>
+              </a:rPr>
+              <a:t>• Проверяют граничные условия валидации Zod-схем.</a:t>
             </a:r>
             <a:endParaRPr lang="en-US" sz="1100" dirty="0"/>
           </a:p>
           <a:p>
-            <a:pPr indent="0" marL="0">
+            <a:pPr algn="l" indent="0" marL="0">
               <a:buNone/>
             </a:pPr>
             <a:r>
               <a:rPr lang="en-US" sz="1100" dirty="0">
                 <a:solidFill>
-                  <a:srgbClr val="1E293B"/>
-                </a:solidFill>
-                <a:latin typeface="Calibri" pitchFamily="34" charset="0"/>
-                <a:ea typeface="Calibri" pitchFamily="34" charset="-122"/>
-                <a:cs typeface="Calibri" pitchFamily="34" charset="-120"/>
-              </a:rPr>
-              <a:t>• Эмулируют HTTP-запросы с помощью Supertest.</a:t>
+                  <a:srgbClr val="2D2D3A"/>
+                </a:solidFill>
+                <a:latin typeface="Times New Roman" pitchFamily="34" charset="0"/>
+                <a:ea typeface="Times New Roman" pitchFamily="34" charset="-122"/>
+                <a:cs typeface="Times New Roman" pitchFamily="34" charset="-120"/>
+              </a:rPr>
+              <a:t>• Позволяют моментально проверить регулярные выражения для валидации номеров телефонов.</a:t>
             </a:r>
             <a:endParaRPr lang="en-US" sz="1100" dirty="0"/>
           </a:p>
           <a:p>
-            <a:pPr indent="0" marL="0">
+            <a:pPr algn="l" indent="0" marL="0">
               <a:buNone/>
             </a:pPr>
             <a:r>
               <a:rPr lang="en-US" sz="1100" dirty="0">
                 <a:solidFill>
-                  <a:srgbClr val="1E293B"/>
-                </a:solidFill>
-                <a:latin typeface="Calibri" pitchFamily="34" charset="0"/>
-                <a:ea typeface="Calibri" pitchFamily="34" charset="-122"/>
-                <a:cs typeface="Calibri" pitchFamily="34" charset="-120"/>
-              </a:rPr>
-              <a:t>• Гарантируют работоспособность роутов безопасности.</a:t>
+                  <a:srgbClr val="2D2D3A"/>
+                </a:solidFill>
+                <a:latin typeface="Times New Roman" pitchFamily="34" charset="0"/>
+                <a:ea typeface="Times New Roman" pitchFamily="34" charset="-122"/>
+                <a:cs typeface="Times New Roman" pitchFamily="34" charset="-120"/>
+              </a:rPr>
+              <a:t>• Базируются на фреймворке Jest и TS-Jest.</a:t>
             </a:r>
             <a:endParaRPr lang="en-US" sz="1100" dirty="0"/>
           </a:p>
@@ -5502,11 +5289,11 @@
             </a:avLst>
           </a:prstGeom>
           <a:solidFill>
-            <a:srgbClr val="0B132B"/>
+            <a:srgbClr val="1A1A2E"/>
           </a:solidFill>
           <a:ln w="12700">
             <a:solidFill>
-              <a:srgbClr val="1E4070"/>
+              <a:srgbClr val="2A2A4A"/>
             </a:solidFill>
             <a:prstDash val="solid"/>
           </a:ln>
@@ -5537,176 +5324,199 @@
               <a:buNone/>
             </a:pPr>
             <a:r>
-              <a:rPr lang="en-US" sz="1100" dirty="0">
-                <a:solidFill>
-                  <a:srgbClr val="FFEDD5"/>
+              <a:rPr lang="en-US" sz="1050" dirty="0">
+                <a:solidFill>
+                  <a:srgbClr val="F8F4F0"/>
                 </a:solidFill>
                 <a:latin typeface="Courier New" pitchFamily="34" charset="0"/>
                 <a:ea typeface="Courier New" pitchFamily="34" charset="-122"/>
                 <a:cs typeface="Courier New" pitchFamily="34" charset="-120"/>
               </a:rPr>
-              <a:t>import request from 'supertest';</a:t>
-            </a:r>
-            <a:endParaRPr lang="en-US" sz="1100" dirty="0"/>
-          </a:p>
-          <a:p>
-            <a:pPr algn="l" indent="0" marL="0">
-              <a:buNone/>
-            </a:pPr>
-            <a:r>
-              <a:rPr lang="en-US" sz="1100" dirty="0">
-                <a:solidFill>
-                  <a:srgbClr val="FFEDD5"/>
+              <a:t>import { CreateTicketSchema } from './validation';</a:t>
+            </a:r>
+            <a:endParaRPr lang="en-US" sz="1050" dirty="0"/>
+          </a:p>
+          <a:p>
+            <a:pPr algn="l" indent="0" marL="0">
+              <a:buNone/>
+            </a:pPr>
+            <a:endParaRPr lang="en-US" sz="1050" dirty="0"/>
+          </a:p>
+          <a:p>
+            <a:pPr algn="l" indent="0" marL="0">
+              <a:buNone/>
+            </a:pPr>
+            <a:r>
+              <a:rPr lang="en-US" sz="1050" dirty="0">
+                <a:solidFill>
+                  <a:srgbClr val="F8F4F0"/>
                 </a:solidFill>
                 <a:latin typeface="Courier New" pitchFamily="34" charset="0"/>
                 <a:ea typeface="Courier New" pitchFamily="34" charset="-122"/>
                 <a:cs typeface="Courier New" pitchFamily="34" charset="-120"/>
               </a:rPr>
-              <a:t>import app from './app';</a:t>
-            </a:r>
-            <a:endParaRPr lang="en-US" sz="1100" dirty="0"/>
-          </a:p>
-          <a:p>
-            <a:pPr algn="l" indent="0" marL="0">
-              <a:buNone/>
-            </a:pPr>
-            <a:endParaRPr lang="en-US" sz="1100" dirty="0"/>
-          </a:p>
-          <a:p>
-            <a:pPr algn="l" indent="0" marL="0">
-              <a:buNone/>
-            </a:pPr>
-            <a:r>
-              <a:rPr lang="en-US" sz="1100" dirty="0">
-                <a:solidFill>
-                  <a:srgbClr val="FFEDD5"/>
+              <a:t>describe('CreateTicketSchema Unit Tests', () =&gt; {</a:t>
+            </a:r>
+            <a:endParaRPr lang="en-US" sz="1050" dirty="0"/>
+          </a:p>
+          <a:p>
+            <a:pPr algn="l" indent="0" marL="0">
+              <a:buNone/>
+            </a:pPr>
+            <a:r>
+              <a:rPr lang="en-US" sz="1050" dirty="0">
+                <a:solidFill>
+                  <a:srgbClr val="F8F4F0"/>
                 </a:solidFill>
                 <a:latin typeface="Courier New" pitchFamily="34" charset="0"/>
                 <a:ea typeface="Courier New" pitchFamily="34" charset="-122"/>
                 <a:cs typeface="Courier New" pitchFamily="34" charset="-120"/>
               </a:rPr>
-              <a:t>describe('GET /api/tickets Integration', () =&gt; {</a:t>
-            </a:r>
-            <a:endParaRPr lang="en-US" sz="1100" dirty="0"/>
-          </a:p>
-          <a:p>
-            <a:pPr algn="l" indent="0" marL="0">
-              <a:buNone/>
-            </a:pPr>
-            <a:r>
-              <a:rPr lang="en-US" sz="1100" dirty="0">
-                <a:solidFill>
-                  <a:srgbClr val="FFEDD5"/>
+              <a:t>  it('should accept valid ticket details', () =&gt; {</a:t>
+            </a:r>
+            <a:endParaRPr lang="en-US" sz="1050" dirty="0"/>
+          </a:p>
+          <a:p>
+            <a:pPr algn="l" indent="0" marL="0">
+              <a:buNone/>
+            </a:pPr>
+            <a:r>
+              <a:rPr lang="en-US" sz="1050" dirty="0">
+                <a:solidFill>
+                  <a:srgbClr val="F8F4F0"/>
                 </a:solidFill>
                 <a:latin typeface="Courier New" pitchFamily="34" charset="0"/>
                 <a:ea typeface="Courier New" pitchFamily="34" charset="-122"/>
                 <a:cs typeface="Courier New" pitchFamily="34" charset="-120"/>
               </a:rPr>
-              <a:t>  it('should fail if user is unauthorized', async () =&gt; {</a:t>
-            </a:r>
-            <a:endParaRPr lang="en-US" sz="1100" dirty="0"/>
-          </a:p>
-          <a:p>
-            <a:pPr algn="l" indent="0" marL="0">
-              <a:buNone/>
-            </a:pPr>
-            <a:r>
-              <a:rPr lang="en-US" sz="1100" dirty="0">
-                <a:solidFill>
-                  <a:srgbClr val="FFEDD5"/>
+              <a:t>    const data = { title: '1C ERP crash', description: 'DB error 109' };</a:t>
+            </a:r>
+            <a:endParaRPr lang="en-US" sz="1050" dirty="0"/>
+          </a:p>
+          <a:p>
+            <a:pPr algn="l" indent="0" marL="0">
+              <a:buNone/>
+            </a:pPr>
+            <a:r>
+              <a:rPr lang="en-US" sz="1050" dirty="0">
+                <a:solidFill>
+                  <a:srgbClr val="F8F4F0"/>
                 </a:solidFill>
                 <a:latin typeface="Courier New" pitchFamily="34" charset="0"/>
                 <a:ea typeface="Courier New" pitchFamily="34" charset="-122"/>
                 <a:cs typeface="Courier New" pitchFamily="34" charset="-120"/>
               </a:rPr>
-              <a:t>    const res = await request(app)</a:t>
-            </a:r>
-            <a:endParaRPr lang="en-US" sz="1100" dirty="0"/>
-          </a:p>
-          <a:p>
-            <a:pPr algn="l" indent="0" marL="0">
-              <a:buNone/>
-            </a:pPr>
-            <a:r>
-              <a:rPr lang="en-US" sz="1100" dirty="0">
-                <a:solidFill>
-                  <a:srgbClr val="FFEDD5"/>
+              <a:t>    expect(CreateTicketSchema.safeParse(data).success).toBe(true);</a:t>
+            </a:r>
+            <a:endParaRPr lang="en-US" sz="1050" dirty="0"/>
+          </a:p>
+          <a:p>
+            <a:pPr algn="l" indent="0" marL="0">
+              <a:buNone/>
+            </a:pPr>
+            <a:r>
+              <a:rPr lang="en-US" sz="1050" dirty="0">
+                <a:solidFill>
+                  <a:srgbClr val="F8F4F0"/>
                 </a:solidFill>
                 <a:latin typeface="Courier New" pitchFamily="34" charset="0"/>
                 <a:ea typeface="Courier New" pitchFamily="34" charset="-122"/>
                 <a:cs typeface="Courier New" pitchFamily="34" charset="-120"/>
               </a:rPr>
-              <a:t>      .get('/api/tickets')</a:t>
-            </a:r>
-            <a:endParaRPr lang="en-US" sz="1100" dirty="0"/>
-          </a:p>
-          <a:p>
-            <a:pPr algn="l" indent="0" marL="0">
-              <a:buNone/>
-            </a:pPr>
-            <a:r>
-              <a:rPr lang="en-US" sz="1100" dirty="0">
-                <a:solidFill>
-                  <a:srgbClr val="FFEDD5"/>
+              <a:t>  });</a:t>
+            </a:r>
+            <a:endParaRPr lang="en-US" sz="1050" dirty="0"/>
+          </a:p>
+          <a:p>
+            <a:pPr algn="l" indent="0" marL="0">
+              <a:buNone/>
+            </a:pPr>
+            <a:endParaRPr lang="en-US" sz="1050" dirty="0"/>
+          </a:p>
+          <a:p>
+            <a:pPr algn="l" indent="0" marL="0">
+              <a:buNone/>
+            </a:pPr>
+            <a:r>
+              <a:rPr lang="en-US" sz="1050" dirty="0">
+                <a:solidFill>
+                  <a:srgbClr val="F8F4F0"/>
                 </a:solidFill>
                 <a:latin typeface="Courier New" pitchFamily="34" charset="0"/>
                 <a:ea typeface="Courier New" pitchFamily="34" charset="-122"/>
                 <a:cs typeface="Courier New" pitchFamily="34" charset="-120"/>
               </a:rPr>
-              <a:t>      .expect(401);</a:t>
-            </a:r>
-            <a:endParaRPr lang="en-US" sz="1100" dirty="0"/>
-          </a:p>
-          <a:p>
-            <a:pPr algn="l" indent="0" marL="0">
-              <a:buNone/>
-            </a:pPr>
-            <a:r>
-              <a:rPr lang="en-US" sz="1100" dirty="0">
-                <a:solidFill>
-                  <a:srgbClr val="FFEDD5"/>
+              <a:t>  it('should reject short descriptions', () =&gt; {</a:t>
+            </a:r>
+            <a:endParaRPr lang="en-US" sz="1050" dirty="0"/>
+          </a:p>
+          <a:p>
+            <a:pPr algn="l" indent="0" marL="0">
+              <a:buNone/>
+            </a:pPr>
+            <a:r>
+              <a:rPr lang="en-US" sz="1050" dirty="0">
+                <a:solidFill>
+                  <a:srgbClr val="F8F4F0"/>
                 </a:solidFill>
                 <a:latin typeface="Courier New" pitchFamily="34" charset="0"/>
                 <a:ea typeface="Courier New" pitchFamily="34" charset="-122"/>
                 <a:cs typeface="Courier New" pitchFamily="34" charset="-120"/>
               </a:rPr>
-              <a:t>    expect(res.body.error).toBe('Unauthorized');</a:t>
-            </a:r>
-            <a:endParaRPr lang="en-US" sz="1100" dirty="0"/>
-          </a:p>
-          <a:p>
-            <a:pPr algn="l" indent="0" marL="0">
-              <a:buNone/>
-            </a:pPr>
-            <a:r>
-              <a:rPr lang="en-US" sz="1100" dirty="0">
-                <a:solidFill>
-                  <a:srgbClr val="FFEDD5"/>
+              <a:t>    const data = { title: '1C ERP crash', description: 'short' };</a:t>
+            </a:r>
+            <a:endParaRPr lang="en-US" sz="1050" dirty="0"/>
+          </a:p>
+          <a:p>
+            <a:pPr algn="l" indent="0" marL="0">
+              <a:buNone/>
+            </a:pPr>
+            <a:r>
+              <a:rPr lang="en-US" sz="1050" dirty="0">
+                <a:solidFill>
+                  <a:srgbClr val="F8F4F0"/>
                 </a:solidFill>
                 <a:latin typeface="Courier New" pitchFamily="34" charset="0"/>
                 <a:ea typeface="Courier New" pitchFamily="34" charset="-122"/>
                 <a:cs typeface="Courier New" pitchFamily="34" charset="-120"/>
               </a:rPr>
-              <a:t>  });</a:t>
-            </a:r>
-            <a:endParaRPr lang="en-US" sz="1100" dirty="0"/>
-          </a:p>
-          <a:p>
-            <a:pPr algn="l" indent="0" marL="0">
-              <a:buNone/>
-            </a:pPr>
-            <a:r>
-              <a:rPr lang="en-US" sz="1100" dirty="0">
-                <a:solidFill>
-                  <a:srgbClr val="FFEDD5"/>
+              <a:t>    expect(CreateTicketSchema.safeParse(data).success).toBe(false);</a:t>
+            </a:r>
+            <a:endParaRPr lang="en-US" sz="1050" dirty="0"/>
+          </a:p>
+          <a:p>
+            <a:pPr algn="l" indent="0" marL="0">
+              <a:buNone/>
+            </a:pPr>
+            <a:r>
+              <a:rPr lang="en-US" sz="1050" dirty="0">
+                <a:solidFill>
+                  <a:srgbClr val="F8F4F0"/>
                 </a:solidFill>
                 <a:latin typeface="Courier New" pitchFamily="34" charset="0"/>
                 <a:ea typeface="Courier New" pitchFamily="34" charset="-122"/>
                 <a:cs typeface="Courier New" pitchFamily="34" charset="-120"/>
               </a:rPr>
+              <a:t>  });</a:t>
+            </a:r>
+            <a:endParaRPr lang="en-US" sz="1050" dirty="0"/>
+          </a:p>
+          <a:p>
+            <a:pPr algn="l" indent="0" marL="0">
+              <a:buNone/>
+            </a:pPr>
+            <a:r>
+              <a:rPr lang="en-US" sz="1050" dirty="0">
+                <a:solidFill>
+                  <a:srgbClr val="F8F4F0"/>
+                </a:solidFill>
+                <a:latin typeface="Courier New" pitchFamily="34" charset="0"/>
+                <a:ea typeface="Courier New" pitchFamily="34" charset="-122"/>
+                <a:cs typeface="Courier New" pitchFamily="34" charset="-120"/>
+              </a:rPr>
               <a:t>});</a:t>
             </a:r>
-            <a:endParaRPr lang="en-US" sz="1100" dirty="0"/>
+            <a:endParaRPr lang="en-US" sz="1050" dirty="0"/>
           </a:p>
         </p:txBody>
       </p:sp>
@@ -5767,17 +5577,17 @@
               <a:buNone/>
             </a:pPr>
             <a:r>
-              <a:rPr lang="en-US" sz="2000" b="1" dirty="0">
-                <a:solidFill>
-                  <a:srgbClr val="0F1E36"/>
-                </a:solidFill>
-                <a:latin typeface="Cambria" pitchFamily="34" charset="0"/>
-                <a:ea typeface="Cambria" pitchFamily="34" charset="-122"/>
-                <a:cs typeface="Cambria" pitchFamily="34" charset="-120"/>
-              </a:rPr>
-              <a:t>E2E: Сквозное приёмочное тестирование</a:t>
-            </a:r>
-            <a:endParaRPr lang="en-US" sz="2000" dirty="0"/>
+              <a:rPr lang="en-US" sz="1600" b="1" dirty="0">
+                <a:solidFill>
+                  <a:srgbClr val="1A1A2E"/>
+                </a:solidFill>
+                <a:latin typeface="Georgia" pitchFamily="34" charset="0"/>
+                <a:ea typeface="Georgia" pitchFamily="34" charset="-122"/>
+                <a:cs typeface="Georgia" pitchFamily="34" charset="-120"/>
+              </a:rPr>
+              <a:t>Integration Testing: Интеграционные тесты</a:t>
+            </a:r>
+            <a:endParaRPr lang="en-US" sz="1600" dirty="0"/>
           </a:p>
         </p:txBody>
       </p:sp>
@@ -5790,26 +5600,26 @@
         <p:spPr>
           <a:xfrm>
             <a:off x="384048" y="822960"/>
-            <a:ext cx="4023360" cy="4119372"/>
+            <a:ext cx="3474720" cy="4119372"/>
           </a:xfrm>
           <a:prstGeom prst="roundRect">
             <a:avLst>
-              <a:gd name="adj" fmla="val 2273"/>
+              <a:gd name="adj" fmla="val 2632"/>
             </a:avLst>
           </a:prstGeom>
           <a:solidFill>
-            <a:srgbClr val="FFF7ED"/>
+            <a:srgbClr val="F8F4F0"/>
           </a:solidFill>
           <a:ln w="12700">
             <a:solidFill>
-              <a:srgbClr val="FFF7ED"/>
+              <a:srgbClr val="EFEAE3"/>
             </a:solidFill>
             <a:prstDash val="solid"/>
           </a:ln>
           <a:effectLst>
-            <a:outerShdw sx="100000" sy="100000" kx="0" ky="0" algn="bl" rotWithShape="0" blurRad="88900" dist="25400" dir="2700000">
+            <a:outerShdw sx="100000" sy="100000" kx="0" ky="0" algn="bl" rotWithShape="0" blurRad="152400" dist="38100" dir="2700000">
               <a:srgbClr val="000000">
-                <a:alpha val="9000"/>
+                <a:alpha val="12000"/>
               </a:srgbClr>
             </a:outerShdw>
           </a:effectLst>
@@ -5823,8 +5633,8 @@
         </p:nvSpPr>
         <p:spPr>
           <a:xfrm>
-            <a:off x="548640" y="932688"/>
-            <a:ext cx="3694176" cy="365760"/>
+            <a:off x="521208" y="932688"/>
+            <a:ext cx="3200400" cy="320040"/>
           </a:xfrm>
           <a:prstGeom prst="rect">
             <a:avLst/>
@@ -5840,17 +5650,17 @@
               <a:buNone/>
             </a:pPr>
             <a:r>
-              <a:rPr lang="en-US" sz="1300" b="1" dirty="0">
-                <a:solidFill>
-                  <a:srgbClr val="0F1E36"/>
+              <a:rPr lang="en-US" sz="1200" b="1" dirty="0">
+                <a:solidFill>
+                  <a:srgbClr val="1A1A2E"/>
                 </a:solidFill>
                 <a:latin typeface="Cambria" pitchFamily="34" charset="0"/>
                 <a:ea typeface="Cambria" pitchFamily="34" charset="-122"/>
                 <a:cs typeface="Cambria" pitchFamily="34" charset="-120"/>
               </a:rPr>
-              <a:t>Проектируемые E2E сценарии</a:t>
-            </a:r>
-            <a:endParaRPr lang="en-US" sz="1300" dirty="0"/>
+              <a:t>Сущность интеграции</a:t>
+            </a:r>
+            <a:endParaRPr lang="en-US" sz="1200" dirty="0"/>
           </a:p>
         </p:txBody>
       </p:sp>
@@ -5862,8 +5672,8 @@
         </p:nvSpPr>
         <p:spPr>
           <a:xfrm>
-            <a:off x="548640" y="1389888"/>
-            <a:ext cx="3694176" cy="2926080"/>
+            <a:off x="521208" y="1325880"/>
+            <a:ext cx="3200400" cy="3387852"/>
           </a:xfrm>
           <a:prstGeom prst="rect">
             <a:avLst/>
@@ -5872,24 +5682,75 @@
           <a:ln/>
         </p:spPr>
         <p:txBody>
-          <a:bodyPr wrap="square" rtlCol="0" anchor="ctr"/>
-          <a:lstStyle/>
-          <a:p>
-            <a:pPr indent="0" marL="0">
-              <a:buNone/>
-            </a:pPr>
-            <a:r>
-              <a:rPr lang="en-US" sz="1150" dirty="0">
-                <a:solidFill>
-                  <a:srgbClr val="1E293B"/>
-                </a:solidFill>
-                <a:latin typeface="Calibri" pitchFamily="34" charset="0"/>
-                <a:ea typeface="Calibri" pitchFamily="34" charset="-122"/>
-                <a:cs typeface="Calibri" pitchFamily="34" charset="-120"/>
-              </a:rPr>
-              <a:t>Для проекта разработан и настроен шаблон сквозного E2E-тестирования в Playwright. Ввиду раздельного развертывания подсистем фронтенда и бэкенда, сквозные приемочные тесты будут полноценно активированы в CI/CD в фазе финальной сборки. На текущем этапе качество гарантировано модульными и API-тестами.</a:t>
-            </a:r>
-            <a:endParaRPr lang="en-US" sz="1150" dirty="0"/>
+          <a:bodyPr wrap="square" rtlCol="0" anchor="t"/>
+          <a:lstStyle/>
+          <a:p>
+            <a:pPr algn="l" indent="0" marL="0">
+              <a:buNone/>
+            </a:pPr>
+            <a:r>
+              <a:rPr lang="en-US" sz="1100" dirty="0">
+                <a:solidFill>
+                  <a:srgbClr val="2D2D3A"/>
+                </a:solidFill>
+                <a:latin typeface="Times New Roman" pitchFamily="34" charset="0"/>
+                <a:ea typeface="Times New Roman" pitchFamily="34" charset="-122"/>
+                <a:cs typeface="Times New Roman" pitchFamily="34" charset="-120"/>
+              </a:rPr>
+              <a:t>• Проверяют корректность склейки роутеров, middleware и контроллеров.</a:t>
+            </a:r>
+            <a:endParaRPr lang="en-US" sz="1100" dirty="0"/>
+          </a:p>
+          <a:p>
+            <a:pPr algn="l" indent="0" marL="0">
+              <a:buNone/>
+            </a:pPr>
+            <a:r>
+              <a:rPr lang="en-US" sz="1100" dirty="0">
+                <a:solidFill>
+                  <a:srgbClr val="2D2D3A"/>
+                </a:solidFill>
+                <a:latin typeface="Times New Roman" pitchFamily="34" charset="0"/>
+                <a:ea typeface="Times New Roman" pitchFamily="34" charset="-122"/>
+                <a:cs typeface="Times New Roman" pitchFamily="34" charset="-120"/>
+              </a:rPr>
+              <a:t>• Тестируют реальный обмен данными с тестовой PostgreSQL СУБД.</a:t>
+            </a:r>
+            <a:endParaRPr lang="en-US" sz="1100" dirty="0"/>
+          </a:p>
+          <a:p>
+            <a:pPr algn="l" indent="0" marL="0">
+              <a:buNone/>
+            </a:pPr>
+            <a:r>
+              <a:rPr lang="en-US" sz="1100" dirty="0">
+                <a:solidFill>
+                  <a:srgbClr val="2D2D3A"/>
+                </a:solidFill>
+                <a:latin typeface="Times New Roman" pitchFamily="34" charset="0"/>
+                <a:ea typeface="Times New Roman" pitchFamily="34" charset="-122"/>
+                <a:cs typeface="Times New Roman" pitchFamily="34" charset="-120"/>
+              </a:rPr>
+              <a:t>• Эмулируют HTTP-запросы с помощью Supertest.</a:t>
+            </a:r>
+            <a:endParaRPr lang="en-US" sz="1100" dirty="0"/>
+          </a:p>
+          <a:p>
+            <a:pPr algn="l" indent="0" marL="0">
+              <a:buNone/>
+            </a:pPr>
+            <a:r>
+              <a:rPr lang="en-US" sz="1100" dirty="0">
+                <a:solidFill>
+                  <a:srgbClr val="2D2D3A"/>
+                </a:solidFill>
+                <a:latin typeface="Times New Roman" pitchFamily="34" charset="0"/>
+                <a:ea typeface="Times New Roman" pitchFamily="34" charset="-122"/>
+                <a:cs typeface="Times New Roman" pitchFamily="34" charset="-120"/>
+              </a:rPr>
+              <a:t>• Гарантируют работоспособность роутов безопасности.</a:t>
+            </a:r>
+            <a:endParaRPr lang="en-US" sz="1100" dirty="0"/>
           </a:p>
         </p:txBody>
       </p:sp>
@@ -5901,30 +5762,23 @@
         </p:nvSpPr>
         <p:spPr>
           <a:xfrm>
-            <a:off x="4681728" y="822960"/>
-            <a:ext cx="4078224" cy="4119372"/>
+            <a:off x="4133088" y="822960"/>
+            <a:ext cx="4626864" cy="4119372"/>
           </a:xfrm>
           <a:prstGeom prst="roundRect">
             <a:avLst>
-              <a:gd name="adj" fmla="val 2242"/>
+              <a:gd name="adj" fmla="val 1776"/>
             </a:avLst>
           </a:prstGeom>
           <a:solidFill>
-            <a:srgbClr val="D1FAE5"/>
+            <a:srgbClr val="1A1A2E"/>
           </a:solidFill>
           <a:ln w="12700">
             <a:solidFill>
-              <a:srgbClr val="D1FAE5"/>
+              <a:srgbClr val="2A2A4A"/>
             </a:solidFill>
             <a:prstDash val="solid"/>
           </a:ln>
-          <a:effectLst>
-            <a:outerShdw sx="100000" sy="100000" kx="0" ky="0" algn="bl" rotWithShape="0" blurRad="88900" dist="25400" dir="2700000">
-              <a:srgbClr val="000000">
-                <a:alpha val="9000"/>
-              </a:srgbClr>
-            </a:outerShdw>
-          </a:effectLst>
         </p:spPr>
       </p:sp>
       <p:sp>
@@ -5935,8 +5789,8 @@
         </p:nvSpPr>
         <p:spPr>
           <a:xfrm>
-            <a:off x="4846320" y="932688"/>
-            <a:ext cx="3749040" cy="365760"/>
+            <a:off x="4270248" y="905256"/>
+            <a:ext cx="4352544" cy="3954780"/>
           </a:xfrm>
           <a:prstGeom prst="rect">
             <a:avLst/>
@@ -5945,146 +5799,181 @@
           <a:ln/>
         </p:spPr>
         <p:txBody>
-          <a:bodyPr wrap="square" rtlCol="0" anchor="ctr"/>
-          <a:lstStyle/>
-          <a:p>
-            <a:pPr indent="0" marL="0">
-              <a:buNone/>
-            </a:pPr>
-            <a:r>
-              <a:rPr lang="en-US" sz="1300" b="1" dirty="0">
-                <a:solidFill>
-                  <a:srgbClr val="0F1E36"/>
-                </a:solidFill>
-                <a:latin typeface="Cambria" pitchFamily="34" charset="0"/>
-                <a:ea typeface="Cambria" pitchFamily="34" charset="-122"/>
-                <a:cs typeface="Cambria" pitchFamily="34" charset="-120"/>
-              </a:rPr>
-              <a:t>Шаблон сценария в Playwright</a:t>
-            </a:r>
-            <a:endParaRPr lang="en-US" sz="1300" dirty="0"/>
-          </a:p>
-        </p:txBody>
-      </p:sp>
-      <p:sp>
-        <p:nvSpPr>
-          <p:cNvPr id="8" name="Text 6"/>
-          <p:cNvSpPr/>
-          <p:nvPr/>
-        </p:nvSpPr>
-        <p:spPr>
-          <a:xfrm>
-            <a:off x="4846320" y="1389888"/>
-            <a:ext cx="3749040" cy="2926080"/>
-          </a:xfrm>
-          <a:prstGeom prst="rect">
-            <a:avLst/>
-          </a:prstGeom>
-          <a:noFill/>
-          <a:ln/>
-        </p:spPr>
-        <p:txBody>
-          <a:bodyPr wrap="square" rtlCol="0" anchor="ctr"/>
-          <a:lstStyle/>
-          <a:p>
-            <a:pPr indent="0" marL="0">
+          <a:bodyPr wrap="square" rtlCol="0" anchor="t"/>
+          <a:lstStyle/>
+          <a:p>
+            <a:pPr algn="l" indent="0" marL="0">
               <a:buNone/>
             </a:pPr>
             <a:r>
               <a:rPr lang="en-US" sz="1100" dirty="0">
                 <a:solidFill>
-                  <a:srgbClr val="1E293B"/>
-                </a:solidFill>
-                <a:latin typeface="Calibri" pitchFamily="34" charset="0"/>
-                <a:ea typeface="Calibri" pitchFamily="34" charset="-122"/>
-                <a:cs typeface="Calibri" pitchFamily="34" charset="-120"/>
-              </a:rPr>
-              <a:t>1. Шаблон запускает браузер и открывает `/login`.</a:t>
+                  <a:srgbClr val="F8F4F0"/>
+                </a:solidFill>
+                <a:latin typeface="Courier New" pitchFamily="34" charset="0"/>
+                <a:ea typeface="Courier New" pitchFamily="34" charset="-122"/>
+                <a:cs typeface="Courier New" pitchFamily="34" charset="-120"/>
+              </a:rPr>
+              <a:t>import request from 'supertest';</a:t>
             </a:r>
             <a:endParaRPr lang="en-US" sz="1100" dirty="0"/>
           </a:p>
           <a:p>
-            <a:pPr indent="0" marL="0">
+            <a:pPr algn="l" indent="0" marL="0">
               <a:buNone/>
             </a:pPr>
             <a:r>
               <a:rPr lang="en-US" sz="1100" dirty="0">
                 <a:solidFill>
-                  <a:srgbClr val="1E293B"/>
-                </a:solidFill>
-                <a:latin typeface="Calibri" pitchFamily="34" charset="0"/>
-                <a:ea typeface="Calibri" pitchFamily="34" charset="-122"/>
-                <a:cs typeface="Calibri" pitchFamily="34" charset="-120"/>
-              </a:rPr>
-              <a:t>2. Эмулирует ввод телефона и SMS OTP (мок-код 111111).</a:t>
+                  <a:srgbClr val="F8F4F0"/>
+                </a:solidFill>
+                <a:latin typeface="Courier New" pitchFamily="34" charset="0"/>
+                <a:ea typeface="Courier New" pitchFamily="34" charset="-122"/>
+                <a:cs typeface="Courier New" pitchFamily="34" charset="-120"/>
+              </a:rPr>
+              <a:t>import app from './app';</a:t>
             </a:r>
             <a:endParaRPr lang="en-US" sz="1100" dirty="0"/>
           </a:p>
           <a:p>
-            <a:pPr indent="0" marL="0">
+            <a:pPr algn="l" indent="0" marL="0">
+              <a:buNone/>
+            </a:pPr>
+            <a:endParaRPr lang="en-US" sz="1100" dirty="0"/>
+          </a:p>
+          <a:p>
+            <a:pPr algn="l" indent="0" marL="0">
               <a:buNone/>
             </a:pPr>
             <a:r>
               <a:rPr lang="en-US" sz="1100" dirty="0">
                 <a:solidFill>
-                  <a:srgbClr val="1E293B"/>
-                </a:solidFill>
-                <a:latin typeface="Calibri" pitchFamily="34" charset="0"/>
-                <a:ea typeface="Calibri" pitchFamily="34" charset="-122"/>
-                <a:cs typeface="Calibri" pitchFamily="34" charset="-120"/>
-              </a:rPr>
-              <a:t>3. Переходит в раздел 'Создать обращение'.</a:t>
+                  <a:srgbClr val="F8F4F0"/>
+                </a:solidFill>
+                <a:latin typeface="Courier New" pitchFamily="34" charset="0"/>
+                <a:ea typeface="Courier New" pitchFamily="34" charset="-122"/>
+                <a:cs typeface="Courier New" pitchFamily="34" charset="-120"/>
+              </a:rPr>
+              <a:t>describe('GET /api/tickets Integration', () =&gt; {</a:t>
             </a:r>
             <a:endParaRPr lang="en-US" sz="1100" dirty="0"/>
           </a:p>
           <a:p>
-            <a:pPr indent="0" marL="0">
+            <a:pPr algn="l" indent="0" marL="0">
               <a:buNone/>
             </a:pPr>
             <a:r>
               <a:rPr lang="en-US" sz="1100" dirty="0">
                 <a:solidFill>
-                  <a:srgbClr val="1E293B"/>
-                </a:solidFill>
-                <a:latin typeface="Calibri" pitchFamily="34" charset="0"/>
-                <a:ea typeface="Calibri" pitchFamily="34" charset="-122"/>
-                <a:cs typeface="Calibri" pitchFamily="34" charset="-120"/>
-              </a:rPr>
-              <a:t>4. Описывает проблему техподдержки 1С, нажимает кнопку 'Отправить'.</a:t>
+                  <a:srgbClr val="F8F4F0"/>
+                </a:solidFill>
+                <a:latin typeface="Courier New" pitchFamily="34" charset="0"/>
+                <a:ea typeface="Courier New" pitchFamily="34" charset="-122"/>
+                <a:cs typeface="Courier New" pitchFamily="34" charset="-120"/>
+              </a:rPr>
+              <a:t>  it('should fail if user is unauthorized', async () =&gt; {</a:t>
             </a:r>
             <a:endParaRPr lang="en-US" sz="1100" dirty="0"/>
           </a:p>
           <a:p>
-            <a:pPr indent="0" marL="0">
+            <a:pPr algn="l" indent="0" marL="0">
               <a:buNone/>
             </a:pPr>
             <a:r>
               <a:rPr lang="en-US" sz="1100" dirty="0">
                 <a:solidFill>
-                  <a:srgbClr val="1E293B"/>
-                </a:solidFill>
-                <a:latin typeface="Calibri" pitchFamily="34" charset="0"/>
-                <a:ea typeface="Calibri" pitchFamily="34" charset="-122"/>
-                <a:cs typeface="Calibri" pitchFamily="34" charset="-120"/>
-              </a:rPr>
-              <a:t>5. Сверяет статус создания в интерфейсе и СУБД.</a:t>
+                  <a:srgbClr val="F8F4F0"/>
+                </a:solidFill>
+                <a:latin typeface="Courier New" pitchFamily="34" charset="0"/>
+                <a:ea typeface="Courier New" pitchFamily="34" charset="-122"/>
+                <a:cs typeface="Courier New" pitchFamily="34" charset="-120"/>
+              </a:rPr>
+              <a:t>    const res = await request(app)</a:t>
             </a:r>
             <a:endParaRPr lang="en-US" sz="1100" dirty="0"/>
           </a:p>
           <a:p>
-            <a:pPr indent="0" marL="0">
+            <a:pPr algn="l" indent="0" marL="0">
               <a:buNone/>
             </a:pPr>
             <a:r>
               <a:rPr lang="en-US" sz="1100" dirty="0">
                 <a:solidFill>
-                  <a:srgbClr val="1E293B"/>
-                </a:solidFill>
-                <a:latin typeface="Calibri" pitchFamily="34" charset="0"/>
-                <a:ea typeface="Calibri" pitchFamily="34" charset="-122"/>
-                <a:cs typeface="Calibri" pitchFamily="34" charset="-120"/>
-              </a:rPr>
-              <a:t>• Готов к полному запуску при интеграции фронтенда.</a:t>
+                  <a:srgbClr val="F8F4F0"/>
+                </a:solidFill>
+                <a:latin typeface="Courier New" pitchFamily="34" charset="0"/>
+                <a:ea typeface="Courier New" pitchFamily="34" charset="-122"/>
+                <a:cs typeface="Courier New" pitchFamily="34" charset="-120"/>
+              </a:rPr>
+              <a:t>      .get('/api/tickets')</a:t>
+            </a:r>
+            <a:endParaRPr lang="en-US" sz="1100" dirty="0"/>
+          </a:p>
+          <a:p>
+            <a:pPr algn="l" indent="0" marL="0">
+              <a:buNone/>
+            </a:pPr>
+            <a:r>
+              <a:rPr lang="en-US" sz="1100" dirty="0">
+                <a:solidFill>
+                  <a:srgbClr val="F8F4F0"/>
+                </a:solidFill>
+                <a:latin typeface="Courier New" pitchFamily="34" charset="0"/>
+                <a:ea typeface="Courier New" pitchFamily="34" charset="-122"/>
+                <a:cs typeface="Courier New" pitchFamily="34" charset="-120"/>
+              </a:rPr>
+              <a:t>      .expect(401);</a:t>
+            </a:r>
+            <a:endParaRPr lang="en-US" sz="1100" dirty="0"/>
+          </a:p>
+          <a:p>
+            <a:pPr algn="l" indent="0" marL="0">
+              <a:buNone/>
+            </a:pPr>
+            <a:r>
+              <a:rPr lang="en-US" sz="1100" dirty="0">
+                <a:solidFill>
+                  <a:srgbClr val="F8F4F0"/>
+                </a:solidFill>
+                <a:latin typeface="Courier New" pitchFamily="34" charset="0"/>
+                <a:ea typeface="Courier New" pitchFamily="34" charset="-122"/>
+                <a:cs typeface="Courier New" pitchFamily="34" charset="-120"/>
+              </a:rPr>
+              <a:t>    expect(res.body.error).toBe('Unauthorized');</a:t>
+            </a:r>
+            <a:endParaRPr lang="en-US" sz="1100" dirty="0"/>
+          </a:p>
+          <a:p>
+            <a:pPr algn="l" indent="0" marL="0">
+              <a:buNone/>
+            </a:pPr>
+            <a:r>
+              <a:rPr lang="en-US" sz="1100" dirty="0">
+                <a:solidFill>
+                  <a:srgbClr val="F8F4F0"/>
+                </a:solidFill>
+                <a:latin typeface="Courier New" pitchFamily="34" charset="0"/>
+                <a:ea typeface="Courier New" pitchFamily="34" charset="-122"/>
+                <a:cs typeface="Courier New" pitchFamily="34" charset="-120"/>
+              </a:rPr>
+              <a:t>  });</a:t>
+            </a:r>
+            <a:endParaRPr lang="en-US" sz="1100" dirty="0"/>
+          </a:p>
+          <a:p>
+            <a:pPr algn="l" indent="0" marL="0">
+              <a:buNone/>
+            </a:pPr>
+            <a:r>
+              <a:rPr lang="en-US" sz="1100" dirty="0">
+                <a:solidFill>
+                  <a:srgbClr val="F8F4F0"/>
+                </a:solidFill>
+                <a:latin typeface="Courier New" pitchFamily="34" charset="0"/>
+                <a:ea typeface="Courier New" pitchFamily="34" charset="-122"/>
+                <a:cs typeface="Courier New" pitchFamily="34" charset="-120"/>
+              </a:rPr>
+              <a:t>});</a:t>
             </a:r>
             <a:endParaRPr lang="en-US" sz="1100" dirty="0"/>
           </a:p>
@@ -6147,17 +6036,17 @@
               <a:buNone/>
             </a:pPr>
             <a:r>
-              <a:rPr lang="en-US" sz="2000" b="1" dirty="0">
-                <a:solidFill>
-                  <a:srgbClr val="0F1E36"/>
-                </a:solidFill>
-                <a:latin typeface="Cambria" pitchFamily="34" charset="0"/>
-                <a:ea typeface="Cambria" pitchFamily="34" charset="-122"/>
-                <a:cs typeface="Cambria" pitchFamily="34" charset="-120"/>
-              </a:rPr>
-              <a:t>Нагрузочное тестирование: Сценарии Artillery</a:t>
-            </a:r>
-            <a:endParaRPr lang="en-US" sz="2000" dirty="0"/>
+              <a:rPr lang="en-US" sz="1600" b="1" dirty="0">
+                <a:solidFill>
+                  <a:srgbClr val="1A1A2E"/>
+                </a:solidFill>
+                <a:latin typeface="Georgia" pitchFamily="34" charset="0"/>
+                <a:ea typeface="Georgia" pitchFamily="34" charset="-122"/>
+                <a:cs typeface="Georgia" pitchFamily="34" charset="-120"/>
+              </a:rPr>
+              <a:t>E2E: Сквозное приёмочное тестирование</a:t>
+            </a:r>
+            <a:endParaRPr lang="en-US" sz="1600" dirty="0"/>
           </a:p>
         </p:txBody>
       </p:sp>
@@ -6170,26 +6059,26 @@
         <p:spPr>
           <a:xfrm>
             <a:off x="384048" y="822960"/>
-            <a:ext cx="3474720" cy="4119372"/>
+            <a:ext cx="8375904" cy="4119372"/>
           </a:xfrm>
           <a:prstGeom prst="roundRect">
             <a:avLst>
-              <a:gd name="adj" fmla="val 2632"/>
+              <a:gd name="adj" fmla="val 2220"/>
             </a:avLst>
           </a:prstGeom>
           <a:solidFill>
-            <a:srgbClr val="FFF7ED"/>
+            <a:srgbClr val="F8F4F0"/>
           </a:solidFill>
           <a:ln w="12700">
             <a:solidFill>
-              <a:srgbClr val="FFF7ED"/>
+              <a:srgbClr val="EFEAE3"/>
             </a:solidFill>
             <a:prstDash val="solid"/>
           </a:ln>
           <a:effectLst>
-            <a:outerShdw sx="100000" sy="100000" kx="0" ky="0" algn="bl" rotWithShape="0" blurRad="88900" dist="25400" dir="2700000">
+            <a:outerShdw sx="100000" sy="100000" kx="0" ky="0" algn="bl" rotWithShape="0" blurRad="152400" dist="38100" dir="2700000">
               <a:srgbClr val="000000">
-                <a:alpha val="9000"/>
+                <a:alpha val="12000"/>
               </a:srgbClr>
             </a:outerShdw>
           </a:effectLst>
@@ -6203,8 +6092,8 @@
         </p:nvSpPr>
         <p:spPr>
           <a:xfrm>
-            <a:off x="521208" y="932688"/>
-            <a:ext cx="3200400" cy="320040"/>
+            <a:off x="548640" y="932688"/>
+            <a:ext cx="8046720" cy="411480"/>
           </a:xfrm>
           <a:prstGeom prst="rect">
             <a:avLst/>
@@ -6220,17 +6109,17 @@
               <a:buNone/>
             </a:pPr>
             <a:r>
-              <a:rPr lang="en-US" sz="1300" b="1" dirty="0">
-                <a:solidFill>
-                  <a:srgbClr val="0F1E36"/>
+              <a:rPr lang="en-US" sz="1200" b="1" dirty="0">
+                <a:solidFill>
+                  <a:srgbClr val="1A1A2E"/>
                 </a:solidFill>
                 <a:latin typeface="Cambria" pitchFamily="34" charset="0"/>
                 <a:ea typeface="Cambria" pitchFamily="34" charset="-122"/>
                 <a:cs typeface="Cambria" pitchFamily="34" charset="-120"/>
               </a:rPr>
-              <a:t>Проектирование нагрузки</a:t>
-            </a:r>
-            <a:endParaRPr lang="en-US" sz="1300" dirty="0"/>
+              <a:t>Проектируемые E2E сценарии и шаблон в Playwright</a:t>
+            </a:r>
+            <a:endParaRPr lang="en-US" sz="1200" dirty="0"/>
           </a:p>
         </p:txBody>
       </p:sp>
@@ -6242,8 +6131,8 @@
         </p:nvSpPr>
         <p:spPr>
           <a:xfrm>
-            <a:off x="521208" y="1325880"/>
-            <a:ext cx="3200400" cy="3387852"/>
+            <a:off x="548640" y="1417320"/>
+            <a:ext cx="8046720" cy="3296412"/>
           </a:xfrm>
           <a:prstGeom prst="rect">
             <a:avLst/>
@@ -6252,123 +6141,6 @@
           <a:ln/>
         </p:spPr>
         <p:txBody>
-          <a:bodyPr wrap="square" rtlCol="0" anchor="ctr"/>
-          <a:lstStyle/>
-          <a:p>
-            <a:pPr indent="0" marL="0">
-              <a:buNone/>
-            </a:pPr>
-            <a:r>
-              <a:rPr lang="en-US" sz="1100" dirty="0">
-                <a:solidFill>
-                  <a:srgbClr val="1E293B"/>
-                </a:solidFill>
-                <a:latin typeface="Calibri" pitchFamily="34" charset="0"/>
-                <a:ea typeface="Calibri" pitchFamily="34" charset="-122"/>
-                <a:cs typeface="Calibri" pitchFamily="34" charset="-120"/>
-              </a:rPr>
-              <a:t>• Инструмент Artillery позволяет генерировать сотни запросов в секунду (RPS).</a:t>
-            </a:r>
-            <a:endParaRPr lang="en-US" sz="1100" dirty="0"/>
-          </a:p>
-          <a:p>
-            <a:pPr indent="0" marL="0">
-              <a:buNone/>
-            </a:pPr>
-            <a:r>
-              <a:rPr lang="en-US" sz="1100" dirty="0">
-                <a:solidFill>
-                  <a:srgbClr val="1E293B"/>
-                </a:solidFill>
-                <a:latin typeface="Calibri" pitchFamily="34" charset="0"/>
-                <a:ea typeface="Calibri" pitchFamily="34" charset="-122"/>
-                <a:cs typeface="Calibri" pitchFamily="34" charset="-120"/>
-              </a:rPr>
-              <a:t>• Мы эмулируем реальное поведение 100 одновременных клиентов техподдержки.</a:t>
-            </a:r>
-            <a:endParaRPr lang="en-US" sz="1100" dirty="0"/>
-          </a:p>
-          <a:p>
-            <a:pPr indent="0" marL="0">
-              <a:buNone/>
-            </a:pPr>
-            <a:r>
-              <a:rPr lang="en-US" sz="1100" dirty="0">
-                <a:solidFill>
-                  <a:srgbClr val="1E293B"/>
-                </a:solidFill>
-                <a:latin typeface="Calibri" pitchFamily="34" charset="0"/>
-                <a:ea typeface="Calibri" pitchFamily="34" charset="-122"/>
-                <a:cs typeface="Calibri" pitchFamily="34" charset="-120"/>
-              </a:rPr>
-              <a:t>• Измеряются задержки ответов (Latency: p95, p99).</a:t>
-            </a:r>
-            <a:endParaRPr lang="en-US" sz="1100" dirty="0"/>
-          </a:p>
-          <a:p>
-            <a:pPr indent="0" marL="0">
-              <a:buNone/>
-            </a:pPr>
-            <a:r>
-              <a:rPr lang="en-US" sz="1100" dirty="0">
-                <a:solidFill>
-                  <a:srgbClr val="1E293B"/>
-                </a:solidFill>
-                <a:latin typeface="Calibri" pitchFamily="34" charset="0"/>
-                <a:ea typeface="Calibri" pitchFamily="34" charset="-122"/>
-                <a:cs typeface="Calibri" pitchFamily="34" charset="-120"/>
-              </a:rPr>
-              <a:t>• Верифицируется отсутствие ошибок 502/504.</a:t>
-            </a:r>
-            <a:endParaRPr lang="en-US" sz="1100" dirty="0"/>
-          </a:p>
-        </p:txBody>
-      </p:sp>
-      <p:sp>
-        <p:nvSpPr>
-          <p:cNvPr id="6" name="Shape 4"/>
-          <p:cNvSpPr/>
-          <p:nvPr/>
-        </p:nvSpPr>
-        <p:spPr>
-          <a:xfrm>
-            <a:off x="4133088" y="822960"/>
-            <a:ext cx="4626864" cy="4119372"/>
-          </a:xfrm>
-          <a:prstGeom prst="roundRect">
-            <a:avLst>
-              <a:gd name="adj" fmla="val 1776"/>
-            </a:avLst>
-          </a:prstGeom>
-          <a:solidFill>
-            <a:srgbClr val="0B132B"/>
-          </a:solidFill>
-          <a:ln w="12700">
-            <a:solidFill>
-              <a:srgbClr val="1E4070"/>
-            </a:solidFill>
-            <a:prstDash val="solid"/>
-          </a:ln>
-        </p:spPr>
-      </p:sp>
-      <p:sp>
-        <p:nvSpPr>
-          <p:cNvPr id="7" name="Text 5"/>
-          <p:cNvSpPr/>
-          <p:nvPr/>
-        </p:nvSpPr>
-        <p:spPr>
-          <a:xfrm>
-            <a:off x="4270248" y="905256"/>
-            <a:ext cx="4352544" cy="3954780"/>
-          </a:xfrm>
-          <a:prstGeom prst="rect">
-            <a:avLst/>
-          </a:prstGeom>
-          <a:noFill/>
-          <a:ln/>
-        </p:spPr>
-        <p:txBody>
           <a:bodyPr wrap="square" rtlCol="0" anchor="t"/>
           <a:lstStyle/>
           <a:p>
@@ -6376,238 +6148,142 @@
               <a:buNone/>
             </a:pPr>
             <a:r>
-              <a:rPr lang="en-US" sz="1050" dirty="0">
-                <a:solidFill>
-                  <a:srgbClr val="FFEDD5"/>
-                </a:solidFill>
-                <a:latin typeface="Courier New" pitchFamily="34" charset="0"/>
-                <a:ea typeface="Courier New" pitchFamily="34" charset="-122"/>
-                <a:cs typeface="Courier New" pitchFamily="34" charset="-120"/>
-              </a:rPr>
-              <a:t>config:</a:t>
-            </a:r>
-            <a:endParaRPr lang="en-US" sz="1050" dirty="0"/>
-          </a:p>
-          <a:p>
-            <a:pPr algn="l" indent="0" marL="0">
-              <a:buNone/>
-            </a:pPr>
-            <a:r>
-              <a:rPr lang="en-US" sz="1050" dirty="0">
-                <a:solidFill>
-                  <a:srgbClr val="FFEDD5"/>
-                </a:solidFill>
-                <a:latin typeface="Courier New" pitchFamily="34" charset="0"/>
-                <a:ea typeface="Courier New" pitchFamily="34" charset="-122"/>
-                <a:cs typeface="Courier New" pitchFamily="34" charset="-120"/>
-              </a:rPr>
-              <a:t>  target: 'http://localhost:3000'</a:t>
-            </a:r>
-            <a:endParaRPr lang="en-US" sz="1050" dirty="0"/>
-          </a:p>
-          <a:p>
-            <a:pPr algn="l" indent="0" marL="0">
-              <a:buNone/>
-            </a:pPr>
-            <a:r>
-              <a:rPr lang="en-US" sz="1050" dirty="0">
-                <a:solidFill>
-                  <a:srgbClr val="FFEDD5"/>
-                </a:solidFill>
-                <a:latin typeface="Courier New" pitchFamily="34" charset="0"/>
-                <a:ea typeface="Courier New" pitchFamily="34" charset="-122"/>
-                <a:cs typeface="Courier New" pitchFamily="34" charset="-120"/>
-              </a:rPr>
-              <a:t>  phases:</a:t>
-            </a:r>
-            <a:endParaRPr lang="en-US" sz="1050" dirty="0"/>
-          </a:p>
-          <a:p>
-            <a:pPr algn="l" indent="0" marL="0">
-              <a:buNone/>
-            </a:pPr>
-            <a:r>
-              <a:rPr lang="en-US" sz="1050" dirty="0">
-                <a:solidFill>
-                  <a:srgbClr val="FFEDD5"/>
-                </a:solidFill>
-                <a:latin typeface="Courier New" pitchFamily="34" charset="0"/>
-                <a:ea typeface="Courier New" pitchFamily="34" charset="-122"/>
-                <a:cs typeface="Courier New" pitchFamily="34" charset="-120"/>
-              </a:rPr>
-              <a:t>    - duration: 60</a:t>
-            </a:r>
-            <a:endParaRPr lang="en-US" sz="1050" dirty="0"/>
-          </a:p>
-          <a:p>
-            <a:pPr algn="l" indent="0" marL="0">
-              <a:buNone/>
-            </a:pPr>
-            <a:r>
-              <a:rPr lang="en-US" sz="1050" dirty="0">
-                <a:solidFill>
-                  <a:srgbClr val="FFEDD5"/>
-                </a:solidFill>
-                <a:latin typeface="Courier New" pitchFamily="34" charset="0"/>
-                <a:ea typeface="Courier New" pitchFamily="34" charset="-122"/>
-                <a:cs typeface="Courier New" pitchFamily="34" charset="-120"/>
-              </a:rPr>
-              <a:t>      arrivalRate: 5</a:t>
-            </a:r>
-            <a:endParaRPr lang="en-US" sz="1050" dirty="0"/>
-          </a:p>
-          <a:p>
-            <a:pPr algn="l" indent="0" marL="0">
-              <a:buNone/>
-            </a:pPr>
-            <a:r>
-              <a:rPr lang="en-US" sz="1050" dirty="0">
-                <a:solidFill>
-                  <a:srgbClr val="FFEDD5"/>
-                </a:solidFill>
-                <a:latin typeface="Courier New" pitchFamily="34" charset="0"/>
-                <a:ea typeface="Courier New" pitchFamily="34" charset="-122"/>
-                <a:cs typeface="Courier New" pitchFamily="34" charset="-120"/>
-              </a:rPr>
-              <a:t>      rampTo: 50</a:t>
-            </a:r>
-            <a:endParaRPr lang="en-US" sz="1050" dirty="0"/>
-          </a:p>
-          <a:p>
-            <a:pPr algn="l" indent="0" marL="0">
-              <a:buNone/>
-            </a:pPr>
-            <a:r>
-              <a:rPr lang="en-US" sz="1050" dirty="0">
-                <a:solidFill>
-                  <a:srgbClr val="FFEDD5"/>
-                </a:solidFill>
-                <a:latin typeface="Courier New" pitchFamily="34" charset="0"/>
-                <a:ea typeface="Courier New" pitchFamily="34" charset="-122"/>
-                <a:cs typeface="Courier New" pitchFamily="34" charset="-120"/>
-              </a:rPr>
-              <a:t>      name: 'Ramping load'</a:t>
-            </a:r>
-            <a:endParaRPr lang="en-US" sz="1050" dirty="0"/>
-          </a:p>
-          <a:p>
-            <a:pPr algn="l" indent="0" marL="0">
-              <a:buNone/>
-            </a:pPr>
-            <a:r>
-              <a:rPr lang="en-US" sz="1050" dirty="0">
-                <a:solidFill>
-                  <a:srgbClr val="FFEDD5"/>
-                </a:solidFill>
-                <a:latin typeface="Courier New" pitchFamily="34" charset="0"/>
-                <a:ea typeface="Courier New" pitchFamily="34" charset="-122"/>
-                <a:cs typeface="Courier New" pitchFamily="34" charset="-120"/>
-              </a:rPr>
-              <a:t>scenarios:</a:t>
-            </a:r>
-            <a:endParaRPr lang="en-US" sz="1050" dirty="0"/>
-          </a:p>
-          <a:p>
-            <a:pPr algn="l" indent="0" marL="0">
-              <a:buNone/>
-            </a:pPr>
-            <a:r>
-              <a:rPr lang="en-US" sz="1050" dirty="0">
-                <a:solidFill>
-                  <a:srgbClr val="FFEDD5"/>
-                </a:solidFill>
-                <a:latin typeface="Courier New" pitchFamily="34" charset="0"/>
-                <a:ea typeface="Courier New" pitchFamily="34" charset="-122"/>
-                <a:cs typeface="Courier New" pitchFamily="34" charset="-120"/>
-              </a:rPr>
-              <a:t>  - name: 'Check tickets and chat'</a:t>
-            </a:r>
-            <a:endParaRPr lang="en-US" sz="1050" dirty="0"/>
-          </a:p>
-          <a:p>
-            <a:pPr algn="l" indent="0" marL="0">
-              <a:buNone/>
-            </a:pPr>
-            <a:r>
-              <a:rPr lang="en-US" sz="1050" dirty="0">
-                <a:solidFill>
-                  <a:srgbClr val="FFEDD5"/>
-                </a:solidFill>
-                <a:latin typeface="Courier New" pitchFamily="34" charset="0"/>
-                <a:ea typeface="Courier New" pitchFamily="34" charset="-122"/>
-                <a:cs typeface="Courier New" pitchFamily="34" charset="-120"/>
-              </a:rPr>
-              <a:t>    flow:</a:t>
-            </a:r>
-            <a:endParaRPr lang="en-US" sz="1050" dirty="0"/>
-          </a:p>
-          <a:p>
-            <a:pPr algn="l" indent="0" marL="0">
-              <a:buNone/>
-            </a:pPr>
-            <a:r>
-              <a:rPr lang="en-US" sz="1050" dirty="0">
-                <a:solidFill>
-                  <a:srgbClr val="FFEDD5"/>
-                </a:solidFill>
-                <a:latin typeface="Courier New" pitchFamily="34" charset="0"/>
-                <a:ea typeface="Courier New" pitchFamily="34" charset="-122"/>
-                <a:cs typeface="Courier New" pitchFamily="34" charset="-120"/>
-              </a:rPr>
-              <a:t>      - get: { url: '/api/tickets' }</a:t>
-            </a:r>
-            <a:endParaRPr lang="en-US" sz="1050" dirty="0"/>
-          </a:p>
-          <a:p>
-            <a:pPr algn="l" indent="0" marL="0">
-              <a:buNone/>
-            </a:pPr>
-            <a:r>
-              <a:rPr lang="en-US" sz="1050" dirty="0">
-                <a:solidFill>
-                  <a:srgbClr val="FFEDD5"/>
-                </a:solidFill>
-                <a:latin typeface="Courier New" pitchFamily="34" charset="0"/>
-                <a:ea typeface="Courier New" pitchFamily="34" charset="-122"/>
-                <a:cs typeface="Courier New" pitchFamily="34" charset="-120"/>
-              </a:rPr>
-              <a:t>      - post:</a:t>
-            </a:r>
-            <a:endParaRPr lang="en-US" sz="1050" dirty="0"/>
-          </a:p>
-          <a:p>
-            <a:pPr algn="l" indent="0" marL="0">
-              <a:buNone/>
-            </a:pPr>
-            <a:r>
-              <a:rPr lang="en-US" sz="1050" dirty="0">
-                <a:solidFill>
-                  <a:srgbClr val="FFEDD5"/>
-                </a:solidFill>
-                <a:latin typeface="Courier New" pitchFamily="34" charset="0"/>
-                <a:ea typeface="Courier New" pitchFamily="34" charset="-122"/>
-                <a:cs typeface="Courier New" pitchFamily="34" charset="-120"/>
-              </a:rPr>
-              <a:t>          url: '/api/messages'</a:t>
-            </a:r>
-            <a:endParaRPr lang="en-US" sz="1050" dirty="0"/>
-          </a:p>
-          <a:p>
-            <a:pPr algn="l" indent="0" marL="0">
-              <a:buNone/>
-            </a:pPr>
-            <a:r>
-              <a:rPr lang="en-US" sz="1050" dirty="0">
-                <a:solidFill>
-                  <a:srgbClr val="FFEDD5"/>
-                </a:solidFill>
-                <a:latin typeface="Courier New" pitchFamily="34" charset="0"/>
-                <a:ea typeface="Courier New" pitchFamily="34" charset="-122"/>
-                <a:cs typeface="Courier New" pitchFamily="34" charset="-120"/>
-              </a:rPr>
-              <a:t>          json: { text: 'Performance test message' }</a:t>
-            </a:r>
-            <a:endParaRPr lang="en-US" sz="1050" dirty="0"/>
+              <a:rPr lang="en-US" sz="1600" dirty="0">
+                <a:solidFill>
+                  <a:srgbClr val="2D2D3A"/>
+                </a:solidFill>
+                <a:latin typeface="Times New Roman" pitchFamily="34" charset="0"/>
+                <a:ea typeface="Times New Roman" pitchFamily="34" charset="-122"/>
+                <a:cs typeface="Times New Roman" pitchFamily="34" charset="-120"/>
+              </a:rPr>
+              <a:t>Для проекта разработан и настроен шаблон сквозного E2E-тестирования в Playwright. Ввиду раздельного развертывания подсистем фронтенда и бэкенда, сквозные приемочные тесты будут полноценно активированы в CI/CD в фазе финальной сборки. На текущем этапе качество гарантировано модульными и API-тестами.</a:t>
+            </a:r>
+            <a:endParaRPr lang="en-US" sz="1600" dirty="0"/>
+          </a:p>
+          <a:p>
+            <a:pPr algn="l" indent="0" marL="0">
+              <a:buNone/>
+            </a:pPr>
+            <a:endParaRPr lang="en-US" sz="1600" dirty="0"/>
+          </a:p>
+          <a:p>
+            <a:pPr algn="l" indent="0" marL="0">
+              <a:buNone/>
+            </a:pPr>
+            <a:r>
+              <a:rPr lang="en-US" sz="1600" dirty="0">
+                <a:solidFill>
+                  <a:srgbClr val="2D2D3A"/>
+                </a:solidFill>
+                <a:latin typeface="Times New Roman" pitchFamily="34" charset="0"/>
+                <a:ea typeface="Times New Roman" pitchFamily="34" charset="-122"/>
+                <a:cs typeface="Times New Roman" pitchFamily="34" charset="-120"/>
+              </a:rPr>
+              <a:t>Шаблон сценария в Playwright:</a:t>
+            </a:r>
+            <a:endParaRPr lang="en-US" sz="1600" dirty="0"/>
+          </a:p>
+          <a:p>
+            <a:pPr algn="l" indent="0" marL="0">
+              <a:buNone/>
+            </a:pPr>
+            <a:r>
+              <a:rPr lang="en-US" sz="1600" dirty="0">
+                <a:solidFill>
+                  <a:srgbClr val="2D2D3A"/>
+                </a:solidFill>
+                <a:latin typeface="Times New Roman" pitchFamily="34" charset="0"/>
+                <a:ea typeface="Times New Roman" pitchFamily="34" charset="-122"/>
+                <a:cs typeface="Times New Roman" pitchFamily="34" charset="-120"/>
+              </a:rPr>
+              <a:t>1. Шаблон запускает браузер и открывает `/login`.</a:t>
+            </a:r>
+            <a:endParaRPr lang="en-US" sz="1600" dirty="0"/>
+          </a:p>
+          <a:p>
+            <a:pPr algn="l" indent="0" marL="0">
+              <a:buNone/>
+            </a:pPr>
+            <a:r>
+              <a:rPr lang="en-US" sz="1600" dirty="0">
+                <a:solidFill>
+                  <a:srgbClr val="2D2D3A"/>
+                </a:solidFill>
+                <a:latin typeface="Times New Roman" pitchFamily="34" charset="0"/>
+                <a:ea typeface="Times New Roman" pitchFamily="34" charset="-122"/>
+                <a:cs typeface="Times New Roman" pitchFamily="34" charset="-120"/>
+              </a:rPr>
+              <a:t>2. Эмулирует ввод телефона и SMS OTP (мок-код 111111).</a:t>
+            </a:r>
+            <a:endParaRPr lang="en-US" sz="1600" dirty="0"/>
+          </a:p>
+          <a:p>
+            <a:pPr algn="l" indent="0" marL="0">
+              <a:buNone/>
+            </a:pPr>
+            <a:r>
+              <a:rPr lang="en-US" sz="1600" dirty="0">
+                <a:solidFill>
+                  <a:srgbClr val="2D2D3A"/>
+                </a:solidFill>
+                <a:latin typeface="Times New Roman" pitchFamily="34" charset="0"/>
+                <a:ea typeface="Times New Roman" pitchFamily="34" charset="-122"/>
+                <a:cs typeface="Times New Roman" pitchFamily="34" charset="-120"/>
+              </a:rPr>
+              <a:t>3. Переходит в раздел 'Создать обращение'.</a:t>
+            </a:r>
+            <a:endParaRPr lang="en-US" sz="1600" dirty="0"/>
+          </a:p>
+          <a:p>
+            <a:pPr algn="l" indent="0" marL="0">
+              <a:buNone/>
+            </a:pPr>
+            <a:r>
+              <a:rPr lang="en-US" sz="1600" dirty="0">
+                <a:solidFill>
+                  <a:srgbClr val="2D2D3A"/>
+                </a:solidFill>
+                <a:latin typeface="Times New Roman" pitchFamily="34" charset="0"/>
+                <a:ea typeface="Times New Roman" pitchFamily="34" charset="-122"/>
+                <a:cs typeface="Times New Roman" pitchFamily="34" charset="-120"/>
+              </a:rPr>
+              <a:t>4. Описывает проблему техподдержки 1С, нажимает кнопку 'Отправить'.</a:t>
+            </a:r>
+            <a:endParaRPr lang="en-US" sz="1600" dirty="0"/>
+          </a:p>
+          <a:p>
+            <a:pPr algn="l" indent="0" marL="0">
+              <a:buNone/>
+            </a:pPr>
+            <a:r>
+              <a:rPr lang="en-US" sz="1600" dirty="0">
+                <a:solidFill>
+                  <a:srgbClr val="2D2D3A"/>
+                </a:solidFill>
+                <a:latin typeface="Times New Roman" pitchFamily="34" charset="0"/>
+                <a:ea typeface="Times New Roman" pitchFamily="34" charset="-122"/>
+                <a:cs typeface="Times New Roman" pitchFamily="34" charset="-120"/>
+              </a:rPr>
+              <a:t>5. Сверяет статус создания в интерфейсе и СУБД.</a:t>
+            </a:r>
+            <a:endParaRPr lang="en-US" sz="1600" dirty="0"/>
+          </a:p>
+          <a:p>
+            <a:pPr algn="l" indent="0" marL="0">
+              <a:buNone/>
+            </a:pPr>
+            <a:r>
+              <a:rPr lang="en-US" sz="1600" dirty="0">
+                <a:solidFill>
+                  <a:srgbClr val="2D2D3A"/>
+                </a:solidFill>
+                <a:latin typeface="Times New Roman" pitchFamily="34" charset="0"/>
+                <a:ea typeface="Times New Roman" pitchFamily="34" charset="-122"/>
+                <a:cs typeface="Times New Roman" pitchFamily="34" charset="-120"/>
+              </a:rPr>
+              <a:t>• Готов к полному запуску при интеграции фронтенда.</a:t>
+            </a:r>
+            <a:endParaRPr lang="en-US" sz="1600" dirty="0"/>
           </a:p>
         </p:txBody>
       </p:sp>
@@ -6668,17 +6344,17 @@
               <a:buNone/>
             </a:pPr>
             <a:r>
-              <a:rPr lang="en-US" sz="2000" b="1" dirty="0">
-                <a:solidFill>
-                  <a:srgbClr val="0F1E36"/>
-                </a:solidFill>
-                <a:latin typeface="Cambria" pitchFamily="34" charset="0"/>
-                <a:ea typeface="Cambria" pitchFamily="34" charset="-122"/>
-                <a:cs typeface="Cambria" pitchFamily="34" charset="-120"/>
-              </a:rPr>
-              <a:t>Тестирование безопасности: Аудит уязвимостей</a:t>
-            </a:r>
-            <a:endParaRPr lang="en-US" sz="2000" dirty="0"/>
+              <a:rPr lang="en-US" sz="1600" b="1" dirty="0">
+                <a:solidFill>
+                  <a:srgbClr val="1A1A2E"/>
+                </a:solidFill>
+                <a:latin typeface="Georgia" pitchFamily="34" charset="0"/>
+                <a:ea typeface="Georgia" pitchFamily="34" charset="-122"/>
+                <a:cs typeface="Georgia" pitchFamily="34" charset="-120"/>
+              </a:rPr>
+              <a:t>Нагрузочное тестирование: Сценарии Artillery</a:t>
+            </a:r>
+            <a:endParaRPr lang="en-US" sz="1600" dirty="0"/>
           </a:p>
         </p:txBody>
       </p:sp>
@@ -6691,26 +6367,26 @@
         <p:spPr>
           <a:xfrm>
             <a:off x="384048" y="822960"/>
-            <a:ext cx="4023360" cy="4119372"/>
+            <a:ext cx="3474720" cy="4119372"/>
           </a:xfrm>
           <a:prstGeom prst="roundRect">
             <a:avLst>
-              <a:gd name="adj" fmla="val 2273"/>
+              <a:gd name="adj" fmla="val 2632"/>
             </a:avLst>
           </a:prstGeom>
           <a:solidFill>
-            <a:srgbClr val="FFF7ED"/>
+            <a:srgbClr val="F8F4F0"/>
           </a:solidFill>
           <a:ln w="12700">
             <a:solidFill>
-              <a:srgbClr val="FFF7ED"/>
+              <a:srgbClr val="EFEAE3"/>
             </a:solidFill>
             <a:prstDash val="solid"/>
           </a:ln>
           <a:effectLst>
-            <a:outerShdw sx="100000" sy="100000" kx="0" ky="0" algn="bl" rotWithShape="0" blurRad="88900" dist="25400" dir="2700000">
+            <a:outerShdw sx="100000" sy="100000" kx="0" ky="0" algn="bl" rotWithShape="0" blurRad="152400" dist="38100" dir="2700000">
               <a:srgbClr val="000000">
-                <a:alpha val="9000"/>
+                <a:alpha val="12000"/>
               </a:srgbClr>
             </a:outerShdw>
           </a:effectLst>
@@ -6724,8 +6400,8 @@
         </p:nvSpPr>
         <p:spPr>
           <a:xfrm>
-            <a:off x="548640" y="932688"/>
-            <a:ext cx="3694176" cy="365760"/>
+            <a:off x="521208" y="932688"/>
+            <a:ext cx="3200400" cy="320040"/>
           </a:xfrm>
           <a:prstGeom prst="rect">
             <a:avLst/>
@@ -6741,17 +6417,17 @@
               <a:buNone/>
             </a:pPr>
             <a:r>
-              <a:rPr lang="en-US" sz="1300" b="1" dirty="0">
-                <a:solidFill>
-                  <a:srgbClr val="0F1E36"/>
+              <a:rPr lang="en-US" sz="1200" b="1" dirty="0">
+                <a:solidFill>
+                  <a:srgbClr val="1A1A2E"/>
                 </a:solidFill>
                 <a:latin typeface="Cambria" pitchFamily="34" charset="0"/>
                 <a:ea typeface="Cambria" pitchFamily="34" charset="-122"/>
                 <a:cs typeface="Cambria" pitchFamily="34" charset="-120"/>
               </a:rPr>
-              <a:t>Основные векторы по OWASP Top 10</a:t>
-            </a:r>
-            <a:endParaRPr lang="en-US" sz="1300" dirty="0"/>
+              <a:t>Проектирование нагрузки</a:t>
+            </a:r>
+            <a:endParaRPr lang="en-US" sz="1200" dirty="0"/>
           </a:p>
         </p:txBody>
       </p:sp>
@@ -6763,8 +6439,8 @@
         </p:nvSpPr>
         <p:spPr>
           <a:xfrm>
-            <a:off x="548640" y="1389888"/>
-            <a:ext cx="3694176" cy="2926080"/>
+            <a:off x="521208" y="1325880"/>
+            <a:ext cx="3200400" cy="3387852"/>
           </a:xfrm>
           <a:prstGeom prst="rect">
             <a:avLst/>
@@ -6773,42 +6449,76 @@
           <a:ln/>
         </p:spPr>
         <p:txBody>
-          <a:bodyPr wrap="square" rtlCol="0" anchor="ctr"/>
-          <a:lstStyle/>
-          <a:p>
-            <a:pPr indent="0" marL="0">
+          <a:bodyPr wrap="square" rtlCol="0" anchor="t"/>
+          <a:lstStyle/>
+          <a:p>
+            <a:pPr algn="l" indent="0" marL="0">
               <a:buNone/>
             </a:pPr>
             <a:r>
               <a:rPr lang="en-US" sz="1100" dirty="0">
                 <a:solidFill>
-                  <a:srgbClr val="1E293B"/>
-                </a:solidFill>
-                <a:latin typeface="Calibri" pitchFamily="34" charset="0"/>
-                <a:ea typeface="Calibri" pitchFamily="34" charset="-122"/>
-                <a:cs typeface="Calibri" pitchFamily="34" charset="-120"/>
-              </a:rPr>
-              <a:t>• SQL Injection: автоматические тесты шлют в API кавычки и специальные конструкции вроде `' OR 1=1 --`. Использование Drizzle параметризации гарантирует 100% защиту.</a:t>
+                  <a:srgbClr val="2D2D3A"/>
+                </a:solidFill>
+                <a:latin typeface="Times New Roman" pitchFamily="34" charset="0"/>
+                <a:ea typeface="Times New Roman" pitchFamily="34" charset="-122"/>
+                <a:cs typeface="Times New Roman" pitchFamily="34" charset="-120"/>
+              </a:rPr>
+              <a:t>• Инструмент Artillery позволяет генерировать сотни запросов в секунду (RPS).</a:t>
             </a:r>
             <a:endParaRPr lang="en-US" sz="1100" dirty="0"/>
           </a:p>
           <a:p>
-            <a:pPr indent="0" marL="0">
+            <a:pPr algn="l" indent="0" marL="0">
               <a:buNone/>
             </a:pPr>
             <a:r>
               <a:rPr lang="en-US" sz="1100" dirty="0">
                 <a:solidFill>
-                  <a:srgbClr val="1E293B"/>
-                </a:solidFill>
-                <a:latin typeface="Calibri" pitchFamily="34" charset="0"/>
-                <a:ea typeface="Calibri" pitchFamily="34" charset="-122"/>
-                <a:cs typeface="Calibri" pitchFamily="34" charset="-120"/>
-              </a:rPr>
-              <a:t>• Broken Authentication: проверка блокировки сессий при передаче истекших или сломанных JWT-токенов.</a:t>
+                  <a:srgbClr val="2D2D3A"/>
+                </a:solidFill>
+                <a:latin typeface="Times New Roman" pitchFamily="34" charset="0"/>
+                <a:ea typeface="Times New Roman" pitchFamily="34" charset="-122"/>
+                <a:cs typeface="Times New Roman" pitchFamily="34" charset="-120"/>
+              </a:rPr>
+              <a:t>• Мы эмулируем реальное поведение 100 одновременных клиентов техподдержки.</a:t>
             </a:r>
             <a:endParaRPr lang="en-US" sz="1100" dirty="0"/>
           </a:p>
+          <a:p>
+            <a:pPr algn="l" indent="0" marL="0">
+              <a:buNone/>
+            </a:pPr>
+            <a:r>
+              <a:rPr lang="en-US" sz="1100" dirty="0">
+                <a:solidFill>
+                  <a:srgbClr val="2D2D3A"/>
+                </a:solidFill>
+                <a:latin typeface="Times New Roman" pitchFamily="34" charset="0"/>
+                <a:ea typeface="Times New Roman" pitchFamily="34" charset="-122"/>
+                <a:cs typeface="Times New Roman" pitchFamily="34" charset="-120"/>
+              </a:rPr>
+              <a:t>• Измеряются задержки ответов (Latency: p95, p99).</a:t>
+            </a:r>
+            <a:endParaRPr lang="en-US" sz="1100" dirty="0"/>
+          </a:p>
+          <a:p>
+            <a:pPr algn="l" indent="0" marL="0">
+              <a:buNone/>
+            </a:pPr>
+            <a:r>
+              <a:rPr lang="en-US" sz="1100" dirty="0">
+                <a:solidFill>
+                  <a:srgbClr val="2D2D3A"/>
+                </a:solidFill>
+                <a:latin typeface="Times New Roman" pitchFamily="34" charset="0"/>
+                <a:ea typeface="Times New Roman" pitchFamily="34" charset="-122"/>
+                <a:cs typeface="Times New Roman" pitchFamily="34" charset="-120"/>
+              </a:rPr>
+              <a:t>• Верифицируется отсутствие ошибок 502/504.</a:t>
+            </a:r>
+            <a:endParaRPr lang="en-US" sz="1100" dirty="0"/>
+          </a:p>
         </p:txBody>
       </p:sp>
       <p:sp>
@@ -6819,30 +6529,23 @@
         </p:nvSpPr>
         <p:spPr>
           <a:xfrm>
-            <a:off x="4681728" y="822960"/>
-            <a:ext cx="4078224" cy="4119372"/>
+            <a:off x="4133088" y="822960"/>
+            <a:ext cx="4626864" cy="4119372"/>
           </a:xfrm>
           <a:prstGeom prst="roundRect">
             <a:avLst>
-              <a:gd name="adj" fmla="val 2242"/>
+              <a:gd name="adj" fmla="val 1776"/>
             </a:avLst>
           </a:prstGeom>
           <a:solidFill>
-            <a:srgbClr val="D1FAE5"/>
+            <a:srgbClr val="1A1A2E"/>
           </a:solidFill>
           <a:ln w="12700">
             <a:solidFill>
-              <a:srgbClr val="D1FAE5"/>
+              <a:srgbClr val="2A2A4A"/>
             </a:solidFill>
             <a:prstDash val="solid"/>
           </a:ln>
-          <a:effectLst>
-            <a:outerShdw sx="100000" sy="100000" kx="0" ky="0" algn="bl" rotWithShape="0" blurRad="88900" dist="25400" dir="2700000">
-              <a:srgbClr val="000000">
-                <a:alpha val="9000"/>
-              </a:srgbClr>
-            </a:outerShdw>
-          </a:effectLst>
         </p:spPr>
       </p:sp>
       <p:sp>
@@ -6853,8 +6556,8 @@
         </p:nvSpPr>
         <p:spPr>
           <a:xfrm>
-            <a:off x="4846320" y="932688"/>
-            <a:ext cx="3749040" cy="365760"/>
+            <a:off x="4270248" y="905256"/>
+            <a:ext cx="4352544" cy="3954780"/>
           </a:xfrm>
           <a:prstGeom prst="rect">
             <a:avLst/>
@@ -6863,80 +6566,245 @@
           <a:ln/>
         </p:spPr>
         <p:txBody>
-          <a:bodyPr wrap="square" rtlCol="0" anchor="ctr"/>
-          <a:lstStyle/>
-          <a:p>
-            <a:pPr indent="0" marL="0">
-              <a:buNone/>
-            </a:pPr>
-            <a:r>
-              <a:rPr lang="en-US" sz="1300" b="1" dirty="0">
-                <a:solidFill>
-                  <a:srgbClr val="0F1E36"/>
-                </a:solidFill>
-                <a:latin typeface="Cambria" pitchFamily="34" charset="0"/>
-                <a:ea typeface="Cambria" pitchFamily="34" charset="-122"/>
-                <a:cs typeface="Cambria" pitchFamily="34" charset="-120"/>
-              </a:rPr>
-              <a:t>Защита файлов и утечек</a:t>
-            </a:r>
-            <a:endParaRPr lang="en-US" sz="1300" dirty="0"/>
-          </a:p>
-        </p:txBody>
-      </p:sp>
-      <p:sp>
-        <p:nvSpPr>
-          <p:cNvPr id="8" name="Text 6"/>
-          <p:cNvSpPr/>
-          <p:nvPr/>
-        </p:nvSpPr>
-        <p:spPr>
-          <a:xfrm>
-            <a:off x="4846320" y="1389888"/>
-            <a:ext cx="3749040" cy="2926080"/>
-          </a:xfrm>
-          <a:prstGeom prst="rect">
-            <a:avLst/>
-          </a:prstGeom>
-          <a:noFill/>
-          <a:ln/>
-        </p:spPr>
-        <p:txBody>
-          <a:bodyPr wrap="square" rtlCol="0" anchor="ctr"/>
-          <a:lstStyle/>
-          <a:p>
-            <a:pPr indent="0" marL="0">
-              <a:buNone/>
-            </a:pPr>
-            <a:r>
-              <a:rPr lang="en-US" sz="1100" dirty="0">
-                <a:solidFill>
-                  <a:srgbClr val="1E293B"/>
-                </a:solidFill>
-                <a:latin typeface="Calibri" pitchFamily="34" charset="0"/>
-                <a:ea typeface="Calibri" pitchFamily="34" charset="-122"/>
-                <a:cs typeface="Calibri" pitchFamily="34" charset="-120"/>
-              </a:rPr>
-              <a:t>• Приватность вложений: тесты проверяют, что клиент Б не сможет прочитать вложения клиента А по прямой ссылке, так как S3 presigned-ссылки привязаны к сессиям конкретного пользователя.</a:t>
-            </a:r>
-            <a:endParaRPr lang="en-US" sz="1100" dirty="0"/>
-          </a:p>
-          <a:p>
-            <a:pPr indent="0" marL="0">
-              <a:buNone/>
-            </a:pPr>
-            <a:r>
-              <a:rPr lang="en-US" sz="1100" dirty="0">
-                <a:solidFill>
-                  <a:srgbClr val="1E293B"/>
-                </a:solidFill>
-                <a:latin typeface="Calibri" pitchFamily="34" charset="0"/>
-                <a:ea typeface="Calibri" pitchFamily="34" charset="-122"/>
-                <a:cs typeface="Calibri" pitchFamily="34" charset="-120"/>
-              </a:rPr>
-              <a:t>• Маскирование паролей и логов: автоматический тест проверяет, что в логи NodeJS не улетают хэши и токены.</a:t>
-            </a:r>
-            <a:endParaRPr lang="en-US" sz="1100" dirty="0"/>
+          <a:bodyPr wrap="square" rtlCol="0" anchor="t"/>
+          <a:lstStyle/>
+          <a:p>
+            <a:pPr algn="l" indent="0" marL="0">
+              <a:buNone/>
+            </a:pPr>
+            <a:r>
+              <a:rPr lang="en-US" sz="1050" dirty="0">
+                <a:solidFill>
+                  <a:srgbClr val="F8F4F0"/>
+                </a:solidFill>
+                <a:latin typeface="Courier New" pitchFamily="34" charset="0"/>
+                <a:ea typeface="Courier New" pitchFamily="34" charset="-122"/>
+                <a:cs typeface="Courier New" pitchFamily="34" charset="-120"/>
+              </a:rPr>
+              <a:t>config:</a:t>
+            </a:r>
+            <a:endParaRPr lang="en-US" sz="1050" dirty="0"/>
+          </a:p>
+          <a:p>
+            <a:pPr algn="l" indent="0" marL="0">
+              <a:buNone/>
+            </a:pPr>
+            <a:r>
+              <a:rPr lang="en-US" sz="1050" dirty="0">
+                <a:solidFill>
+                  <a:srgbClr val="F8F4F0"/>
+                </a:solidFill>
+                <a:latin typeface="Courier New" pitchFamily="34" charset="0"/>
+                <a:ea typeface="Courier New" pitchFamily="34" charset="-122"/>
+                <a:cs typeface="Courier New" pitchFamily="34" charset="-120"/>
+              </a:rPr>
+              <a:t>  target: 'http://localhost:3000'</a:t>
+            </a:r>
+            <a:endParaRPr lang="en-US" sz="1050" dirty="0"/>
+          </a:p>
+          <a:p>
+            <a:pPr algn="l" indent="0" marL="0">
+              <a:buNone/>
+            </a:pPr>
+            <a:r>
+              <a:rPr lang="en-US" sz="1050" dirty="0">
+                <a:solidFill>
+                  <a:srgbClr val="F8F4F0"/>
+                </a:solidFill>
+                <a:latin typeface="Courier New" pitchFamily="34" charset="0"/>
+                <a:ea typeface="Courier New" pitchFamily="34" charset="-122"/>
+                <a:cs typeface="Courier New" pitchFamily="34" charset="-120"/>
+              </a:rPr>
+              <a:t>  phases:</a:t>
+            </a:r>
+            <a:endParaRPr lang="en-US" sz="1050" dirty="0"/>
+          </a:p>
+          <a:p>
+            <a:pPr algn="l" indent="0" marL="0">
+              <a:buNone/>
+            </a:pPr>
+            <a:r>
+              <a:rPr lang="en-US" sz="1050" dirty="0">
+                <a:solidFill>
+                  <a:srgbClr val="F8F4F0"/>
+                </a:solidFill>
+                <a:latin typeface="Courier New" pitchFamily="34" charset="0"/>
+                <a:ea typeface="Courier New" pitchFamily="34" charset="-122"/>
+                <a:cs typeface="Courier New" pitchFamily="34" charset="-120"/>
+              </a:rPr>
+              <a:t>    - duration: 60</a:t>
+            </a:r>
+            <a:endParaRPr lang="en-US" sz="1050" dirty="0"/>
+          </a:p>
+          <a:p>
+            <a:pPr algn="l" indent="0" marL="0">
+              <a:buNone/>
+            </a:pPr>
+            <a:r>
+              <a:rPr lang="en-US" sz="1050" dirty="0">
+                <a:solidFill>
+                  <a:srgbClr val="F8F4F0"/>
+                </a:solidFill>
+                <a:latin typeface="Courier New" pitchFamily="34" charset="0"/>
+                <a:ea typeface="Courier New" pitchFamily="34" charset="-122"/>
+                <a:cs typeface="Courier New" pitchFamily="34" charset="-120"/>
+              </a:rPr>
+              <a:t>      arrivalRate: 5</a:t>
+            </a:r>
+            <a:endParaRPr lang="en-US" sz="1050" dirty="0"/>
+          </a:p>
+          <a:p>
+            <a:pPr algn="l" indent="0" marL="0">
+              <a:buNone/>
+            </a:pPr>
+            <a:r>
+              <a:rPr lang="en-US" sz="1050" dirty="0">
+                <a:solidFill>
+                  <a:srgbClr val="F8F4F0"/>
+                </a:solidFill>
+                <a:latin typeface="Courier New" pitchFamily="34" charset="0"/>
+                <a:ea typeface="Courier New" pitchFamily="34" charset="-122"/>
+                <a:cs typeface="Courier New" pitchFamily="34" charset="-120"/>
+              </a:rPr>
+              <a:t>      rampTo: 50</a:t>
+            </a:r>
+            <a:endParaRPr lang="en-US" sz="1050" dirty="0"/>
+          </a:p>
+          <a:p>
+            <a:pPr algn="l" indent="0" marL="0">
+              <a:buNone/>
+            </a:pPr>
+            <a:r>
+              <a:rPr lang="en-US" sz="1050" dirty="0">
+                <a:solidFill>
+                  <a:srgbClr val="F8F4F0"/>
+                </a:solidFill>
+                <a:latin typeface="Courier New" pitchFamily="34" charset="0"/>
+                <a:ea typeface="Courier New" pitchFamily="34" charset="-122"/>
+                <a:cs typeface="Courier New" pitchFamily="34" charset="-120"/>
+              </a:rPr>
+              <a:t>      name: 'Ramping load'</a:t>
+            </a:r>
+            <a:endParaRPr lang="en-US" sz="1050" dirty="0"/>
+          </a:p>
+          <a:p>
+            <a:pPr algn="l" indent="0" marL="0">
+              <a:buNone/>
+            </a:pPr>
+            <a:r>
+              <a:rPr lang="en-US" sz="1050" dirty="0">
+                <a:solidFill>
+                  <a:srgbClr val="F8F4F0"/>
+                </a:solidFill>
+                <a:latin typeface="Courier New" pitchFamily="34" charset="0"/>
+                <a:ea typeface="Courier New" pitchFamily="34" charset="-122"/>
+                <a:cs typeface="Courier New" pitchFamily="34" charset="-120"/>
+              </a:rPr>
+              <a:t>scenarios:</a:t>
+            </a:r>
+            <a:endParaRPr lang="en-US" sz="1050" dirty="0"/>
+          </a:p>
+          <a:p>
+            <a:pPr algn="l" indent="0" marL="0">
+              <a:buNone/>
+            </a:pPr>
+            <a:r>
+              <a:rPr lang="en-US" sz="1050" dirty="0">
+                <a:solidFill>
+                  <a:srgbClr val="F8F4F0"/>
+                </a:solidFill>
+                <a:latin typeface="Courier New" pitchFamily="34" charset="0"/>
+                <a:ea typeface="Courier New" pitchFamily="34" charset="-122"/>
+                <a:cs typeface="Courier New" pitchFamily="34" charset="-120"/>
+              </a:rPr>
+              <a:t>  - name: 'Check tickets and chat'</a:t>
+            </a:r>
+            <a:endParaRPr lang="en-US" sz="1050" dirty="0"/>
+          </a:p>
+          <a:p>
+            <a:pPr algn="l" indent="0" marL="0">
+              <a:buNone/>
+            </a:pPr>
+            <a:r>
+              <a:rPr lang="en-US" sz="1050" dirty="0">
+                <a:solidFill>
+                  <a:srgbClr val="F8F4F0"/>
+                </a:solidFill>
+                <a:latin typeface="Courier New" pitchFamily="34" charset="0"/>
+                <a:ea typeface="Courier New" pitchFamily="34" charset="-122"/>
+                <a:cs typeface="Courier New" pitchFamily="34" charset="-120"/>
+              </a:rPr>
+              <a:t>    flow:</a:t>
+            </a:r>
+            <a:endParaRPr lang="en-US" sz="1050" dirty="0"/>
+          </a:p>
+          <a:p>
+            <a:pPr algn="l" indent="0" marL="0">
+              <a:buNone/>
+            </a:pPr>
+            <a:r>
+              <a:rPr lang="en-US" sz="1050" dirty="0">
+                <a:solidFill>
+                  <a:srgbClr val="F8F4F0"/>
+                </a:solidFill>
+                <a:latin typeface="Courier New" pitchFamily="34" charset="0"/>
+                <a:ea typeface="Courier New" pitchFamily="34" charset="-122"/>
+                <a:cs typeface="Courier New" pitchFamily="34" charset="-120"/>
+              </a:rPr>
+              <a:t>      - get: { url: '/api/tickets' }</a:t>
+            </a:r>
+            <a:endParaRPr lang="en-US" sz="1050" dirty="0"/>
+          </a:p>
+          <a:p>
+            <a:pPr algn="l" indent="0" marL="0">
+              <a:buNone/>
+            </a:pPr>
+            <a:r>
+              <a:rPr lang="en-US" sz="1050" dirty="0">
+                <a:solidFill>
+                  <a:srgbClr val="F8F4F0"/>
+                </a:solidFill>
+                <a:latin typeface="Courier New" pitchFamily="34" charset="0"/>
+                <a:ea typeface="Courier New" pitchFamily="34" charset="-122"/>
+                <a:cs typeface="Courier New" pitchFamily="34" charset="-120"/>
+              </a:rPr>
+              <a:t>      - post:</a:t>
+            </a:r>
+            <a:endParaRPr lang="en-US" sz="1050" dirty="0"/>
+          </a:p>
+          <a:p>
+            <a:pPr algn="l" indent="0" marL="0">
+              <a:buNone/>
+            </a:pPr>
+            <a:r>
+              <a:rPr lang="en-US" sz="1050" dirty="0">
+                <a:solidFill>
+                  <a:srgbClr val="F8F4F0"/>
+                </a:solidFill>
+                <a:latin typeface="Courier New" pitchFamily="34" charset="0"/>
+                <a:ea typeface="Courier New" pitchFamily="34" charset="-122"/>
+                <a:cs typeface="Courier New" pitchFamily="34" charset="-120"/>
+              </a:rPr>
+              <a:t>          url: '/api/messages'</a:t>
+            </a:r>
+            <a:endParaRPr lang="en-US" sz="1050" dirty="0"/>
+          </a:p>
+          <a:p>
+            <a:pPr algn="l" indent="0" marL="0">
+              <a:buNone/>
+            </a:pPr>
+            <a:r>
+              <a:rPr lang="en-US" sz="1050" dirty="0">
+                <a:solidFill>
+                  <a:srgbClr val="F8F4F0"/>
+                </a:solidFill>
+                <a:latin typeface="Courier New" pitchFamily="34" charset="0"/>
+                <a:ea typeface="Courier New" pitchFamily="34" charset="-122"/>
+                <a:cs typeface="Courier New" pitchFamily="34" charset="-120"/>
+              </a:rPr>
+              <a:t>          json: { text: 'Performance test message' }</a:t>
+            </a:r>
+            <a:endParaRPr lang="en-US" sz="1050" dirty="0"/>
           </a:p>
         </p:txBody>
       </p:sp>
@@ -6997,17 +6865,17 @@
               <a:buNone/>
             </a:pPr>
             <a:r>
-              <a:rPr lang="en-US" sz="2000" b="1" dirty="0">
-                <a:solidFill>
-                  <a:srgbClr val="0F1E36"/>
-                </a:solidFill>
-                <a:latin typeface="Cambria" pitchFamily="34" charset="0"/>
-                <a:ea typeface="Cambria" pitchFamily="34" charset="-122"/>
-                <a:cs typeface="Cambria" pitchFamily="34" charset="-120"/>
-              </a:rPr>
-              <a:t>Отказоустойчивость: тестирование синка 1С</a:t>
-            </a:r>
-            <a:endParaRPr lang="en-US" sz="2000" dirty="0"/>
+              <a:rPr lang="en-US" sz="1600" b="1" dirty="0">
+                <a:solidFill>
+                  <a:srgbClr val="1A1A2E"/>
+                </a:solidFill>
+                <a:latin typeface="Georgia" pitchFamily="34" charset="0"/>
+                <a:ea typeface="Georgia" pitchFamily="34" charset="-122"/>
+                <a:cs typeface="Georgia" pitchFamily="34" charset="-120"/>
+              </a:rPr>
+              <a:t>Тестирование безопасности: Аудит уязвимостей</a:t>
+            </a:r>
+            <a:endParaRPr lang="en-US" sz="1600" dirty="0"/>
           </a:p>
         </p:txBody>
       </p:sp>
@@ -7020,26 +6888,26 @@
         <p:spPr>
           <a:xfrm>
             <a:off x="384048" y="822960"/>
-            <a:ext cx="4023360" cy="4119372"/>
+            <a:ext cx="8375904" cy="4119372"/>
           </a:xfrm>
           <a:prstGeom prst="roundRect">
             <a:avLst>
-              <a:gd name="adj" fmla="val 2273"/>
+              <a:gd name="adj" fmla="val 2220"/>
             </a:avLst>
           </a:prstGeom>
           <a:solidFill>
-            <a:srgbClr val="FFF7ED"/>
+            <a:srgbClr val="F8F4F0"/>
           </a:solidFill>
           <a:ln w="12700">
             <a:solidFill>
-              <a:srgbClr val="FFF7ED"/>
+              <a:srgbClr val="EFEAE3"/>
             </a:solidFill>
             <a:prstDash val="solid"/>
           </a:ln>
           <a:effectLst>
-            <a:outerShdw sx="100000" sy="100000" kx="0" ky="0" algn="bl" rotWithShape="0" blurRad="88900" dist="25400" dir="2700000">
+            <a:outerShdw sx="100000" sy="100000" kx="0" ky="0" algn="bl" rotWithShape="0" blurRad="152400" dist="38100" dir="2700000">
               <a:srgbClr val="000000">
-                <a:alpha val="9000"/>
+                <a:alpha val="12000"/>
               </a:srgbClr>
             </a:outerShdw>
           </a:effectLst>
@@ -7054,7 +6922,7 @@
         <p:spPr>
           <a:xfrm>
             <a:off x="548640" y="932688"/>
-            <a:ext cx="3694176" cy="365760"/>
+            <a:ext cx="8046720" cy="411480"/>
           </a:xfrm>
           <a:prstGeom prst="rect">
             <a:avLst/>
@@ -7070,17 +6938,17 @@
               <a:buNone/>
             </a:pPr>
             <a:r>
-              <a:rPr lang="en-US" sz="1300" b="1" dirty="0">
-                <a:solidFill>
-                  <a:srgbClr val="0F1E36"/>
+              <a:rPr lang="en-US" sz="1200" b="1" dirty="0">
+                <a:solidFill>
+                  <a:srgbClr val="1A1A2E"/>
                 </a:solidFill>
                 <a:latin typeface="Cambria" pitchFamily="34" charset="0"/>
                 <a:ea typeface="Cambria" pitchFamily="34" charset="-122"/>
                 <a:cs typeface="Cambria" pitchFamily="34" charset="-120"/>
               </a:rPr>
-              <a:t>Проверка сценариев разрыва сети</a:t>
-            </a:r>
-            <a:endParaRPr lang="en-US" sz="1300" dirty="0"/>
+              <a:t>Основные векторы по OWASP Top 10 и защита файлов</a:t>
+            </a:r>
+            <a:endParaRPr lang="en-US" sz="1200" dirty="0"/>
           </a:p>
         </p:txBody>
       </p:sp>
@@ -7092,8 +6960,8 @@
         </p:nvSpPr>
         <p:spPr>
           <a:xfrm>
-            <a:off x="548640" y="1389888"/>
-            <a:ext cx="3694176" cy="2926080"/>
+            <a:off x="548640" y="1417320"/>
+            <a:ext cx="8046720" cy="3296412"/>
           </a:xfrm>
           <a:prstGeom prst="rect">
             <a:avLst/>
@@ -7102,153 +6970,115 @@
           <a:ln/>
         </p:spPr>
         <p:txBody>
-          <a:bodyPr wrap="square" rtlCol="0" anchor="ctr"/>
-          <a:lstStyle/>
-          <a:p>
-            <a:pPr indent="0" marL="0">
-              <a:buNone/>
-            </a:pPr>
-            <a:r>
-              <a:rPr lang="en-US" sz="1150" dirty="0">
-                <a:solidFill>
-                  <a:srgbClr val="1E293B"/>
-                </a:solidFill>
-                <a:latin typeface="Calibri" pitchFamily="34" charset="0"/>
-                <a:ea typeface="Calibri" pitchFamily="34" charset="-122"/>
-                <a:cs typeface="Calibri" pitchFamily="34" charset="-120"/>
-              </a:rPr>
-              <a:t>Специальный интеграционный тест эмулирует временное отключение симулятора 1С (имитация сбоя связи в ООО 'Неосистемы'). Воркер outbox должен зафиксировать сбой связи, перевести событие в статус `failed` и запустить таймер повторных отложенных попыток.</a:t>
-            </a:r>
-            <a:endParaRPr lang="en-US" sz="1150" dirty="0"/>
-          </a:p>
-        </p:txBody>
-      </p:sp>
-      <p:sp>
-        <p:nvSpPr>
-          <p:cNvPr id="6" name="Shape 4"/>
-          <p:cNvSpPr/>
-          <p:nvPr/>
-        </p:nvSpPr>
-        <p:spPr>
-          <a:xfrm>
-            <a:off x="4681728" y="822960"/>
-            <a:ext cx="4078224" cy="4119372"/>
-          </a:xfrm>
-          <a:prstGeom prst="roundRect">
-            <a:avLst>
-              <a:gd name="adj" fmla="val 2242"/>
-            </a:avLst>
-          </a:prstGeom>
-          <a:solidFill>
-            <a:srgbClr val="D1FAE5"/>
-          </a:solidFill>
-          <a:ln w="12700">
-            <a:solidFill>
-              <a:srgbClr val="D1FAE5"/>
-            </a:solidFill>
-            <a:prstDash val="solid"/>
-          </a:ln>
-          <a:effectLst>
-            <a:outerShdw sx="100000" sy="100000" kx="0" ky="0" algn="bl" rotWithShape="0" blurRad="88900" dist="25400" dir="2700000">
-              <a:srgbClr val="000000">
-                <a:alpha val="9000"/>
-              </a:srgbClr>
-            </a:outerShdw>
-          </a:effectLst>
-        </p:spPr>
-      </p:sp>
-      <p:sp>
-        <p:nvSpPr>
-          <p:cNvPr id="7" name="Text 5"/>
-          <p:cNvSpPr/>
-          <p:nvPr/>
-        </p:nvSpPr>
-        <p:spPr>
-          <a:xfrm>
-            <a:off x="4846320" y="932688"/>
-            <a:ext cx="3749040" cy="365760"/>
-          </a:xfrm>
-          <a:prstGeom prst="rect">
-            <a:avLst/>
-          </a:prstGeom>
-          <a:noFill/>
-          <a:ln/>
-        </p:spPr>
-        <p:txBody>
-          <a:bodyPr wrap="square" rtlCol="0" anchor="ctr"/>
-          <a:lstStyle/>
-          <a:p>
-            <a:pPr indent="0" marL="0">
-              <a:buNone/>
-            </a:pPr>
-            <a:r>
-              <a:rPr lang="en-US" sz="1300" b="1" dirty="0">
-                <a:solidFill>
-                  <a:srgbClr val="0F1E36"/>
-                </a:solidFill>
-                <a:latin typeface="Cambria" pitchFamily="34" charset="0"/>
-                <a:ea typeface="Cambria" pitchFamily="34" charset="-122"/>
-                <a:cs typeface="Cambria" pitchFamily="34" charset="-120"/>
-              </a:rPr>
-              <a:t>Проверка целостности очереди</a:t>
-            </a:r>
-            <a:endParaRPr lang="en-US" sz="1300" dirty="0"/>
-          </a:p>
-        </p:txBody>
-      </p:sp>
-      <p:sp>
-        <p:nvSpPr>
-          <p:cNvPr id="8" name="Text 6"/>
-          <p:cNvSpPr/>
-          <p:nvPr/>
-        </p:nvSpPr>
-        <p:spPr>
-          <a:xfrm>
-            <a:off x="4846320" y="1389888"/>
-            <a:ext cx="3749040" cy="2926080"/>
-          </a:xfrm>
-          <a:prstGeom prst="rect">
-            <a:avLst/>
-          </a:prstGeom>
-          <a:noFill/>
-          <a:ln/>
-        </p:spPr>
-        <p:txBody>
-          <a:bodyPr wrap="square" rtlCol="0" anchor="ctr"/>
-          <a:lstStyle/>
-          <a:p>
-            <a:pPr indent="0" marL="0">
-              <a:buNone/>
-            </a:pPr>
-            <a:r>
-              <a:rPr lang="en-US" sz="1100" dirty="0">
-                <a:solidFill>
-                  <a:srgbClr val="1E293B"/>
-                </a:solidFill>
-                <a:latin typeface="Calibri" pitchFamily="34" charset="0"/>
-                <a:ea typeface="Calibri" pitchFamily="34" charset="-122"/>
-                <a:cs typeface="Calibri" pitchFamily="34" charset="-120"/>
-              </a:rPr>
-              <a:t>• Тест гарантирует, что ни один тикет не продублируется в 1С дважды при повторных синк-попытках (проверка идемпотентности).</a:t>
-            </a:r>
-            <a:endParaRPr lang="en-US" sz="1100" dirty="0"/>
-          </a:p>
-          <a:p>
-            <a:pPr indent="0" marL="0">
-              <a:buNone/>
-            </a:pPr>
-            <a:r>
-              <a:rPr lang="en-US" sz="1100" dirty="0">
-                <a:solidFill>
-                  <a:srgbClr val="1E293B"/>
-                </a:solidFill>
-                <a:latin typeface="Calibri" pitchFamily="34" charset="0"/>
-                <a:ea typeface="Calibri" pitchFamily="34" charset="-122"/>
-                <a:cs typeface="Calibri" pitchFamily="34" charset="-120"/>
-              </a:rPr>
-              <a:t>• Контроль порядка: тесты проверяют, что сообщения чата приходят в 1С в хронологическом порядке, даже если отправка зависала из-за разрывов связи.</a:t>
-            </a:r>
-            <a:endParaRPr lang="en-US" sz="1100" dirty="0"/>
+          <a:bodyPr wrap="square" rtlCol="0" anchor="t"/>
+          <a:lstStyle/>
+          <a:p>
+            <a:pPr algn="l" indent="0" marL="0">
+              <a:buNone/>
+            </a:pPr>
+            <a:r>
+              <a:rPr lang="en-US" sz="1600" dirty="0">
+                <a:solidFill>
+                  <a:srgbClr val="2D2D3A"/>
+                </a:solidFill>
+                <a:latin typeface="Times New Roman" pitchFamily="34" charset="0"/>
+                <a:ea typeface="Times New Roman" pitchFamily="34" charset="-122"/>
+                <a:cs typeface="Times New Roman" pitchFamily="34" charset="-120"/>
+              </a:rPr>
+              <a:t>Основные векторы по OWASP Top 10:</a:t>
+            </a:r>
+            <a:endParaRPr lang="en-US" sz="1600" dirty="0"/>
+          </a:p>
+          <a:p>
+            <a:pPr algn="l" indent="0" marL="0">
+              <a:buNone/>
+            </a:pPr>
+            <a:r>
+              <a:rPr lang="en-US" sz="1600" dirty="0">
+                <a:solidFill>
+                  <a:srgbClr val="2D2D3A"/>
+                </a:solidFill>
+                <a:latin typeface="Times New Roman" pitchFamily="34" charset="0"/>
+                <a:ea typeface="Times New Roman" pitchFamily="34" charset="-122"/>
+                <a:cs typeface="Times New Roman" pitchFamily="34" charset="-120"/>
+              </a:rPr>
+              <a:t>• SQL Injection: автоматические тесты шлют в API кавычки и специальные конструкции вроде `' OR 1=1 --`. Использование Drizzle параметризации гарантирует 100% защиту.</a:t>
+            </a:r>
+            <a:endParaRPr lang="en-US" sz="1600" dirty="0"/>
+          </a:p>
+          <a:p>
+            <a:pPr algn="l" indent="0" marL="0">
+              <a:buNone/>
+            </a:pPr>
+            <a:r>
+              <a:rPr lang="en-US" sz="1600" dirty="0">
+                <a:solidFill>
+                  <a:srgbClr val="2D2D3A"/>
+                </a:solidFill>
+                <a:latin typeface="Times New Roman" pitchFamily="34" charset="0"/>
+                <a:ea typeface="Times New Roman" pitchFamily="34" charset="-122"/>
+                <a:cs typeface="Times New Roman" pitchFamily="34" charset="-120"/>
+              </a:rPr>
+              <a:t>• Broken Authentication: проверка блокировки сессий при передаче истекших или сломанных JWT-токенов.</a:t>
+            </a:r>
+            <a:endParaRPr lang="en-US" sz="1600" dirty="0"/>
+          </a:p>
+          <a:p>
+            <a:pPr algn="l" indent="0" marL="0">
+              <a:buNone/>
+            </a:pPr>
+            <a:endParaRPr lang="en-US" sz="1600" dirty="0"/>
+          </a:p>
+          <a:p>
+            <a:pPr algn="l" indent="0" marL="0">
+              <a:buNone/>
+            </a:pPr>
+            <a:r>
+              <a:rPr lang="en-US" sz="1600" dirty="0">
+                <a:solidFill>
+                  <a:srgbClr val="2D2D3A"/>
+                </a:solidFill>
+                <a:latin typeface="Times New Roman" pitchFamily="34" charset="0"/>
+                <a:ea typeface="Times New Roman" pitchFamily="34" charset="-122"/>
+                <a:cs typeface="Times New Roman" pitchFamily="34" charset="-120"/>
+              </a:rPr>
+              <a:t>Защита файлов и утечек:</a:t>
+            </a:r>
+            <a:endParaRPr lang="en-US" sz="1600" dirty="0"/>
+          </a:p>
+          <a:p>
+            <a:pPr algn="l" indent="0" marL="0">
+              <a:buNone/>
+            </a:pPr>
+            <a:r>
+              <a:rPr lang="en-US" sz="1600" dirty="0">
+                <a:solidFill>
+                  <a:srgbClr val="2D2D3A"/>
+                </a:solidFill>
+                <a:latin typeface="Times New Roman" pitchFamily="34" charset="0"/>
+                <a:ea typeface="Times New Roman" pitchFamily="34" charset="-122"/>
+                <a:cs typeface="Times New Roman" pitchFamily="34" charset="-120"/>
+              </a:rPr>
+              <a:t>• Приватность вложений: тесты проверяют, что клиент Б не сможет прочитать вложения клиента А по прямой ссылке, так как S3 presigned-ссылки привязаны к сессиям конкретного пользователя.</a:t>
+            </a:r>
+            <a:endParaRPr lang="en-US" sz="1600" dirty="0"/>
+          </a:p>
+          <a:p>
+            <a:pPr algn="l" indent="0" marL="0">
+              <a:buNone/>
+            </a:pPr>
+            <a:r>
+              <a:rPr lang="en-US" sz="1600" dirty="0">
+                <a:solidFill>
+                  <a:srgbClr val="2D2D3A"/>
+                </a:solidFill>
+                <a:latin typeface="Times New Roman" pitchFamily="34" charset="0"/>
+                <a:ea typeface="Times New Roman" pitchFamily="34" charset="-122"/>
+                <a:cs typeface="Times New Roman" pitchFamily="34" charset="-120"/>
+              </a:rPr>
+              <a:t>• Маскирование паролей и логов: автоматический тест проверяет, что в логи NodeJS не улетают хэши и токены.</a:t>
+            </a:r>
+            <a:endParaRPr lang="en-US" sz="1600" dirty="0"/>
           </a:p>
         </p:txBody>
       </p:sp>

--- a/presentations/output/P6_Тестирование.pptx
+++ b/presentations/output/P6_Тестирование.pptx
@@ -3388,10 +3388,10 @@
           <a:ln/>
         </p:spPr>
         <p:txBody>
-          <a:bodyPr wrap="square" rtlCol="0" anchor="ctr"/>
-          <a:lstStyle/>
-          <a:p>
-            <a:pPr indent="0" marL="0">
+          <a:bodyPr wrap="square" rtlCol="0" anchor="t"/>
+          <a:lstStyle/>
+          <a:p>
+            <a:pPr algn="l" indent="0" marL="0">
               <a:buNone/>
             </a:pPr>
             <a:r>
@@ -3408,7 +3408,7 @@
             <a:endParaRPr lang="en-US" sz="1100" dirty="0"/>
           </a:p>
           <a:p>
-            <a:pPr indent="0" marL="0">
+            <a:pPr algn="l" indent="0" marL="0">
               <a:buNone/>
             </a:pPr>
             <a:r>
@@ -3425,7 +3425,7 @@
             <a:endParaRPr lang="en-US" sz="1100" dirty="0"/>
           </a:p>
           <a:p>
-            <a:pPr indent="0" marL="0">
+            <a:pPr algn="l" indent="0" marL="0">
               <a:buNone/>
             </a:pPr>
             <a:r>
@@ -3442,7 +3442,7 @@
             <a:endParaRPr lang="en-US" sz="1100" dirty="0"/>
           </a:p>
           <a:p>
-            <a:pPr indent="0" marL="0">
+            <a:pPr algn="l" indent="0" marL="0">
               <a:buNone/>
             </a:pPr>
             <a:r>
